--- a/tuts/prezzo/antupy.pptx
+++ b/tuts/prezzo/antupy.pptx
@@ -5,14 +5,17 @@
     <p:sldMasterId id="2147483762" r:id="rId1"/>
   </p:sldMasterIdLst>
   <p:sldIdLst>
-    <p:sldId id="257" r:id="rId2"/>
+    <p:sldId id="272" r:id="rId2"/>
     <p:sldId id="258" r:id="rId3"/>
-    <p:sldId id="260" r:id="rId4"/>
-    <p:sldId id="263" r:id="rId5"/>
-    <p:sldId id="264" r:id="rId6"/>
-    <p:sldId id="259" r:id="rId7"/>
-    <p:sldId id="261" r:id="rId8"/>
-    <p:sldId id="262" r:id="rId9"/>
+    <p:sldId id="265" r:id="rId4"/>
+    <p:sldId id="267" r:id="rId5"/>
+    <p:sldId id="266" r:id="rId6"/>
+    <p:sldId id="268" r:id="rId7"/>
+    <p:sldId id="270" r:id="rId8"/>
+    <p:sldId id="271" r:id="rId9"/>
+    <p:sldId id="260" r:id="rId10"/>
+    <p:sldId id="262" r:id="rId11"/>
+    <p:sldId id="261" r:id="rId12"/>
   </p:sldIdLst>
   <p:sldSz cx="12192000" cy="6858000"/>
   <p:notesSz cx="6858000" cy="9144000"/>
@@ -130,22 +133,6 @@
 <file path=ppt/changesInfos/changesInfo1.xml><?xml version="1.0" encoding="utf-8"?>
 <pc:chgInfo xmlns:a="http://schemas.openxmlformats.org/drawingml/2006/main" xmlns:r="http://schemas.openxmlformats.org/officeDocument/2006/relationships" xmlns:ac="http://schemas.microsoft.com/office/drawing/2013/main/command" xmlns:pc="http://schemas.microsoft.com/office/powerpoint/2013/main/command">
   <pc:docChgLst>
-    <pc:chgData name="David Saldivia Salazar" userId="7702d5bea18b5005" providerId="LiveId" clId="{C05DD3A2-369D-4273-8BB2-5569523B78F9}"/>
-    <pc:docChg chg="custSel modSld">
-      <pc:chgData name="David Saldivia Salazar" userId="7702d5bea18b5005" providerId="LiveId" clId="{C05DD3A2-369D-4273-8BB2-5569523B78F9}" dt="2024-09-02T04:44:40.064" v="85" actId="20577"/>
-      <pc:docMkLst>
-        <pc:docMk/>
-      </pc:docMkLst>
-      <pc:sldChg chg="modSp mod">
-        <pc:chgData name="David Saldivia Salazar" userId="7702d5bea18b5005" providerId="LiveId" clId="{C05DD3A2-369D-4273-8BB2-5569523B78F9}" dt="2024-09-02T04:44:40.064" v="85" actId="20577"/>
-        <pc:sldMkLst>
-          <pc:docMk/>
-          <pc:sldMk cId="2263721948" sldId="259"/>
-        </pc:sldMkLst>
-      </pc:sldChg>
-    </pc:docChg>
-  </pc:docChgLst>
-  <pc:docChgLst>
     <pc:chgData name="David Saldivia Salazar" userId="7702d5bea18b5005" providerId="Windows Live" clId="Web-{DEE3EBF8-C64F-44DD-A996-26950E229D3F}"/>
     <pc:docChg chg="modSld">
       <pc:chgData name="David Saldivia Salazar" userId="7702d5bea18b5005" providerId="Windows Live" clId="Web-{DEE3EBF8-C64F-44DD-A996-26950E229D3F}" dt="2024-12-16T14:53:21.694" v="3" actId="20577"/>
@@ -199,6 +186,22 @@
       </pc:sldChg>
     </pc:docChg>
   </pc:docChgLst>
+  <pc:docChgLst>
+    <pc:chgData name="David Saldivia Salazar" userId="7702d5bea18b5005" providerId="LiveId" clId="{C05DD3A2-369D-4273-8BB2-5569523B78F9}"/>
+    <pc:docChg chg="custSel modSld">
+      <pc:chgData name="David Saldivia Salazar" userId="7702d5bea18b5005" providerId="LiveId" clId="{C05DD3A2-369D-4273-8BB2-5569523B78F9}" dt="2024-09-02T04:44:40.064" v="85" actId="20577"/>
+      <pc:docMkLst>
+        <pc:docMk/>
+      </pc:docMkLst>
+      <pc:sldChg chg="modSp mod">
+        <pc:chgData name="David Saldivia Salazar" userId="7702d5bea18b5005" providerId="LiveId" clId="{C05DD3A2-369D-4273-8BB2-5569523B78F9}" dt="2024-09-02T04:44:40.064" v="85" actId="20577"/>
+        <pc:sldMkLst>
+          <pc:docMk/>
+          <pc:sldMk cId="2263721948" sldId="259"/>
+        </pc:sldMkLst>
+      </pc:sldChg>
+    </pc:docChg>
+  </pc:docChgLst>
 </pc:chgInfo>
 </file>
 
@@ -351,7 +354,7 @@
           <a:p>
             <a:fld id="{BA80F017-51D9-403D-A3B1-D86CBEE1772E}" type="datetimeFigureOut">
               <a:rPr lang="en-AU" smtClean="0"/>
-              <a:t>19/05/2025</a:t>
+              <a:t>17/04/2026</a:t>
             </a:fld>
             <a:endParaRPr lang="en-AU"/>
           </a:p>
@@ -551,7 +554,7 @@
           <a:p>
             <a:fld id="{BA80F017-51D9-403D-A3B1-D86CBEE1772E}" type="datetimeFigureOut">
               <a:rPr lang="en-AU" smtClean="0"/>
-              <a:t>19/05/2025</a:t>
+              <a:t>17/04/2026</a:t>
             </a:fld>
             <a:endParaRPr lang="en-AU"/>
           </a:p>
@@ -761,7 +764,7 @@
           <a:p>
             <a:fld id="{BA80F017-51D9-403D-A3B1-D86CBEE1772E}" type="datetimeFigureOut">
               <a:rPr lang="en-AU" smtClean="0"/>
-              <a:t>19/05/2025</a:t>
+              <a:t>17/04/2026</a:t>
             </a:fld>
             <a:endParaRPr lang="en-AU"/>
           </a:p>
@@ -961,7 +964,7 @@
           <a:p>
             <a:fld id="{BA80F017-51D9-403D-A3B1-D86CBEE1772E}" type="datetimeFigureOut">
               <a:rPr lang="en-AU" smtClean="0"/>
-              <a:t>19/05/2025</a:t>
+              <a:t>17/04/2026</a:t>
             </a:fld>
             <a:endParaRPr lang="en-AU"/>
           </a:p>
@@ -1237,7 +1240,7 @@
           <a:p>
             <a:fld id="{BA80F017-51D9-403D-A3B1-D86CBEE1772E}" type="datetimeFigureOut">
               <a:rPr lang="en-AU" smtClean="0"/>
-              <a:t>19/05/2025</a:t>
+              <a:t>17/04/2026</a:t>
             </a:fld>
             <a:endParaRPr lang="en-AU"/>
           </a:p>
@@ -1505,7 +1508,7 @@
           <a:p>
             <a:fld id="{BA80F017-51D9-403D-A3B1-D86CBEE1772E}" type="datetimeFigureOut">
               <a:rPr lang="en-AU" smtClean="0"/>
-              <a:t>19/05/2025</a:t>
+              <a:t>17/04/2026</a:t>
             </a:fld>
             <a:endParaRPr lang="en-AU"/>
           </a:p>
@@ -1920,7 +1923,7 @@
           <a:p>
             <a:fld id="{BA80F017-51D9-403D-A3B1-D86CBEE1772E}" type="datetimeFigureOut">
               <a:rPr lang="en-AU" smtClean="0"/>
-              <a:t>19/05/2025</a:t>
+              <a:t>17/04/2026</a:t>
             </a:fld>
             <a:endParaRPr lang="en-AU"/>
           </a:p>
@@ -2062,7 +2065,7 @@
           <a:p>
             <a:fld id="{BA80F017-51D9-403D-A3B1-D86CBEE1772E}" type="datetimeFigureOut">
               <a:rPr lang="en-AU" smtClean="0"/>
-              <a:t>19/05/2025</a:t>
+              <a:t>17/04/2026</a:t>
             </a:fld>
             <a:endParaRPr lang="en-AU"/>
           </a:p>
@@ -2175,7 +2178,7 @@
           <a:p>
             <a:fld id="{BA80F017-51D9-403D-A3B1-D86CBEE1772E}" type="datetimeFigureOut">
               <a:rPr lang="en-AU" smtClean="0"/>
-              <a:t>19/05/2025</a:t>
+              <a:t>17/04/2026</a:t>
             </a:fld>
             <a:endParaRPr lang="en-AU"/>
           </a:p>
@@ -2488,7 +2491,7 @@
           <a:p>
             <a:fld id="{BA80F017-51D9-403D-A3B1-D86CBEE1772E}" type="datetimeFigureOut">
               <a:rPr lang="en-AU" smtClean="0"/>
-              <a:t>19/05/2025</a:t>
+              <a:t>17/04/2026</a:t>
             </a:fld>
             <a:endParaRPr lang="en-AU"/>
           </a:p>
@@ -2777,7 +2780,7 @@
           <a:p>
             <a:fld id="{BA80F017-51D9-403D-A3B1-D86CBEE1772E}" type="datetimeFigureOut">
               <a:rPr lang="en-AU" smtClean="0"/>
-              <a:t>19/05/2025</a:t>
+              <a:t>17/04/2026</a:t>
             </a:fld>
             <a:endParaRPr lang="en-AU"/>
           </a:p>
@@ -3020,7 +3023,7 @@
           <a:p>
             <a:fld id="{BA80F017-51D9-403D-A3B1-D86CBEE1772E}" type="datetimeFigureOut">
               <a:rPr lang="en-AU" smtClean="0"/>
-              <a:t>19/05/2025</a:t>
+              <a:t>17/04/2026</a:t>
             </a:fld>
             <a:endParaRPr lang="en-AU"/>
           </a:p>
@@ -3439,18 +3442,18 @@
       </p:grpSpPr>
       <p:sp>
         <p:nvSpPr>
-          <p:cNvPr id="2" name="Title 1">
-            <a:extLst>
-              <a:ext uri="{FF2B5EF4-FFF2-40B4-BE49-F238E27FC236}">
-                <a16:creationId xmlns:a16="http://schemas.microsoft.com/office/drawing/2014/main" id="{A402F935-7AD0-D15A-3968-91D3F935F439}"/>
-              </a:ext>
-            </a:extLst>
-          </p:cNvPr>
-          <p:cNvSpPr>
-            <a:spLocks noGrp="1"/>
-          </p:cNvSpPr>
-          <p:nvPr>
-            <p:ph type="title"/>
+          <p:cNvPr id="4" name="Title 3">
+            <a:extLst>
+              <a:ext uri="{FF2B5EF4-FFF2-40B4-BE49-F238E27FC236}">
+                <a16:creationId xmlns:a16="http://schemas.microsoft.com/office/drawing/2014/main" id="{A762EFE5-DBCD-6923-D9C1-734F2961A067}"/>
+              </a:ext>
+            </a:extLst>
+          </p:cNvPr>
+          <p:cNvSpPr>
+            <a:spLocks noGrp="1"/>
+          </p:cNvSpPr>
+          <p:nvPr>
+            <p:ph type="ctrTitle"/>
           </p:nvPr>
         </p:nvSpPr>
         <p:spPr/>
@@ -3459,145 +3462,263 @@
           <a:lstStyle/>
           <a:p>
             <a:r>
-              <a:rPr lang="en-US" dirty="0"/>
-              <a:t>my ideal research plan</a:t>
-            </a:r>
-            <a:endParaRPr lang="en-AU" dirty="0"/>
-          </a:p>
-        </p:txBody>
-      </p:sp>
-      <p:sp>
-        <p:nvSpPr>
-          <p:cNvPr id="3" name="Content Placeholder 2">
-            <a:extLst>
-              <a:ext uri="{FF2B5EF4-FFF2-40B4-BE49-F238E27FC236}">
-                <a16:creationId xmlns:a16="http://schemas.microsoft.com/office/drawing/2014/main" id="{BB7C6D76-08D1-11E9-67DC-F1DD43A604DC}"/>
-              </a:ext>
-            </a:extLst>
-          </p:cNvPr>
-          <p:cNvSpPr>
-            <a:spLocks noGrp="1"/>
-          </p:cNvSpPr>
-          <p:nvPr>
-            <p:ph idx="1"/>
+              <a:rPr lang="en-US" noProof="1">
+                <a:solidFill>
+                  <a:srgbClr val="FFCC99"/>
+                </a:solidFill>
+              </a:rPr>
+              <a:t>antu</a:t>
+            </a:r>
+            <a:r>
+              <a:rPr lang="en-US" noProof="1">
+                <a:solidFill>
+                  <a:schemeClr val="accent5"/>
+                </a:solidFill>
+              </a:rPr>
+              <a:t>py</a:t>
+            </a:r>
+            <a:endParaRPr lang="en-US" noProof="1"/>
+          </a:p>
+        </p:txBody>
+      </p:sp>
+      <p:sp>
+        <p:nvSpPr>
+          <p:cNvPr id="5" name="Subtitle 4">
+            <a:extLst>
+              <a:ext uri="{FF2B5EF4-FFF2-40B4-BE49-F238E27FC236}">
+                <a16:creationId xmlns:a16="http://schemas.microsoft.com/office/drawing/2014/main" id="{503C1AD0-79E7-62AB-91B9-BF41C09A4DD3}"/>
+              </a:ext>
+            </a:extLst>
+          </p:cNvPr>
+          <p:cNvSpPr>
+            <a:spLocks noGrp="1"/>
+          </p:cNvSpPr>
+          <p:nvPr>
+            <p:ph type="subTitle" idx="1"/>
           </p:nvPr>
         </p:nvSpPr>
         <p:spPr/>
         <p:txBody>
-          <a:bodyPr>
-            <a:normAutofit/>
-          </a:bodyPr>
-          <a:lstStyle/>
-          <a:p>
-            <a:r>
-              <a:rPr lang="en-US" dirty="0"/>
-              <a:t>publish two papers from my </a:t>
-            </a:r>
-            <a:r>
-              <a:rPr lang="en-US" dirty="0" err="1"/>
-              <a:t>phd</a:t>
-            </a:r>
-            <a:r>
-              <a:rPr lang="en-US" dirty="0"/>
-              <a:t>:</a:t>
-            </a:r>
-          </a:p>
-          <a:p>
-            <a:pPr lvl="1"/>
-            <a:r>
-              <a:rPr lang="en-US" dirty="0"/>
-              <a:t>chapter 5 (almost ready)</a:t>
-            </a:r>
-          </a:p>
-          <a:p>
-            <a:pPr lvl="1"/>
-            <a:r>
-              <a:rPr lang="en-US" dirty="0"/>
-              <a:t>chapter 6-7 (half-way)</a:t>
-            </a:r>
-          </a:p>
-          <a:p>
-            <a:pPr lvl="1"/>
-            <a:endParaRPr lang="en-US" dirty="0"/>
-          </a:p>
-          <a:p>
-            <a:r>
-              <a:rPr lang="en-US" dirty="0"/>
-              <a:t>develop </a:t>
-            </a:r>
-            <a:r>
-              <a:rPr lang="en-US" dirty="0" err="1"/>
-              <a:t>antupy</a:t>
-            </a:r>
-            <a:r>
-              <a:rPr lang="en-AU" dirty="0"/>
-              <a:t>:</a:t>
-            </a:r>
-          </a:p>
-          <a:p>
-            <a:pPr lvl="1"/>
-            <a:r>
-              <a:rPr lang="en-AU" dirty="0"/>
-              <a:t>energy system analyser </a:t>
-            </a:r>
-            <a:r>
-              <a:rPr lang="en-AU"/>
-              <a:t>for multi-paradigm </a:t>
-            </a:r>
-            <a:r>
-              <a:rPr lang="en-AU" dirty="0"/>
-              <a:t>processes.</a:t>
-            </a:r>
-          </a:p>
-          <a:p>
-            <a:pPr lvl="1"/>
-            <a:r>
-              <a:rPr lang="en-AU" dirty="0" err="1"/>
-              <a:t>antu</a:t>
-            </a:r>
-            <a:r>
-              <a:rPr lang="en-AU" dirty="0"/>
-              <a:t>-: “</a:t>
-            </a:r>
-            <a:r>
-              <a:rPr lang="en-AU" i="1" dirty="0"/>
-              <a:t>sun</a:t>
-            </a:r>
-            <a:r>
-              <a:rPr lang="en-AU" dirty="0"/>
-              <a:t>” in </a:t>
-            </a:r>
-            <a:r>
-              <a:rPr lang="en-AU" dirty="0" err="1"/>
-              <a:t>mapudungún</a:t>
-            </a:r>
-            <a:r>
-              <a:rPr lang="en-AU" dirty="0"/>
-              <a:t>. –</a:t>
-            </a:r>
-            <a:r>
-              <a:rPr lang="en-AU" dirty="0" err="1"/>
-              <a:t>py</a:t>
-            </a:r>
-            <a:r>
-              <a:rPr lang="en-AU" dirty="0"/>
-              <a:t>: python package.</a:t>
-            </a:r>
-          </a:p>
-          <a:p>
-            <a:pPr lvl="1"/>
-            <a:endParaRPr lang="en-AU" dirty="0"/>
-          </a:p>
-          <a:p>
-            <a:pPr lvl="1"/>
-            <a:endParaRPr lang="en-AU" dirty="0"/>
+          <a:bodyPr/>
+          <a:lstStyle/>
+          <a:p>
+            <a:r>
+              <a:rPr lang="en-US" noProof="1"/>
+              <a:t>by david </a:t>
+            </a:r>
+            <a:r>
+              <a:rPr lang="en-US" b="1" noProof="1"/>
+              <a:t>saldivia</a:t>
+            </a:r>
+            <a:r>
+              <a:rPr lang="en-US" noProof="1"/>
+              <a:t> salazar</a:t>
+            </a:r>
+          </a:p>
+          <a:p>
+            <a:r>
+              <a:rPr lang="en-US" sz="2000" noProof="1"/>
+              <a:t>mechanical engineer, phd in renewable energy engineering</a:t>
+            </a:r>
           </a:p>
         </p:txBody>
       </p:sp>
     </p:spTree>
     <p:extLst>
       <p:ext uri="{BB962C8B-B14F-4D97-AF65-F5344CB8AC3E}">
-        <p14:creationId xmlns:p14="http://schemas.microsoft.com/office/powerpoint/2010/main" val="2676536960"/>
+        <p14:creationId xmlns:p14="http://schemas.microsoft.com/office/powerpoint/2010/main" val="1550108319"/>
+      </p:ext>
+    </p:extLst>
+  </p:cSld>
+  <p:clrMapOvr>
+    <a:masterClrMapping/>
+  </p:clrMapOvr>
+</p:sld>
+</file>
+
+<file path=ppt/slides/slide10.xml><?xml version="1.0" encoding="utf-8"?>
+<p:sld xmlns:a="http://schemas.openxmlformats.org/drawingml/2006/main" xmlns:r="http://schemas.openxmlformats.org/officeDocument/2006/relationships" xmlns:p="http://schemas.openxmlformats.org/presentationml/2006/main">
+  <p:cSld>
+    <p:spTree>
+      <p:nvGrpSpPr>
+        <p:cNvPr id="1" name=""/>
+        <p:cNvGrpSpPr/>
+        <p:nvPr/>
+      </p:nvGrpSpPr>
+      <p:grpSpPr>
+        <a:xfrm>
+          <a:off x="0" y="0"/>
+          <a:ext cx="0" cy="0"/>
+          <a:chOff x="0" y="0"/>
+          <a:chExt cx="0" cy="0"/>
+        </a:xfrm>
+      </p:grpSpPr>
+      <p:pic>
+        <p:nvPicPr>
+          <p:cNvPr id="5" name="Content Placeholder 4">
+            <a:extLst>
+              <a:ext uri="{FF2B5EF4-FFF2-40B4-BE49-F238E27FC236}">
+                <a16:creationId xmlns:a16="http://schemas.microsoft.com/office/drawing/2014/main" id="{9AC75E69-6F6E-2DEF-316C-345B0C23C294}"/>
+              </a:ext>
+            </a:extLst>
+          </p:cNvPr>
+          <p:cNvPicPr>
+            <a:picLocks noGrp="1" noChangeAspect="1"/>
+          </p:cNvPicPr>
+          <p:nvPr>
+            <p:ph idx="1"/>
+          </p:nvPr>
+        </p:nvPicPr>
+        <p:blipFill>
+          <a:blip r:embed="rId2"/>
+          <a:stretch>
+            <a:fillRect/>
+          </a:stretch>
+        </p:blipFill>
+        <p:spPr>
+          <a:xfrm>
+            <a:off x="466135" y="554182"/>
+            <a:ext cx="11259730" cy="3867708"/>
+          </a:xfrm>
+          <a:prstGeom prst="rect">
+            <a:avLst/>
+          </a:prstGeom>
+        </p:spPr>
+      </p:pic>
+    </p:spTree>
+    <p:extLst>
+      <p:ext uri="{BB962C8B-B14F-4D97-AF65-F5344CB8AC3E}">
+        <p14:creationId xmlns:p14="http://schemas.microsoft.com/office/powerpoint/2010/main" val="2359446929"/>
+      </p:ext>
+    </p:extLst>
+  </p:cSld>
+  <p:clrMapOvr>
+    <a:masterClrMapping/>
+  </p:clrMapOvr>
+</p:sld>
+</file>
+
+<file path=ppt/slides/slide11.xml><?xml version="1.0" encoding="utf-8"?>
+<p:sld xmlns:a="http://schemas.openxmlformats.org/drawingml/2006/main" xmlns:r="http://schemas.openxmlformats.org/officeDocument/2006/relationships" xmlns:p="http://schemas.openxmlformats.org/presentationml/2006/main">
+  <p:cSld>
+    <p:spTree>
+      <p:nvGrpSpPr>
+        <p:cNvPr id="1" name=""/>
+        <p:cNvGrpSpPr/>
+        <p:nvPr/>
+      </p:nvGrpSpPr>
+      <p:grpSpPr>
+        <a:xfrm>
+          <a:off x="0" y="0"/>
+          <a:ext cx="0" cy="0"/>
+          <a:chOff x="0" y="0"/>
+          <a:chExt cx="0" cy="0"/>
+        </a:xfrm>
+      </p:grpSpPr>
+      <p:sp>
+        <p:nvSpPr>
+          <p:cNvPr id="2" name="Title 1">
+            <a:extLst>
+              <a:ext uri="{FF2B5EF4-FFF2-40B4-BE49-F238E27FC236}">
+                <a16:creationId xmlns:a16="http://schemas.microsoft.com/office/drawing/2014/main" id="{A402F935-7AD0-D15A-3968-91D3F935F439}"/>
+              </a:ext>
+            </a:extLst>
+          </p:cNvPr>
+          <p:cNvSpPr>
+            <a:spLocks noGrp="1"/>
+          </p:cNvSpPr>
+          <p:nvPr>
+            <p:ph type="title"/>
+          </p:nvPr>
+        </p:nvSpPr>
+        <p:spPr/>
+        <p:txBody>
+          <a:bodyPr/>
+          <a:lstStyle/>
+          <a:p>
+            <a:r>
+              <a:rPr lang="en-US" noProof="1"/>
+              <a:t>antupy wishlist</a:t>
+            </a:r>
+          </a:p>
+        </p:txBody>
+      </p:sp>
+      <p:sp>
+        <p:nvSpPr>
+          <p:cNvPr id="3" name="Content Placeholder 2">
+            <a:extLst>
+              <a:ext uri="{FF2B5EF4-FFF2-40B4-BE49-F238E27FC236}">
+                <a16:creationId xmlns:a16="http://schemas.microsoft.com/office/drawing/2014/main" id="{BB7C6D76-08D1-11E9-67DC-F1DD43A604DC}"/>
+              </a:ext>
+            </a:extLst>
+          </p:cNvPr>
+          <p:cNvSpPr>
+            <a:spLocks noGrp="1"/>
+          </p:cNvSpPr>
+          <p:nvPr>
+            <p:ph idx="1"/>
+          </p:nvPr>
+        </p:nvSpPr>
+        <p:spPr/>
+        <p:txBody>
+          <a:bodyPr>
+            <a:normAutofit lnSpcReduction="10000"/>
+          </a:bodyPr>
+          <a:lstStyle/>
+          <a:p>
+            <a:r>
+              <a:rPr lang="en-US" noProof="1"/>
+              <a:t>dispatch model</a:t>
+            </a:r>
+          </a:p>
+          <a:p>
+            <a:r>
+              <a:rPr lang="en-US" noProof="1"/>
+              <a:t>create life-cycle analysis (.lca) module</a:t>
+            </a:r>
+          </a:p>
+          <a:p>
+            <a:r>
+              <a:rPr lang="en-US" noProof="1"/>
+              <a:t>create policy making process module</a:t>
+            </a:r>
+          </a:p>
+          <a:p>
+            <a:r>
+              <a:rPr lang="en-US" noProof="1"/>
+              <a:t>expand weather module</a:t>
+            </a:r>
+          </a:p>
+          <a:p>
+            <a:r>
+              <a:rPr lang="en-US" noProof="1"/>
+              <a:t>geo module (or gis module). integrate python with other open-source gis tools.</a:t>
+            </a:r>
+          </a:p>
+          <a:p>
+            <a:r>
+              <a:rPr lang="en-US" noProof="1"/>
+              <a:t>expand stochastic module.</a:t>
+            </a:r>
+          </a:p>
+          <a:p>
+            <a:r>
+              <a:rPr lang="en-US" noProof="1"/>
+              <a:t>develop full python</a:t>
+            </a:r>
+          </a:p>
+          <a:p>
+            <a:r>
+              <a:rPr lang="en-US" noProof="1"/>
+              <a:t>education module</a:t>
+            </a:r>
+          </a:p>
+        </p:txBody>
+      </p:sp>
+    </p:spTree>
+    <p:extLst>
+      <p:ext uri="{BB962C8B-B14F-4D97-AF65-F5344CB8AC3E}">
+        <p14:creationId xmlns:p14="http://schemas.microsoft.com/office/powerpoint/2010/main" val="2484413694"/>
       </p:ext>
     </p:extLst>
   </p:cSld>
@@ -3646,10 +3767,21 @@
           <a:lstStyle/>
           <a:p>
             <a:r>
-              <a:rPr lang="en-US" dirty="0" err="1"/>
-              <a:t>antupy</a:t>
-            </a:r>
-            <a:endParaRPr lang="en-AU" dirty="0"/>
+              <a:rPr lang="en-US" noProof="1">
+                <a:solidFill>
+                  <a:srgbClr val="FFCC99"/>
+                </a:solidFill>
+              </a:rPr>
+              <a:t>antu</a:t>
+            </a:r>
+            <a:r>
+              <a:rPr lang="en-US" noProof="1">
+                <a:solidFill>
+                  <a:schemeClr val="accent5"/>
+                </a:solidFill>
+              </a:rPr>
+              <a:t>py</a:t>
+            </a:r>
           </a:p>
         </p:txBody>
       </p:sp>
@@ -3669,7 +3801,12 @@
             <p:ph idx="1"/>
           </p:nvPr>
         </p:nvSpPr>
-        <p:spPr/>
+        <p:spPr>
+          <a:xfrm>
+            <a:off x="838200" y="1825625"/>
+            <a:ext cx="10515600" cy="2362918"/>
+          </a:xfrm>
+        </p:spPr>
         <p:txBody>
           <a:bodyPr>
             <a:normAutofit/>
@@ -3677,101 +3814,730 @@
           <a:lstStyle/>
           <a:p>
             <a:r>
-              <a:rPr lang="en-US" dirty="0" err="1"/>
-              <a:t>antupy</a:t>
-            </a:r>
-            <a:r>
-              <a:rPr lang="en-AU" dirty="0"/>
-              <a:t>:</a:t>
-            </a:r>
-          </a:p>
-          <a:p>
-            <a:pPr lvl="1"/>
-            <a:r>
-              <a:rPr lang="en-AU" dirty="0"/>
-              <a:t>energy system analysis for multi-paradigm decision-making processes.</a:t>
-            </a:r>
-          </a:p>
-          <a:p>
-            <a:pPr lvl="1"/>
-            <a:r>
-              <a:rPr lang="en-AU" dirty="0" err="1"/>
-              <a:t>antu</a:t>
-            </a:r>
-            <a:r>
-              <a:rPr lang="en-AU" dirty="0"/>
-              <a:t>-: “</a:t>
-            </a:r>
-            <a:r>
-              <a:rPr lang="en-AU" i="1" dirty="0"/>
-              <a:t>sun</a:t>
-            </a:r>
-            <a:r>
-              <a:rPr lang="en-AU" dirty="0"/>
-              <a:t>” in </a:t>
-            </a:r>
-            <a:r>
-              <a:rPr lang="en-AU" dirty="0" err="1">
+              <a:rPr lang="en-US" noProof="1"/>
+              <a:t>A python toolkit for (energy) engineering simulations.</a:t>
+            </a:r>
+          </a:p>
+          <a:p>
+            <a:endParaRPr lang="en-US" noProof="1"/>
+          </a:p>
+          <a:p>
+            <a:r>
+              <a:rPr lang="en-US" i="1" noProof="1"/>
+              <a:t>antü</a:t>
+            </a:r>
+            <a:r>
+              <a:rPr lang="en-US" noProof="1"/>
+              <a:t>: sun in </a:t>
+            </a:r>
+            <a:r>
+              <a:rPr lang="en-US" noProof="1">
                 <a:hlinkClick r:id="rId2"/>
               </a:rPr>
-              <a:t>mapudungún</a:t>
-            </a:r>
-            <a:r>
-              <a:rPr lang="en-AU" dirty="0"/>
-              <a:t>. –</a:t>
-            </a:r>
-            <a:r>
-              <a:rPr lang="en-AU" dirty="0" err="1"/>
+              <a:t>mapuzugun</a:t>
+            </a:r>
+            <a:r>
+              <a:rPr lang="en-US" noProof="1"/>
+              <a:t>.</a:t>
+            </a:r>
+          </a:p>
+          <a:p>
+            <a:r>
+              <a:rPr lang="en-US" i="1" noProof="1"/>
               <a:t>py</a:t>
             </a:r>
             <a:r>
-              <a:rPr lang="en-AU" dirty="0"/>
+              <a:rPr lang="en-US" noProof="1"/>
               <a:t>: python package.</a:t>
             </a:r>
           </a:p>
           <a:p>
             <a:pPr lvl="1"/>
-            <a:r>
-              <a:rPr lang="en-AU" dirty="0"/>
-              <a:t> influences:</a:t>
-            </a:r>
-          </a:p>
-          <a:p>
-            <a:pPr lvl="2"/>
-            <a:r>
-              <a:rPr lang="en-AU" dirty="0"/>
+            <a:endParaRPr lang="en-US" noProof="1"/>
+          </a:p>
+          <a:p>
+            <a:pPr lvl="1"/>
+            <a:endParaRPr lang="en-US" noProof="1"/>
+          </a:p>
+        </p:txBody>
+      </p:sp>
+      <p:sp>
+        <p:nvSpPr>
+          <p:cNvPr id="8" name="Content Placeholder 2">
+            <a:extLst>
+              <a:ext uri="{FF2B5EF4-FFF2-40B4-BE49-F238E27FC236}">
+                <a16:creationId xmlns:a16="http://schemas.microsoft.com/office/drawing/2014/main" id="{24A82E7B-9930-D643-2527-F05F2F94AF9E}"/>
+              </a:ext>
+            </a:extLst>
+          </p:cNvPr>
+          <p:cNvSpPr txBox="1">
+            <a:spLocks/>
+          </p:cNvSpPr>
+          <p:nvPr/>
+        </p:nvSpPr>
+        <p:spPr>
+          <a:xfrm>
+            <a:off x="8938751" y="4477649"/>
+            <a:ext cx="2653481" cy="1485618"/>
+          </a:xfrm>
+          <a:prstGeom prst="rect">
+            <a:avLst/>
+          </a:prstGeom>
+        </p:spPr>
+        <p:txBody>
+          <a:bodyPr vert="horz" lIns="91440" tIns="45720" rIns="91440" bIns="45720" rtlCol="0">
+            <a:normAutofit/>
+          </a:bodyPr>
+          <a:lstStyle>
+            <a:lvl1pPr marL="228600" indent="-228600" algn="l" defTabSz="914400" rtl="0" eaLnBrk="1" latinLnBrk="0" hangingPunct="1">
+              <a:lnSpc>
+                <a:spcPct val="90000"/>
+              </a:lnSpc>
+              <a:spcBef>
+                <a:spcPts val="1000"/>
+              </a:spcBef>
+              <a:buFont typeface="Arial" panose="020B0604020202020204" pitchFamily="34" charset="0"/>
+              <a:buChar char="•"/>
+              <a:defRPr sz="2800" kern="1200">
+                <a:solidFill>
+                  <a:schemeClr val="tx1"/>
+                </a:solidFill>
+                <a:latin typeface="+mn-lt"/>
+                <a:ea typeface="+mn-ea"/>
+                <a:cs typeface="+mn-cs"/>
+              </a:defRPr>
+            </a:lvl1pPr>
+            <a:lvl2pPr marL="685800" indent="-228600" algn="l" defTabSz="914400" rtl="0" eaLnBrk="1" latinLnBrk="0" hangingPunct="1">
+              <a:lnSpc>
+                <a:spcPct val="90000"/>
+              </a:lnSpc>
+              <a:spcBef>
+                <a:spcPts val="500"/>
+              </a:spcBef>
+              <a:buFont typeface="Arial" panose="020B0604020202020204" pitchFamily="34" charset="0"/>
+              <a:buChar char="•"/>
+              <a:defRPr sz="2400" kern="1200">
+                <a:solidFill>
+                  <a:schemeClr val="tx1"/>
+                </a:solidFill>
+                <a:latin typeface="+mn-lt"/>
+                <a:ea typeface="+mn-ea"/>
+                <a:cs typeface="+mn-cs"/>
+              </a:defRPr>
+            </a:lvl2pPr>
+            <a:lvl3pPr marL="1143000" indent="-228600" algn="l" defTabSz="914400" rtl="0" eaLnBrk="1" latinLnBrk="0" hangingPunct="1">
+              <a:lnSpc>
+                <a:spcPct val="90000"/>
+              </a:lnSpc>
+              <a:spcBef>
+                <a:spcPts val="500"/>
+              </a:spcBef>
+              <a:buFont typeface="Arial" panose="020B0604020202020204" pitchFamily="34" charset="0"/>
+              <a:buChar char="•"/>
+              <a:defRPr sz="2000" kern="1200">
+                <a:solidFill>
+                  <a:schemeClr val="tx1"/>
+                </a:solidFill>
+                <a:latin typeface="+mn-lt"/>
+                <a:ea typeface="+mn-ea"/>
+                <a:cs typeface="+mn-cs"/>
+              </a:defRPr>
+            </a:lvl3pPr>
+            <a:lvl4pPr marL="1600200" indent="-228600" algn="l" defTabSz="914400" rtl="0" eaLnBrk="1" latinLnBrk="0" hangingPunct="1">
+              <a:lnSpc>
+                <a:spcPct val="90000"/>
+              </a:lnSpc>
+              <a:spcBef>
+                <a:spcPts val="500"/>
+              </a:spcBef>
+              <a:buFont typeface="Arial" panose="020B0604020202020204" pitchFamily="34" charset="0"/>
+              <a:buChar char="•"/>
+              <a:defRPr sz="1800" kern="1200">
+                <a:solidFill>
+                  <a:schemeClr val="tx1"/>
+                </a:solidFill>
+                <a:latin typeface="+mn-lt"/>
+                <a:ea typeface="+mn-ea"/>
+                <a:cs typeface="+mn-cs"/>
+              </a:defRPr>
+            </a:lvl4pPr>
+            <a:lvl5pPr marL="2057400" indent="-228600" algn="l" defTabSz="914400" rtl="0" eaLnBrk="1" latinLnBrk="0" hangingPunct="1">
+              <a:lnSpc>
+                <a:spcPct val="90000"/>
+              </a:lnSpc>
+              <a:spcBef>
+                <a:spcPts val="500"/>
+              </a:spcBef>
+              <a:buFont typeface="Arial" panose="020B0604020202020204" pitchFamily="34" charset="0"/>
+              <a:buChar char="•"/>
+              <a:defRPr sz="1800" kern="1200">
+                <a:solidFill>
+                  <a:schemeClr val="tx1"/>
+                </a:solidFill>
+                <a:latin typeface="+mn-lt"/>
+                <a:ea typeface="+mn-ea"/>
+                <a:cs typeface="+mn-cs"/>
+              </a:defRPr>
+            </a:lvl5pPr>
+            <a:lvl6pPr marL="2514600" indent="-228600" algn="l" defTabSz="914400" rtl="0" eaLnBrk="1" latinLnBrk="0" hangingPunct="1">
+              <a:lnSpc>
+                <a:spcPct val="90000"/>
+              </a:lnSpc>
+              <a:spcBef>
+                <a:spcPts val="500"/>
+              </a:spcBef>
+              <a:buFont typeface="Arial" panose="020B0604020202020204" pitchFamily="34" charset="0"/>
+              <a:buChar char="•"/>
+              <a:defRPr sz="1800" kern="1200">
+                <a:solidFill>
+                  <a:schemeClr val="tx1"/>
+                </a:solidFill>
+                <a:latin typeface="+mn-lt"/>
+                <a:ea typeface="+mn-ea"/>
+                <a:cs typeface="+mn-cs"/>
+              </a:defRPr>
+            </a:lvl6pPr>
+            <a:lvl7pPr marL="2971800" indent="-228600" algn="l" defTabSz="914400" rtl="0" eaLnBrk="1" latinLnBrk="0" hangingPunct="1">
+              <a:lnSpc>
+                <a:spcPct val="90000"/>
+              </a:lnSpc>
+              <a:spcBef>
+                <a:spcPts val="500"/>
+              </a:spcBef>
+              <a:buFont typeface="Arial" panose="020B0604020202020204" pitchFamily="34" charset="0"/>
+              <a:buChar char="•"/>
+              <a:defRPr sz="1800" kern="1200">
+                <a:solidFill>
+                  <a:schemeClr val="tx1"/>
+                </a:solidFill>
+                <a:latin typeface="+mn-lt"/>
+                <a:ea typeface="+mn-ea"/>
+                <a:cs typeface="+mn-cs"/>
+              </a:defRPr>
+            </a:lvl7pPr>
+            <a:lvl8pPr marL="3429000" indent="-228600" algn="l" defTabSz="914400" rtl="0" eaLnBrk="1" latinLnBrk="0" hangingPunct="1">
+              <a:lnSpc>
+                <a:spcPct val="90000"/>
+              </a:lnSpc>
+              <a:spcBef>
+                <a:spcPts val="500"/>
+              </a:spcBef>
+              <a:buFont typeface="Arial" panose="020B0604020202020204" pitchFamily="34" charset="0"/>
+              <a:buChar char="•"/>
+              <a:defRPr sz="1800" kern="1200">
+                <a:solidFill>
+                  <a:schemeClr val="tx1"/>
+                </a:solidFill>
+                <a:latin typeface="+mn-lt"/>
+                <a:ea typeface="+mn-ea"/>
+                <a:cs typeface="+mn-cs"/>
+              </a:defRPr>
+            </a:lvl8pPr>
+            <a:lvl9pPr marL="3886200" indent="-228600" algn="l" defTabSz="914400" rtl="0" eaLnBrk="1" latinLnBrk="0" hangingPunct="1">
+              <a:lnSpc>
+                <a:spcPct val="90000"/>
+              </a:lnSpc>
+              <a:spcBef>
+                <a:spcPts val="500"/>
+              </a:spcBef>
+              <a:buFont typeface="Arial" panose="020B0604020202020204" pitchFamily="34" charset="0"/>
+              <a:buChar char="•"/>
+              <a:defRPr sz="1800" kern="1200">
+                <a:solidFill>
+                  <a:schemeClr val="tx1"/>
+                </a:solidFill>
+                <a:latin typeface="+mn-lt"/>
+                <a:ea typeface="+mn-ea"/>
+                <a:cs typeface="+mn-cs"/>
+              </a:defRPr>
+            </a:lvl9pPr>
+          </a:lstStyle>
+          <a:p>
+            <a:r>
+              <a:rPr lang="en-US" noProof="1"/>
+              <a:t>targets:</a:t>
+            </a:r>
+          </a:p>
+          <a:p>
+            <a:pPr lvl="1"/>
+            <a:r>
+              <a:rPr lang="en-US" noProof="1"/>
+              <a:t>education</a:t>
+            </a:r>
+          </a:p>
+          <a:p>
+            <a:pPr lvl="1"/>
+            <a:r>
+              <a:rPr lang="en-US" noProof="1"/>
+              <a:t>research</a:t>
+            </a:r>
+          </a:p>
+          <a:p>
+            <a:pPr lvl="1"/>
+            <a:endParaRPr lang="en-US" noProof="1"/>
+          </a:p>
+          <a:p>
+            <a:pPr lvl="1"/>
+            <a:endParaRPr lang="en-US" noProof="1"/>
+          </a:p>
+        </p:txBody>
+      </p:sp>
+      <p:sp>
+        <p:nvSpPr>
+          <p:cNvPr id="9" name="Content Placeholder 2">
+            <a:extLst>
+              <a:ext uri="{FF2B5EF4-FFF2-40B4-BE49-F238E27FC236}">
+                <a16:creationId xmlns:a16="http://schemas.microsoft.com/office/drawing/2014/main" id="{AFD9C081-D163-11AD-7F31-D7651713DC96}"/>
+              </a:ext>
+            </a:extLst>
+          </p:cNvPr>
+          <p:cNvSpPr txBox="1">
+            <a:spLocks/>
+          </p:cNvSpPr>
+          <p:nvPr/>
+        </p:nvSpPr>
+        <p:spPr>
+          <a:xfrm>
+            <a:off x="838200" y="4477648"/>
+            <a:ext cx="4456471" cy="2611411"/>
+          </a:xfrm>
+          <a:prstGeom prst="rect">
+            <a:avLst/>
+          </a:prstGeom>
+        </p:spPr>
+        <p:txBody>
+          <a:bodyPr vert="horz" lIns="91440" tIns="45720" rIns="91440" bIns="45720" rtlCol="0">
+            <a:normAutofit/>
+          </a:bodyPr>
+          <a:lstStyle>
+            <a:lvl1pPr marL="228600" indent="-228600" algn="l" defTabSz="914400" rtl="0" eaLnBrk="1" latinLnBrk="0" hangingPunct="1">
+              <a:lnSpc>
+                <a:spcPct val="90000"/>
+              </a:lnSpc>
+              <a:spcBef>
+                <a:spcPts val="1000"/>
+              </a:spcBef>
+              <a:buFont typeface="Arial" panose="020B0604020202020204" pitchFamily="34" charset="0"/>
+              <a:buChar char="•"/>
+              <a:defRPr sz="2800" kern="1200">
+                <a:solidFill>
+                  <a:schemeClr val="tx1"/>
+                </a:solidFill>
+                <a:latin typeface="+mn-lt"/>
+                <a:ea typeface="+mn-ea"/>
+                <a:cs typeface="+mn-cs"/>
+              </a:defRPr>
+            </a:lvl1pPr>
+            <a:lvl2pPr marL="685800" indent="-228600" algn="l" defTabSz="914400" rtl="0" eaLnBrk="1" latinLnBrk="0" hangingPunct="1">
+              <a:lnSpc>
+                <a:spcPct val="90000"/>
+              </a:lnSpc>
+              <a:spcBef>
+                <a:spcPts val="500"/>
+              </a:spcBef>
+              <a:buFont typeface="Arial" panose="020B0604020202020204" pitchFamily="34" charset="0"/>
+              <a:buChar char="•"/>
+              <a:defRPr sz="2400" kern="1200">
+                <a:solidFill>
+                  <a:schemeClr val="tx1"/>
+                </a:solidFill>
+                <a:latin typeface="+mn-lt"/>
+                <a:ea typeface="+mn-ea"/>
+                <a:cs typeface="+mn-cs"/>
+              </a:defRPr>
+            </a:lvl2pPr>
+            <a:lvl3pPr marL="1143000" indent="-228600" algn="l" defTabSz="914400" rtl="0" eaLnBrk="1" latinLnBrk="0" hangingPunct="1">
+              <a:lnSpc>
+                <a:spcPct val="90000"/>
+              </a:lnSpc>
+              <a:spcBef>
+                <a:spcPts val="500"/>
+              </a:spcBef>
+              <a:buFont typeface="Arial" panose="020B0604020202020204" pitchFamily="34" charset="0"/>
+              <a:buChar char="•"/>
+              <a:defRPr sz="2000" kern="1200">
+                <a:solidFill>
+                  <a:schemeClr val="tx1"/>
+                </a:solidFill>
+                <a:latin typeface="+mn-lt"/>
+                <a:ea typeface="+mn-ea"/>
+                <a:cs typeface="+mn-cs"/>
+              </a:defRPr>
+            </a:lvl3pPr>
+            <a:lvl4pPr marL="1600200" indent="-228600" algn="l" defTabSz="914400" rtl="0" eaLnBrk="1" latinLnBrk="0" hangingPunct="1">
+              <a:lnSpc>
+                <a:spcPct val="90000"/>
+              </a:lnSpc>
+              <a:spcBef>
+                <a:spcPts val="500"/>
+              </a:spcBef>
+              <a:buFont typeface="Arial" panose="020B0604020202020204" pitchFamily="34" charset="0"/>
+              <a:buChar char="•"/>
+              <a:defRPr sz="1800" kern="1200">
+                <a:solidFill>
+                  <a:schemeClr val="tx1"/>
+                </a:solidFill>
+                <a:latin typeface="+mn-lt"/>
+                <a:ea typeface="+mn-ea"/>
+                <a:cs typeface="+mn-cs"/>
+              </a:defRPr>
+            </a:lvl4pPr>
+            <a:lvl5pPr marL="2057400" indent="-228600" algn="l" defTabSz="914400" rtl="0" eaLnBrk="1" latinLnBrk="0" hangingPunct="1">
+              <a:lnSpc>
+                <a:spcPct val="90000"/>
+              </a:lnSpc>
+              <a:spcBef>
+                <a:spcPts val="500"/>
+              </a:spcBef>
+              <a:buFont typeface="Arial" panose="020B0604020202020204" pitchFamily="34" charset="0"/>
+              <a:buChar char="•"/>
+              <a:defRPr sz="1800" kern="1200">
+                <a:solidFill>
+                  <a:schemeClr val="tx1"/>
+                </a:solidFill>
+                <a:latin typeface="+mn-lt"/>
+                <a:ea typeface="+mn-ea"/>
+                <a:cs typeface="+mn-cs"/>
+              </a:defRPr>
+            </a:lvl5pPr>
+            <a:lvl6pPr marL="2514600" indent="-228600" algn="l" defTabSz="914400" rtl="0" eaLnBrk="1" latinLnBrk="0" hangingPunct="1">
+              <a:lnSpc>
+                <a:spcPct val="90000"/>
+              </a:lnSpc>
+              <a:spcBef>
+                <a:spcPts val="500"/>
+              </a:spcBef>
+              <a:buFont typeface="Arial" panose="020B0604020202020204" pitchFamily="34" charset="0"/>
+              <a:buChar char="•"/>
+              <a:defRPr sz="1800" kern="1200">
+                <a:solidFill>
+                  <a:schemeClr val="tx1"/>
+                </a:solidFill>
+                <a:latin typeface="+mn-lt"/>
+                <a:ea typeface="+mn-ea"/>
+                <a:cs typeface="+mn-cs"/>
+              </a:defRPr>
+            </a:lvl6pPr>
+            <a:lvl7pPr marL="2971800" indent="-228600" algn="l" defTabSz="914400" rtl="0" eaLnBrk="1" latinLnBrk="0" hangingPunct="1">
+              <a:lnSpc>
+                <a:spcPct val="90000"/>
+              </a:lnSpc>
+              <a:spcBef>
+                <a:spcPts val="500"/>
+              </a:spcBef>
+              <a:buFont typeface="Arial" panose="020B0604020202020204" pitchFamily="34" charset="0"/>
+              <a:buChar char="•"/>
+              <a:defRPr sz="1800" kern="1200">
+                <a:solidFill>
+                  <a:schemeClr val="tx1"/>
+                </a:solidFill>
+                <a:latin typeface="+mn-lt"/>
+                <a:ea typeface="+mn-ea"/>
+                <a:cs typeface="+mn-cs"/>
+              </a:defRPr>
+            </a:lvl7pPr>
+            <a:lvl8pPr marL="3429000" indent="-228600" algn="l" defTabSz="914400" rtl="0" eaLnBrk="1" latinLnBrk="0" hangingPunct="1">
+              <a:lnSpc>
+                <a:spcPct val="90000"/>
+              </a:lnSpc>
+              <a:spcBef>
+                <a:spcPts val="500"/>
+              </a:spcBef>
+              <a:buFont typeface="Arial" panose="020B0604020202020204" pitchFamily="34" charset="0"/>
+              <a:buChar char="•"/>
+              <a:defRPr sz="1800" kern="1200">
+                <a:solidFill>
+                  <a:schemeClr val="tx1"/>
+                </a:solidFill>
+                <a:latin typeface="+mn-lt"/>
+                <a:ea typeface="+mn-ea"/>
+                <a:cs typeface="+mn-cs"/>
+              </a:defRPr>
+            </a:lvl8pPr>
+            <a:lvl9pPr marL="3886200" indent="-228600" algn="l" defTabSz="914400" rtl="0" eaLnBrk="1" latinLnBrk="0" hangingPunct="1">
+              <a:lnSpc>
+                <a:spcPct val="90000"/>
+              </a:lnSpc>
+              <a:spcBef>
+                <a:spcPts val="500"/>
+              </a:spcBef>
+              <a:buFont typeface="Arial" panose="020B0604020202020204" pitchFamily="34" charset="0"/>
+              <a:buChar char="•"/>
+              <a:defRPr sz="1800" kern="1200">
+                <a:solidFill>
+                  <a:schemeClr val="tx1"/>
+                </a:solidFill>
+                <a:latin typeface="+mn-lt"/>
+                <a:ea typeface="+mn-ea"/>
+                <a:cs typeface="+mn-cs"/>
+              </a:defRPr>
+            </a:lvl9pPr>
+          </a:lstStyle>
+          <a:p>
+            <a:r>
+              <a:rPr lang="en-US" noProof="1"/>
+              <a:t>influences:</a:t>
+            </a:r>
+          </a:p>
+          <a:p>
+            <a:pPr lvl="1"/>
+            <a:r>
+              <a:rPr lang="en-US" noProof="1"/>
               <a:t>SAM</a:t>
             </a:r>
           </a:p>
           <a:p>
-            <a:pPr lvl="2"/>
-            <a:r>
-              <a:rPr lang="en-AU" dirty="0" err="1"/>
-              <a:t>solarpilot</a:t>
-            </a:r>
-            <a:endParaRPr lang="en-AU" dirty="0"/>
-          </a:p>
-          <a:p>
-            <a:pPr lvl="2"/>
-            <a:r>
-              <a:rPr lang="en-AU" dirty="0"/>
+            <a:pPr lvl="1"/>
+            <a:r>
+              <a:rPr lang="en-US" noProof="1"/>
               <a:t>EES</a:t>
             </a:r>
           </a:p>
           <a:p>
-            <a:pPr lvl="2"/>
-            <a:r>
-              <a:rPr lang="en-AU" dirty="0" err="1"/>
-              <a:t>trnsys</a:t>
-            </a:r>
-            <a:endParaRPr lang="en-AU" dirty="0"/>
-          </a:p>
-          <a:p>
-            <a:endParaRPr lang="en-AU" dirty="0"/>
-          </a:p>
-          <a:p>
             <a:pPr lvl="1"/>
-            <a:endParaRPr lang="en-AU" dirty="0"/>
+            <a:r>
+              <a:rPr lang="en-US" noProof="1"/>
+              <a:t>TRNSYS</a:t>
+            </a:r>
+          </a:p>
+          <a:p>
+            <a:pPr lvl="1"/>
+            <a:r>
+              <a:rPr lang="en-US" noProof="1"/>
+              <a:t>solarPILOT</a:t>
+            </a:r>
+          </a:p>
+          <a:p>
+            <a:pPr lvl="1"/>
+            <a:endParaRPr lang="en-US" noProof="1"/>
+          </a:p>
+          <a:p>
+            <a:pPr lvl="1"/>
+            <a:endParaRPr lang="en-US" noProof="1"/>
+          </a:p>
+          <a:p>
+            <a:pPr lvl="1"/>
+            <a:endParaRPr lang="en-US" noProof="1"/>
+          </a:p>
+        </p:txBody>
+      </p:sp>
+      <p:sp>
+        <p:nvSpPr>
+          <p:cNvPr id="10" name="Content Placeholder 2">
+            <a:extLst>
+              <a:ext uri="{FF2B5EF4-FFF2-40B4-BE49-F238E27FC236}">
+                <a16:creationId xmlns:a16="http://schemas.microsoft.com/office/drawing/2014/main" id="{BCD6576E-4A89-E902-F09F-A3760A86D213}"/>
+              </a:ext>
+            </a:extLst>
+          </p:cNvPr>
+          <p:cNvSpPr txBox="1">
+            <a:spLocks/>
+          </p:cNvSpPr>
+          <p:nvPr/>
+        </p:nvSpPr>
+        <p:spPr>
+          <a:xfrm>
+            <a:off x="4576916" y="4477648"/>
+            <a:ext cx="3446207" cy="1982146"/>
+          </a:xfrm>
+          <a:prstGeom prst="rect">
+            <a:avLst/>
+          </a:prstGeom>
+        </p:spPr>
+        <p:txBody>
+          <a:bodyPr vert="horz" lIns="91440" tIns="45720" rIns="91440" bIns="45720" rtlCol="0">
+            <a:normAutofit/>
+          </a:bodyPr>
+          <a:lstStyle>
+            <a:lvl1pPr marL="228600" indent="-228600" algn="l" defTabSz="914400" rtl="0" eaLnBrk="1" latinLnBrk="0" hangingPunct="1">
+              <a:lnSpc>
+                <a:spcPct val="90000"/>
+              </a:lnSpc>
+              <a:spcBef>
+                <a:spcPts val="1000"/>
+              </a:spcBef>
+              <a:buFont typeface="Arial" panose="020B0604020202020204" pitchFamily="34" charset="0"/>
+              <a:buChar char="•"/>
+              <a:defRPr sz="2800" kern="1200">
+                <a:solidFill>
+                  <a:schemeClr val="tx1"/>
+                </a:solidFill>
+                <a:latin typeface="+mn-lt"/>
+                <a:ea typeface="+mn-ea"/>
+                <a:cs typeface="+mn-cs"/>
+              </a:defRPr>
+            </a:lvl1pPr>
+            <a:lvl2pPr marL="685800" indent="-228600" algn="l" defTabSz="914400" rtl="0" eaLnBrk="1" latinLnBrk="0" hangingPunct="1">
+              <a:lnSpc>
+                <a:spcPct val="90000"/>
+              </a:lnSpc>
+              <a:spcBef>
+                <a:spcPts val="500"/>
+              </a:spcBef>
+              <a:buFont typeface="Arial" panose="020B0604020202020204" pitchFamily="34" charset="0"/>
+              <a:buChar char="•"/>
+              <a:defRPr sz="2400" kern="1200">
+                <a:solidFill>
+                  <a:schemeClr val="tx1"/>
+                </a:solidFill>
+                <a:latin typeface="+mn-lt"/>
+                <a:ea typeface="+mn-ea"/>
+                <a:cs typeface="+mn-cs"/>
+              </a:defRPr>
+            </a:lvl2pPr>
+            <a:lvl3pPr marL="1143000" indent="-228600" algn="l" defTabSz="914400" rtl="0" eaLnBrk="1" latinLnBrk="0" hangingPunct="1">
+              <a:lnSpc>
+                <a:spcPct val="90000"/>
+              </a:lnSpc>
+              <a:spcBef>
+                <a:spcPts val="500"/>
+              </a:spcBef>
+              <a:buFont typeface="Arial" panose="020B0604020202020204" pitchFamily="34" charset="0"/>
+              <a:buChar char="•"/>
+              <a:defRPr sz="2000" kern="1200">
+                <a:solidFill>
+                  <a:schemeClr val="tx1"/>
+                </a:solidFill>
+                <a:latin typeface="+mn-lt"/>
+                <a:ea typeface="+mn-ea"/>
+                <a:cs typeface="+mn-cs"/>
+              </a:defRPr>
+            </a:lvl3pPr>
+            <a:lvl4pPr marL="1600200" indent="-228600" algn="l" defTabSz="914400" rtl="0" eaLnBrk="1" latinLnBrk="0" hangingPunct="1">
+              <a:lnSpc>
+                <a:spcPct val="90000"/>
+              </a:lnSpc>
+              <a:spcBef>
+                <a:spcPts val="500"/>
+              </a:spcBef>
+              <a:buFont typeface="Arial" panose="020B0604020202020204" pitchFamily="34" charset="0"/>
+              <a:buChar char="•"/>
+              <a:defRPr sz="1800" kern="1200">
+                <a:solidFill>
+                  <a:schemeClr val="tx1"/>
+                </a:solidFill>
+                <a:latin typeface="+mn-lt"/>
+                <a:ea typeface="+mn-ea"/>
+                <a:cs typeface="+mn-cs"/>
+              </a:defRPr>
+            </a:lvl4pPr>
+            <a:lvl5pPr marL="2057400" indent="-228600" algn="l" defTabSz="914400" rtl="0" eaLnBrk="1" latinLnBrk="0" hangingPunct="1">
+              <a:lnSpc>
+                <a:spcPct val="90000"/>
+              </a:lnSpc>
+              <a:spcBef>
+                <a:spcPts val="500"/>
+              </a:spcBef>
+              <a:buFont typeface="Arial" panose="020B0604020202020204" pitchFamily="34" charset="0"/>
+              <a:buChar char="•"/>
+              <a:defRPr sz="1800" kern="1200">
+                <a:solidFill>
+                  <a:schemeClr val="tx1"/>
+                </a:solidFill>
+                <a:latin typeface="+mn-lt"/>
+                <a:ea typeface="+mn-ea"/>
+                <a:cs typeface="+mn-cs"/>
+              </a:defRPr>
+            </a:lvl5pPr>
+            <a:lvl6pPr marL="2514600" indent="-228600" algn="l" defTabSz="914400" rtl="0" eaLnBrk="1" latinLnBrk="0" hangingPunct="1">
+              <a:lnSpc>
+                <a:spcPct val="90000"/>
+              </a:lnSpc>
+              <a:spcBef>
+                <a:spcPts val="500"/>
+              </a:spcBef>
+              <a:buFont typeface="Arial" panose="020B0604020202020204" pitchFamily="34" charset="0"/>
+              <a:buChar char="•"/>
+              <a:defRPr sz="1800" kern="1200">
+                <a:solidFill>
+                  <a:schemeClr val="tx1"/>
+                </a:solidFill>
+                <a:latin typeface="+mn-lt"/>
+                <a:ea typeface="+mn-ea"/>
+                <a:cs typeface="+mn-cs"/>
+              </a:defRPr>
+            </a:lvl6pPr>
+            <a:lvl7pPr marL="2971800" indent="-228600" algn="l" defTabSz="914400" rtl="0" eaLnBrk="1" latinLnBrk="0" hangingPunct="1">
+              <a:lnSpc>
+                <a:spcPct val="90000"/>
+              </a:lnSpc>
+              <a:spcBef>
+                <a:spcPts val="500"/>
+              </a:spcBef>
+              <a:buFont typeface="Arial" panose="020B0604020202020204" pitchFamily="34" charset="0"/>
+              <a:buChar char="•"/>
+              <a:defRPr sz="1800" kern="1200">
+                <a:solidFill>
+                  <a:schemeClr val="tx1"/>
+                </a:solidFill>
+                <a:latin typeface="+mn-lt"/>
+                <a:ea typeface="+mn-ea"/>
+                <a:cs typeface="+mn-cs"/>
+              </a:defRPr>
+            </a:lvl7pPr>
+            <a:lvl8pPr marL="3429000" indent="-228600" algn="l" defTabSz="914400" rtl="0" eaLnBrk="1" latinLnBrk="0" hangingPunct="1">
+              <a:lnSpc>
+                <a:spcPct val="90000"/>
+              </a:lnSpc>
+              <a:spcBef>
+                <a:spcPts val="500"/>
+              </a:spcBef>
+              <a:buFont typeface="Arial" panose="020B0604020202020204" pitchFamily="34" charset="0"/>
+              <a:buChar char="•"/>
+              <a:defRPr sz="1800" kern="1200">
+                <a:solidFill>
+                  <a:schemeClr val="tx1"/>
+                </a:solidFill>
+                <a:latin typeface="+mn-lt"/>
+                <a:ea typeface="+mn-ea"/>
+                <a:cs typeface="+mn-cs"/>
+              </a:defRPr>
+            </a:lvl8pPr>
+            <a:lvl9pPr marL="3886200" indent="-228600" algn="l" defTabSz="914400" rtl="0" eaLnBrk="1" latinLnBrk="0" hangingPunct="1">
+              <a:lnSpc>
+                <a:spcPct val="90000"/>
+              </a:lnSpc>
+              <a:spcBef>
+                <a:spcPts val="500"/>
+              </a:spcBef>
+              <a:buFont typeface="Arial" panose="020B0604020202020204" pitchFamily="34" charset="0"/>
+              <a:buChar char="•"/>
+              <a:defRPr sz="1800" kern="1200">
+                <a:solidFill>
+                  <a:schemeClr val="tx1"/>
+                </a:solidFill>
+                <a:latin typeface="+mn-lt"/>
+                <a:ea typeface="+mn-ea"/>
+                <a:cs typeface="+mn-cs"/>
+              </a:defRPr>
+            </a:lvl9pPr>
+          </a:lstStyle>
+          <a:p>
+            <a:r>
+              <a:rPr lang="en-US" noProof="1"/>
+              <a:t>dependancies:</a:t>
+            </a:r>
+          </a:p>
+          <a:p>
+            <a:pPr lvl="1"/>
+            <a:r>
+              <a:rPr lang="en-US" noProof="1"/>
+              <a:t>numpy</a:t>
+            </a:r>
+          </a:p>
+          <a:p>
+            <a:pPr lvl="1"/>
+            <a:r>
+              <a:rPr lang="en-US" noProof="1"/>
+              <a:t>pandas (polars)</a:t>
+            </a:r>
+          </a:p>
+          <a:p>
+            <a:pPr lvl="1"/>
+            <a:r>
+              <a:rPr lang="en-US" noProof="1"/>
+              <a:t>+</a:t>
+            </a:r>
           </a:p>
         </p:txBody>
       </p:sp>
@@ -3793,7 +4559,13 @@
   <p:cSld>
     <p:spTree>
       <p:nvGrpSpPr>
-        <p:cNvPr id="1" name=""/>
+        <p:cNvPr id="1" name="">
+          <a:extLst>
+            <a:ext uri="{FF2B5EF4-FFF2-40B4-BE49-F238E27FC236}">
+              <a16:creationId xmlns:a16="http://schemas.microsoft.com/office/drawing/2014/main" id="{09F2F7BD-B51F-337C-5137-5569B5841DFF}"/>
+            </a:ext>
+          </a:extLst>
+        </p:cNvPr>
         <p:cNvGrpSpPr/>
         <p:nvPr/>
       </p:nvGrpSpPr>
@@ -3810,7 +4582,7 @@
           <p:cNvPr id="2" name="Title 1">
             <a:extLst>
               <a:ext uri="{FF2B5EF4-FFF2-40B4-BE49-F238E27FC236}">
-                <a16:creationId xmlns:a16="http://schemas.microsoft.com/office/drawing/2014/main" id="{EFECA099-A846-EDE8-B890-F74D8EAF00D4}"/>
+                <a16:creationId xmlns:a16="http://schemas.microsoft.com/office/drawing/2014/main" id="{45EBEC0F-AB3B-428A-F835-02360589EF9B}"/>
               </a:ext>
             </a:extLst>
           </p:cNvPr>
@@ -3827,8 +4599,20 @@
           <a:lstStyle/>
           <a:p>
             <a:r>
-              <a:rPr lang="en-AU" dirty="0"/>
-              <a:t>existing code</a:t>
+              <a:rPr lang="en-US" noProof="1">
+                <a:solidFill>
+                  <a:srgbClr val="FFCC99"/>
+                </a:solidFill>
+              </a:rPr>
+              <a:t>antu</a:t>
+            </a:r>
+            <a:r>
+              <a:rPr lang="en-US" noProof="1">
+                <a:solidFill>
+                  <a:schemeClr val="accent5"/>
+                </a:solidFill>
+              </a:rPr>
+              <a:t>py</a:t>
             </a:r>
           </a:p>
         </p:txBody>
@@ -3838,7 +4622,7 @@
           <p:cNvPr id="3" name="Content Placeholder 2">
             <a:extLst>
               <a:ext uri="{FF2B5EF4-FFF2-40B4-BE49-F238E27FC236}">
-                <a16:creationId xmlns:a16="http://schemas.microsoft.com/office/drawing/2014/main" id="{32C7182D-00D2-76B8-E40F-3235CC62C82B}"/>
+                <a16:creationId xmlns:a16="http://schemas.microsoft.com/office/drawing/2014/main" id="{21C0418D-C369-51E9-86F7-573B2DCA5E51}"/>
               </a:ext>
             </a:extLst>
           </p:cNvPr>
@@ -3849,145 +4633,124 @@
             <p:ph idx="1"/>
           </p:nvPr>
         </p:nvSpPr>
-        <p:spPr/>
-        <p:txBody>
-          <a:bodyPr vert="horz" lIns="91440" tIns="45720" rIns="91440" bIns="45720" rtlCol="0" anchor="t">
+        <p:spPr>
+          <a:xfrm>
+            <a:off x="838200" y="1825624"/>
+            <a:ext cx="10515600" cy="4938969"/>
+          </a:xfrm>
+        </p:spPr>
+        <p:txBody>
+          <a:bodyPr>
             <a:normAutofit/>
           </a:bodyPr>
           <a:lstStyle/>
           <a:p>
             <a:r>
-              <a:rPr lang="en-US" dirty="0">
-                <a:hlinkClick r:id="rId2"/>
-              </a:rPr>
-              <a:t>tm_solarshift</a:t>
-            </a:r>
-            <a:r>
-              <a:rPr lang="en-US" dirty="0"/>
-              <a:t> : </a:t>
-            </a:r>
-            <a:r>
-              <a:rPr lang="en-US" dirty="0" err="1"/>
-              <a:t>dewh</a:t>
-            </a:r>
-            <a:r>
-              <a:rPr lang="en-US" dirty="0"/>
-              <a:t> (postdoc).</a:t>
-            </a:r>
-          </a:p>
-          <a:p>
-            <a:r>
-              <a:rPr lang="en-US" dirty="0">
-                <a:hlinkClick r:id="rId3"/>
-              </a:rPr>
-              <a:t>bdr_csp</a:t>
-            </a:r>
-            <a:r>
-              <a:rPr lang="en-US" dirty="0"/>
-              <a:t>: </a:t>
-            </a:r>
-            <a:r>
-              <a:rPr lang="en-US" dirty="0" err="1"/>
-              <a:t>csp</a:t>
-            </a:r>
-            <a:r>
-              <a:rPr lang="en-US" dirty="0"/>
-              <a:t> (</a:t>
-            </a:r>
-            <a:r>
-              <a:rPr lang="en-US" dirty="0" err="1"/>
-              <a:t>phd</a:t>
-            </a:r>
-            <a:r>
-              <a:rPr lang="en-US" dirty="0"/>
-              <a:t> code).</a:t>
-            </a:r>
-          </a:p>
-          <a:p>
-            <a:r>
-              <a:rPr lang="en-US" dirty="0" err="1"/>
-              <a:t>med_fortran</a:t>
-            </a:r>
-            <a:r>
-              <a:rPr lang="en-US" dirty="0"/>
-              <a:t>: desal (master’s code, </a:t>
-            </a:r>
-            <a:r>
-              <a:rPr lang="en-US" dirty="0" err="1"/>
-              <a:t>fortran</a:t>
-            </a:r>
-            <a:r>
-              <a:rPr lang="en-US" dirty="0"/>
-              <a:t>).</a:t>
-            </a:r>
-          </a:p>
-          <a:p>
-            <a:r>
-              <a:rPr lang="en-US" dirty="0"/>
-              <a:t>med-</a:t>
-            </a:r>
-            <a:r>
-              <a:rPr lang="en-US" dirty="0" err="1"/>
-              <a:t>csp</a:t>
-            </a:r>
-            <a:r>
-              <a:rPr lang="en-US" dirty="0"/>
-              <a:t> integration (</a:t>
-            </a:r>
-            <a:r>
-              <a:rPr lang="en-US" dirty="0" err="1"/>
-              <a:t>amr’s</a:t>
-            </a:r>
-            <a:r>
-              <a:rPr lang="en-US" dirty="0"/>
-              <a:t> collaboration).</a:t>
-            </a:r>
-          </a:p>
-          <a:p>
-            <a:r>
-              <a:rPr lang="en-US" dirty="0" err="1"/>
-              <a:t>hdh</a:t>
-            </a:r>
-            <a:r>
-              <a:rPr lang="en-US" dirty="0"/>
-              <a:t> (</a:t>
-            </a:r>
-            <a:r>
-              <a:rPr lang="en-US" dirty="0" err="1"/>
-              <a:t>usm</a:t>
-            </a:r>
-            <a:r>
-              <a:rPr lang="en-US" dirty="0"/>
-              <a:t> research).</a:t>
-            </a:r>
-          </a:p>
-          <a:p>
-            <a:r>
-              <a:rPr lang="en-US" dirty="0" err="1"/>
-              <a:t>caes</a:t>
-            </a:r>
-            <a:r>
-              <a:rPr lang="en-US" dirty="0"/>
-              <a:t> (</a:t>
-            </a:r>
-            <a:r>
-              <a:rPr lang="en-US" dirty="0" err="1"/>
-              <a:t>usm</a:t>
-            </a:r>
-            <a:r>
-              <a:rPr lang="en-US" dirty="0"/>
-              <a:t> research).</a:t>
-            </a:r>
-          </a:p>
-          <a:p>
-            <a:endParaRPr lang="en-AU" dirty="0"/>
-          </a:p>
-        </p:txBody>
-      </p:sp>
+              <a:rPr lang="en-US" noProof="1"/>
+              <a:t>statement of need:</a:t>
+            </a:r>
+          </a:p>
+          <a:p>
+            <a:pPr lvl="1"/>
+            <a:r>
+              <a:rPr lang="en-US" noProof="1"/>
+              <a:t>unit management.</a:t>
+            </a:r>
+          </a:p>
+          <a:p>
+            <a:pPr marL="457200" lvl="1" indent="0">
+              <a:buNone/>
+            </a:pPr>
+            <a:endParaRPr lang="en-US" noProof="1"/>
+          </a:p>
+          <a:p>
+            <a:pPr marL="457200" lvl="1" indent="0">
+              <a:buNone/>
+            </a:pPr>
+            <a:endParaRPr lang="en-US" noProof="1"/>
+          </a:p>
+          <a:p>
+            <a:pPr lvl="1"/>
+            <a:endParaRPr lang="en-US" noProof="1"/>
+          </a:p>
+          <a:p>
+            <a:pPr lvl="1"/>
+            <a:endParaRPr lang="en-US" noProof="1"/>
+          </a:p>
+          <a:p>
+            <a:pPr lvl="1"/>
+            <a:endParaRPr lang="en-US" noProof="1"/>
+          </a:p>
+          <a:p>
+            <a:pPr lvl="1"/>
+            <a:endParaRPr lang="en-US" noProof="1"/>
+          </a:p>
+        </p:txBody>
+      </p:sp>
+      <p:pic>
+        <p:nvPicPr>
+          <p:cNvPr id="5" name="Picture 4">
+            <a:extLst>
+              <a:ext uri="{FF2B5EF4-FFF2-40B4-BE49-F238E27FC236}">
+                <a16:creationId xmlns:a16="http://schemas.microsoft.com/office/drawing/2014/main" id="{736250D1-BEF7-8B73-76A6-E23A1355A44F}"/>
+              </a:ext>
+            </a:extLst>
+          </p:cNvPr>
+          <p:cNvPicPr>
+            <a:picLocks noChangeAspect="1"/>
+          </p:cNvPicPr>
+          <p:nvPr/>
+        </p:nvPicPr>
+        <p:blipFill>
+          <a:blip r:embed="rId2"/>
+          <a:stretch>
+            <a:fillRect/>
+          </a:stretch>
+        </p:blipFill>
+        <p:spPr>
+          <a:xfrm>
+            <a:off x="1126684" y="3095377"/>
+            <a:ext cx="4104078" cy="2596108"/>
+          </a:xfrm>
+          <a:prstGeom prst="rect">
+            <a:avLst/>
+          </a:prstGeom>
+        </p:spPr>
+      </p:pic>
+      <p:pic>
+        <p:nvPicPr>
+          <p:cNvPr id="6" name="Picture 5">
+            <a:extLst>
+              <a:ext uri="{FF2B5EF4-FFF2-40B4-BE49-F238E27FC236}">
+                <a16:creationId xmlns:a16="http://schemas.microsoft.com/office/drawing/2014/main" id="{DA41E1DC-5A31-A794-D730-144C3F5CA787}"/>
+              </a:ext>
+            </a:extLst>
+          </p:cNvPr>
+          <p:cNvPicPr>
+            <a:picLocks noChangeAspect="1"/>
+          </p:cNvPicPr>
+          <p:nvPr/>
+        </p:nvPicPr>
+        <p:blipFill>
+          <a:blip r:embed="rId2"/>
+          <a:stretch>
+            <a:fillRect/>
+          </a:stretch>
+        </p:blipFill>
+        <p:spPr>
+          <a:xfrm rot="5400000">
+            <a:off x="7104696" y="2444673"/>
+            <a:ext cx="4104078" cy="2596108"/>
+          </a:xfrm>
+          <a:prstGeom prst="rect">
+            <a:avLst/>
+          </a:prstGeom>
+        </p:spPr>
+      </p:pic>
     </p:spTree>
     <p:extLst>
       <p:ext uri="{BB962C8B-B14F-4D97-AF65-F5344CB8AC3E}">
-        <p14:creationId xmlns:p14="http://schemas.microsoft.com/office/powerpoint/2010/main" val="2117738962"/>
+        <p14:creationId xmlns:p14="http://schemas.microsoft.com/office/powerpoint/2010/main" val="1412585676"/>
       </p:ext>
     </p:extLst>
   </p:cSld>
@@ -4002,7 +4765,13 @@
   <p:cSld>
     <p:spTree>
       <p:nvGrpSpPr>
-        <p:cNvPr id="1" name=""/>
+        <p:cNvPr id="1" name="">
+          <a:extLst>
+            <a:ext uri="{FF2B5EF4-FFF2-40B4-BE49-F238E27FC236}">
+              <a16:creationId xmlns:a16="http://schemas.microsoft.com/office/drawing/2014/main" id="{A6442891-EB6F-581E-82B5-42751F954DEA}"/>
+            </a:ext>
+          </a:extLst>
+        </p:cNvPr>
         <p:cNvGrpSpPr/>
         <p:nvPr/>
       </p:nvGrpSpPr>
@@ -4019,7 +4788,7 @@
           <p:cNvPr id="2" name="Title 1">
             <a:extLst>
               <a:ext uri="{FF2B5EF4-FFF2-40B4-BE49-F238E27FC236}">
-                <a16:creationId xmlns:a16="http://schemas.microsoft.com/office/drawing/2014/main" id="{636DB06E-6239-3F2C-7E97-76ABA3BCE1B3}"/>
+                <a16:creationId xmlns:a16="http://schemas.microsoft.com/office/drawing/2014/main" id="{A276041A-A4C4-FC2B-44BB-8347FB678F1F}"/>
               </a:ext>
             </a:extLst>
           </p:cNvPr>
@@ -4036,19 +4805,418 @@
           <a:lstStyle/>
           <a:p>
             <a:r>
-              <a:rPr lang="en-US" dirty="0"/>
-              <a:t>existing module architectures</a:t>
-            </a:r>
-            <a:endParaRPr lang="en-IE" dirty="0"/>
+              <a:rPr lang="en-US" noProof="1">
+                <a:solidFill>
+                  <a:srgbClr val="FFCC99"/>
+                </a:solidFill>
+              </a:rPr>
+              <a:t>antu</a:t>
+            </a:r>
+            <a:r>
+              <a:rPr lang="en-US" noProof="1">
+                <a:solidFill>
+                  <a:schemeClr val="accent5"/>
+                </a:solidFill>
+              </a:rPr>
+              <a:t>py</a:t>
+            </a:r>
+          </a:p>
+        </p:txBody>
+      </p:sp>
+      <p:sp>
+        <p:nvSpPr>
+          <p:cNvPr id="3" name="Content Placeholder 2">
+            <a:extLst>
+              <a:ext uri="{FF2B5EF4-FFF2-40B4-BE49-F238E27FC236}">
+                <a16:creationId xmlns:a16="http://schemas.microsoft.com/office/drawing/2014/main" id="{93799738-CEF4-34E1-E4BC-646FCBD3D122}"/>
+              </a:ext>
+            </a:extLst>
+          </p:cNvPr>
+          <p:cNvSpPr>
+            <a:spLocks noGrp="1"/>
+          </p:cNvSpPr>
+          <p:nvPr>
+            <p:ph idx="1"/>
+          </p:nvPr>
+        </p:nvSpPr>
+        <p:spPr>
+          <a:xfrm>
+            <a:off x="838200" y="1825624"/>
+            <a:ext cx="10515600" cy="4938969"/>
+          </a:xfrm>
+        </p:spPr>
+        <p:txBody>
+          <a:bodyPr>
+            <a:normAutofit/>
+          </a:bodyPr>
+          <a:lstStyle/>
+          <a:p>
+            <a:r>
+              <a:rPr lang="en-US" noProof="1"/>
+              <a:t>statement of need:</a:t>
+            </a:r>
+          </a:p>
+          <a:p>
+            <a:pPr lvl="1"/>
+            <a:r>
+              <a:rPr lang="en-US" noProof="1"/>
+              <a:t>simulation structure</a:t>
+            </a:r>
+          </a:p>
+          <a:p>
+            <a:pPr lvl="2"/>
+            <a:r>
+              <a:rPr lang="en-US" i="1" noProof="1"/>
+              <a:t>glue code</a:t>
+            </a:r>
+          </a:p>
+          <a:p>
+            <a:pPr lvl="2"/>
+            <a:endParaRPr lang="en-US" noProof="1"/>
+          </a:p>
+          <a:p>
+            <a:pPr lvl="2"/>
+            <a:endParaRPr lang="en-US" noProof="1"/>
+          </a:p>
+          <a:p>
+            <a:pPr lvl="2"/>
+            <a:endParaRPr lang="en-US" noProof="1"/>
+          </a:p>
+          <a:p>
+            <a:pPr lvl="2"/>
+            <a:endParaRPr lang="en-US" noProof="1"/>
+          </a:p>
+          <a:p>
+            <a:pPr lvl="2"/>
+            <a:endParaRPr lang="en-US" noProof="1"/>
+          </a:p>
+          <a:p>
+            <a:pPr lvl="2"/>
+            <a:endParaRPr lang="en-US" noProof="1"/>
+          </a:p>
+          <a:p>
+            <a:pPr lvl="2"/>
+            <a:endParaRPr lang="en-US" noProof="1"/>
+          </a:p>
+          <a:p>
+            <a:pPr lvl="2"/>
+            <a:endParaRPr lang="en-US" noProof="1"/>
+          </a:p>
+          <a:p>
+            <a:pPr lvl="2"/>
+            <a:endParaRPr lang="en-US" noProof="1"/>
+          </a:p>
+          <a:p>
+            <a:pPr lvl="1"/>
+            <a:r>
+              <a:rPr lang="en-US" noProof="1"/>
+              <a:t>multi-disciplinary research</a:t>
+            </a:r>
+          </a:p>
+        </p:txBody>
+      </p:sp>
+    </p:spTree>
+    <p:extLst>
+      <p:ext uri="{BB962C8B-B14F-4D97-AF65-F5344CB8AC3E}">
+        <p14:creationId xmlns:p14="http://schemas.microsoft.com/office/powerpoint/2010/main" val="3334446678"/>
+      </p:ext>
+    </p:extLst>
+  </p:cSld>
+  <p:clrMapOvr>
+    <a:masterClrMapping/>
+  </p:clrMapOvr>
+</p:sld>
+</file>
+
+<file path=ppt/slides/slide5.xml><?xml version="1.0" encoding="utf-8"?>
+<p:sld xmlns:a="http://schemas.openxmlformats.org/drawingml/2006/main" xmlns:r="http://schemas.openxmlformats.org/officeDocument/2006/relationships" xmlns:p="http://schemas.openxmlformats.org/presentationml/2006/main">
+  <p:cSld>
+    <p:spTree>
+      <p:nvGrpSpPr>
+        <p:cNvPr id="1" name="">
+          <a:extLst>
+            <a:ext uri="{FF2B5EF4-FFF2-40B4-BE49-F238E27FC236}">
+              <a16:creationId xmlns:a16="http://schemas.microsoft.com/office/drawing/2014/main" id="{EDEB6BFF-3B7A-9FA4-10E4-152DDA2DDD8F}"/>
+            </a:ext>
+          </a:extLst>
+        </p:cNvPr>
+        <p:cNvGrpSpPr/>
+        <p:nvPr/>
+      </p:nvGrpSpPr>
+      <p:grpSpPr>
+        <a:xfrm>
+          <a:off x="0" y="0"/>
+          <a:ext cx="0" cy="0"/>
+          <a:chOff x="0" y="0"/>
+          <a:chExt cx="0" cy="0"/>
+        </a:xfrm>
+      </p:grpSpPr>
+      <p:sp>
+        <p:nvSpPr>
+          <p:cNvPr id="4" name="Rectangle: Rounded Corners 3">
+            <a:extLst>
+              <a:ext uri="{FF2B5EF4-FFF2-40B4-BE49-F238E27FC236}">
+                <a16:creationId xmlns:a16="http://schemas.microsoft.com/office/drawing/2014/main" id="{8AD5BB86-9EA2-A882-A0DC-9295B6BB7CEB}"/>
+              </a:ext>
+            </a:extLst>
+          </p:cNvPr>
+          <p:cNvSpPr/>
+          <p:nvPr/>
+        </p:nvSpPr>
+        <p:spPr>
+          <a:xfrm>
+            <a:off x="1100554" y="2119550"/>
+            <a:ext cx="7739566" cy="1089383"/>
+          </a:xfrm>
+          <a:prstGeom prst="roundRect">
+            <a:avLst>
+              <a:gd name="adj" fmla="val 6212"/>
+            </a:avLst>
+          </a:prstGeom>
+          <a:noFill/>
+        </p:spPr>
+        <p:style>
+          <a:lnRef idx="2">
+            <a:schemeClr val="accent1"/>
+          </a:lnRef>
+          <a:fillRef idx="1">
+            <a:schemeClr val="lt1"/>
+          </a:fillRef>
+          <a:effectRef idx="0">
+            <a:schemeClr val="accent1"/>
+          </a:effectRef>
+          <a:fontRef idx="minor">
+            <a:schemeClr val="dk1"/>
+          </a:fontRef>
+        </p:style>
+        <p:txBody>
+          <a:bodyPr rtlCol="0" anchor="t"/>
+          <a:lstStyle/>
+          <a:p>
+            <a:r>
+              <a:rPr lang="en-US" noProof="1">
+                <a:solidFill>
+                  <a:schemeClr val="accent1"/>
+                </a:solidFill>
+              </a:rPr>
+              <a:t>core</a:t>
+            </a:r>
+          </a:p>
+        </p:txBody>
+      </p:sp>
+      <p:sp>
+        <p:nvSpPr>
+          <p:cNvPr id="14" name="Rectangle: Rounded Corners 13">
+            <a:extLst>
+              <a:ext uri="{FF2B5EF4-FFF2-40B4-BE49-F238E27FC236}">
+                <a16:creationId xmlns:a16="http://schemas.microsoft.com/office/drawing/2014/main" id="{1635B79B-17D8-DB66-3632-53FECC2899E8}"/>
+              </a:ext>
+            </a:extLst>
+          </p:cNvPr>
+          <p:cNvSpPr/>
+          <p:nvPr/>
+        </p:nvSpPr>
+        <p:spPr>
+          <a:xfrm>
+            <a:off x="3200172" y="2538988"/>
+            <a:ext cx="1218310" cy="542074"/>
+          </a:xfrm>
+          <a:prstGeom prst="roundRect">
+            <a:avLst/>
+          </a:prstGeom>
+          <a:noFill/>
+        </p:spPr>
+        <p:style>
+          <a:lnRef idx="2">
+            <a:schemeClr val="accent1"/>
+          </a:lnRef>
+          <a:fillRef idx="1">
+            <a:schemeClr val="lt1"/>
+          </a:fillRef>
+          <a:effectRef idx="0">
+            <a:schemeClr val="accent1"/>
+          </a:effectRef>
+          <a:fontRef idx="minor">
+            <a:schemeClr val="dk1"/>
+          </a:fontRef>
+        </p:style>
+        <p:txBody>
+          <a:bodyPr rtlCol="0" anchor="ctr"/>
+          <a:lstStyle/>
+          <a:p>
+            <a:pPr algn="ctr"/>
+            <a:r>
+              <a:rPr lang="en-US" noProof="1">
+                <a:solidFill>
+                  <a:schemeClr val="accent1"/>
+                </a:solidFill>
+              </a:rPr>
+              <a:t>Var</a:t>
+            </a:r>
+          </a:p>
+          <a:p>
+            <a:pPr algn="ctr"/>
+            <a:r>
+              <a:rPr lang="en-US" sz="1000" noProof="1">
+                <a:solidFill>
+                  <a:schemeClr val="accent1"/>
+                </a:solidFill>
+              </a:rPr>
+              <a:t>(float, str)</a:t>
+            </a:r>
+            <a:endParaRPr lang="en-US" noProof="1">
+              <a:solidFill>
+                <a:schemeClr val="accent1"/>
+              </a:solidFill>
+            </a:endParaRPr>
+          </a:p>
+        </p:txBody>
+      </p:sp>
+      <p:sp>
+        <p:nvSpPr>
+          <p:cNvPr id="28" name="Rectangle: Rounded Corners 27">
+            <a:extLst>
+              <a:ext uri="{FF2B5EF4-FFF2-40B4-BE49-F238E27FC236}">
+                <a16:creationId xmlns:a16="http://schemas.microsoft.com/office/drawing/2014/main" id="{C9B78E06-CE99-FC3C-1175-F68691301C81}"/>
+              </a:ext>
+            </a:extLst>
+          </p:cNvPr>
+          <p:cNvSpPr/>
+          <p:nvPr/>
+        </p:nvSpPr>
+        <p:spPr>
+          <a:xfrm>
+            <a:off x="4786551" y="2538988"/>
+            <a:ext cx="1218310" cy="542074"/>
+          </a:xfrm>
+          <a:prstGeom prst="roundRect">
+            <a:avLst/>
+          </a:prstGeom>
+          <a:noFill/>
+        </p:spPr>
+        <p:style>
+          <a:lnRef idx="2">
+            <a:schemeClr val="accent1"/>
+          </a:lnRef>
+          <a:fillRef idx="1">
+            <a:schemeClr val="lt1"/>
+          </a:fillRef>
+          <a:effectRef idx="0">
+            <a:schemeClr val="accent1"/>
+          </a:effectRef>
+          <a:fontRef idx="minor">
+            <a:schemeClr val="dk1"/>
+          </a:fontRef>
+        </p:style>
+        <p:txBody>
+          <a:bodyPr rtlCol="0" anchor="ctr"/>
+          <a:lstStyle/>
+          <a:p>
+            <a:pPr algn="ctr"/>
+            <a:r>
+              <a:rPr lang="en-US" noProof="1">
+                <a:solidFill>
+                  <a:schemeClr val="accent1"/>
+                </a:solidFill>
+              </a:rPr>
+              <a:t>Array</a:t>
+            </a:r>
+          </a:p>
+          <a:p>
+            <a:pPr algn="ctr"/>
+            <a:r>
+              <a:rPr lang="en-US" sz="1000" noProof="1">
+                <a:solidFill>
+                  <a:schemeClr val="accent1"/>
+                </a:solidFill>
+              </a:rPr>
+              <a:t>(np.ndarray, str)</a:t>
+            </a:r>
+            <a:endParaRPr lang="en-US" noProof="1">
+              <a:solidFill>
+                <a:schemeClr val="accent1"/>
+              </a:solidFill>
+            </a:endParaRPr>
+          </a:p>
+        </p:txBody>
+      </p:sp>
+      <p:sp>
+        <p:nvSpPr>
+          <p:cNvPr id="11" name="Rectangle: Rounded Corners 10">
+            <a:extLst>
+              <a:ext uri="{FF2B5EF4-FFF2-40B4-BE49-F238E27FC236}">
+                <a16:creationId xmlns:a16="http://schemas.microsoft.com/office/drawing/2014/main" id="{1E26146B-754C-C345-9ED7-1AB0B4064D0E}"/>
+              </a:ext>
+            </a:extLst>
+          </p:cNvPr>
+          <p:cNvSpPr/>
+          <p:nvPr/>
+        </p:nvSpPr>
+        <p:spPr>
+          <a:xfrm>
+            <a:off x="6388868" y="2538988"/>
+            <a:ext cx="1593910" cy="542074"/>
+          </a:xfrm>
+          <a:prstGeom prst="roundRect">
+            <a:avLst/>
+          </a:prstGeom>
+          <a:noFill/>
+          <a:ln>
+            <a:prstDash val="lgDash"/>
+          </a:ln>
+        </p:spPr>
+        <p:style>
+          <a:lnRef idx="2">
+            <a:schemeClr val="accent1"/>
+          </a:lnRef>
+          <a:fillRef idx="1">
+            <a:schemeClr val="lt1"/>
+          </a:fillRef>
+          <a:effectRef idx="0">
+            <a:schemeClr val="accent1"/>
+          </a:effectRef>
+          <a:fontRef idx="minor">
+            <a:schemeClr val="dk1"/>
+          </a:fontRef>
+        </p:style>
+        <p:txBody>
+          <a:bodyPr rtlCol="0" anchor="ctr"/>
+          <a:lstStyle/>
+          <a:p>
+            <a:pPr algn="ctr"/>
+            <a:r>
+              <a:rPr lang="en-US" noProof="1">
+                <a:solidFill>
+                  <a:schemeClr val="accent1"/>
+                </a:solidFill>
+              </a:rPr>
+              <a:t>Frame</a:t>
+            </a:r>
+          </a:p>
+          <a:p>
+            <a:pPr algn="ctr"/>
+            <a:r>
+              <a:rPr lang="en-US" sz="1000" noProof="1">
+                <a:solidFill>
+                  <a:schemeClr val="accent1"/>
+                </a:solidFill>
+              </a:rPr>
+              <a:t>(pd.DataFrame, str)</a:t>
+            </a:r>
+            <a:endParaRPr lang="en-US" sz="1400" noProof="1">
+              <a:solidFill>
+                <a:schemeClr val="accent1"/>
+              </a:solidFill>
+            </a:endParaRPr>
           </a:p>
         </p:txBody>
       </p:sp>
       <p:grpSp>
         <p:nvGrpSpPr>
-          <p:cNvPr id="44" name="Group 43">
-            <a:extLst>
-              <a:ext uri="{FF2B5EF4-FFF2-40B4-BE49-F238E27FC236}">
-                <a16:creationId xmlns:a16="http://schemas.microsoft.com/office/drawing/2014/main" id="{B6632C65-8B2D-1F82-0826-B4B7F21BA203}"/>
+          <p:cNvPr id="25" name="Group 24">
+            <a:extLst>
+              <a:ext uri="{FF2B5EF4-FFF2-40B4-BE49-F238E27FC236}">
+                <a16:creationId xmlns:a16="http://schemas.microsoft.com/office/drawing/2014/main" id="{F9AB1282-5FA5-1738-65F7-3FE6A8165E61}"/>
               </a:ext>
             </a:extLst>
           </p:cNvPr>
@@ -4057,18 +5225,19 @@
         </p:nvGrpSpPr>
         <p:grpSpPr>
           <a:xfrm>
-            <a:off x="3383767" y="1576465"/>
-            <a:ext cx="2732049" cy="5167312"/>
-            <a:chOff x="3383767" y="1576465"/>
-            <a:chExt cx="2732049" cy="5167312"/>
+            <a:off x="1097920" y="3367449"/>
+            <a:ext cx="7739566" cy="1089383"/>
+            <a:chOff x="1561744" y="2130515"/>
+            <a:chExt cx="6938534" cy="963330"/>
           </a:xfrm>
+          <a:noFill/>
         </p:grpSpPr>
         <p:sp>
           <p:nvSpPr>
-            <p:cNvPr id="11" name="Rectangle: Rounded Corners 10">
+            <p:cNvPr id="6" name="Rectangle: Rounded Corners 5">
               <a:extLst>
                 <a:ext uri="{FF2B5EF4-FFF2-40B4-BE49-F238E27FC236}">
-                  <a16:creationId xmlns:a16="http://schemas.microsoft.com/office/drawing/2014/main" id="{01E56B78-3CF5-15E6-C035-BCF9A5BECF4B}"/>
+                  <a16:creationId xmlns:a16="http://schemas.microsoft.com/office/drawing/2014/main" id="{CDD516AD-A453-D6F4-FF5E-CCD2DA28A785}"/>
                 </a:ext>
               </a:extLst>
             </p:cNvPr>
@@ -4077,161 +5246,19 @@
           </p:nvSpPr>
           <p:spPr>
             <a:xfrm>
-              <a:off x="3383767" y="1576465"/>
-              <a:ext cx="2732049" cy="5167312"/>
+              <a:off x="3186532" y="2533987"/>
+              <a:ext cx="1128739" cy="402198"/>
             </a:xfrm>
             <a:prstGeom prst="roundRect">
               <a:avLst/>
             </a:prstGeom>
-          </p:spPr>
-          <p:style>
-            <a:lnRef idx="2">
-              <a:schemeClr val="accent1"/>
-            </a:lnRef>
-            <a:fillRef idx="1">
-              <a:schemeClr val="lt1"/>
-            </a:fillRef>
-            <a:effectRef idx="0">
-              <a:schemeClr val="accent1"/>
-            </a:effectRef>
-            <a:fontRef idx="minor">
-              <a:schemeClr val="dk1"/>
-            </a:fontRef>
-          </p:style>
-          <p:txBody>
-            <a:bodyPr rtlCol="0" anchor="t"/>
-            <a:lstStyle/>
-            <a:p>
-              <a:pPr algn="ctr"/>
-              <a:r>
-                <a:rPr lang="en-IE" dirty="0"/>
-                <a:t>DEWH</a:t>
-              </a:r>
-            </a:p>
-          </p:txBody>
-        </p:sp>
-        <p:sp>
-          <p:nvSpPr>
-            <p:cNvPr id="12" name="Rectangle: Rounded Corners 11">
-              <a:extLst>
-                <a:ext uri="{FF2B5EF4-FFF2-40B4-BE49-F238E27FC236}">
-                  <a16:creationId xmlns:a16="http://schemas.microsoft.com/office/drawing/2014/main" id="{F62E8FA5-AD57-3496-D7CE-2452398DDB03}"/>
-                </a:ext>
-              </a:extLst>
-            </p:cNvPr>
-            <p:cNvSpPr/>
-            <p:nvPr/>
-          </p:nvSpPr>
-          <p:spPr>
-            <a:xfrm>
-              <a:off x="3868849" y="2126670"/>
-              <a:ext cx="1761893" cy="501805"/>
-            </a:xfrm>
-            <a:prstGeom prst="roundRect">
-              <a:avLst/>
-            </a:prstGeom>
-          </p:spPr>
-          <p:style>
-            <a:lnRef idx="2">
-              <a:schemeClr val="accent1"/>
-            </a:lnRef>
-            <a:fillRef idx="1">
-              <a:schemeClr val="lt1"/>
-            </a:fillRef>
-            <a:effectRef idx="0">
-              <a:schemeClr val="accent1"/>
-            </a:effectRef>
-            <a:fontRef idx="minor">
-              <a:schemeClr val="dk1"/>
-            </a:fontRef>
-          </p:style>
-          <p:txBody>
-            <a:bodyPr rtlCol="0" anchor="ctr"/>
-            <a:lstStyle/>
-            <a:p>
-              <a:pPr algn="ctr"/>
-              <a:r>
-                <a:rPr lang="en-IE" dirty="0">
-                  <a:solidFill>
-                    <a:schemeClr val="accent1"/>
-                  </a:solidFill>
-                </a:rPr>
-                <a:t>Settings</a:t>
-              </a:r>
-            </a:p>
-          </p:txBody>
-        </p:sp>
-        <p:sp>
-          <p:nvSpPr>
-            <p:cNvPr id="13" name="Rectangle: Rounded Corners 12">
-              <a:extLst>
-                <a:ext uri="{FF2B5EF4-FFF2-40B4-BE49-F238E27FC236}">
-                  <a16:creationId xmlns:a16="http://schemas.microsoft.com/office/drawing/2014/main" id="{92B23FFA-D685-E1FA-0174-E576894B4EFA}"/>
-                </a:ext>
-              </a:extLst>
-            </p:cNvPr>
-            <p:cNvSpPr/>
-            <p:nvPr/>
-          </p:nvSpPr>
-          <p:spPr>
-            <a:xfrm>
-              <a:off x="3868844" y="2714909"/>
-              <a:ext cx="1761893" cy="501805"/>
-            </a:xfrm>
-            <a:prstGeom prst="roundRect">
-              <a:avLst/>
-            </a:prstGeom>
-          </p:spPr>
-          <p:style>
-            <a:lnRef idx="2">
-              <a:schemeClr val="accent1"/>
-            </a:lnRef>
-            <a:fillRef idx="1">
-              <a:schemeClr val="lt1"/>
-            </a:fillRef>
-            <a:effectRef idx="0">
-              <a:schemeClr val="accent1"/>
-            </a:effectRef>
-            <a:fontRef idx="minor">
-              <a:schemeClr val="dk1"/>
-            </a:fontRef>
-          </p:style>
-          <p:txBody>
-            <a:bodyPr rtlCol="0" anchor="ctr"/>
-            <a:lstStyle/>
-            <a:p>
-              <a:pPr algn="ctr"/>
-              <a:r>
-                <a:rPr lang="en-IE" dirty="0">
-                  <a:solidFill>
-                    <a:schemeClr val="accent1"/>
-                  </a:solidFill>
-                </a:rPr>
-                <a:t>Location</a:t>
-              </a:r>
-            </a:p>
-          </p:txBody>
-        </p:sp>
-        <p:sp>
-          <p:nvSpPr>
-            <p:cNvPr id="15" name="Rectangle: Rounded Corners 14">
-              <a:extLst>
-                <a:ext uri="{FF2B5EF4-FFF2-40B4-BE49-F238E27FC236}">
-                  <a16:creationId xmlns:a16="http://schemas.microsoft.com/office/drawing/2014/main" id="{00ACC886-26DB-B85F-06C1-50E6BEF005B3}"/>
-                </a:ext>
-              </a:extLst>
-            </p:cNvPr>
-            <p:cNvSpPr/>
-            <p:nvPr/>
-          </p:nvSpPr>
-          <p:spPr>
-            <a:xfrm>
-              <a:off x="3868846" y="4428275"/>
-              <a:ext cx="1761893" cy="501805"/>
-            </a:xfrm>
-            <a:prstGeom prst="roundRect">
-              <a:avLst/>
-            </a:prstGeom>
+            <a:grpFill/>
+            <a:ln>
+              <a:solidFill>
+                <a:schemeClr val="accent3"/>
+              </a:solidFill>
+              <a:prstDash val="dash"/>
+            </a:ln>
           </p:spPr>
           <p:style>
             <a:lnRef idx="2">
@@ -4253,22 +5280,22 @@
             <a:p>
               <a:pPr algn="ctr"/>
               <a:r>
-                <a:rPr lang="en-IE" dirty="0">
+                <a:rPr lang="en-US" noProof="1">
                   <a:solidFill>
-                    <a:schemeClr val="accent2"/>
+                    <a:schemeClr val="accent3"/>
                   </a:solidFill>
                 </a:rPr>
-                <a:t>Control</a:t>
+                <a:t>htc</a:t>
               </a:r>
             </a:p>
           </p:txBody>
         </p:sp>
         <p:sp>
           <p:nvSpPr>
-            <p:cNvPr id="16" name="Rectangle: Rounded Corners 15">
+            <p:cNvPr id="7" name="Rectangle: Rounded Corners 6">
               <a:extLst>
                 <a:ext uri="{FF2B5EF4-FFF2-40B4-BE49-F238E27FC236}">
-                  <a16:creationId xmlns:a16="http://schemas.microsoft.com/office/drawing/2014/main" id="{9FE43E71-6B34-B56A-237D-E1AA30589C0B}"/>
+                  <a16:creationId xmlns:a16="http://schemas.microsoft.com/office/drawing/2014/main" id="{5024CA8D-09BA-4DC5-EC2E-4B4B1F199AA8}"/>
                 </a:ext>
               </a:extLst>
             </p:cNvPr>
@@ -4277,12 +5304,19 @@
           </p:nvSpPr>
           <p:spPr>
             <a:xfrm>
-              <a:off x="3868846" y="5006204"/>
-              <a:ext cx="1761893" cy="501805"/>
+              <a:off x="4625175" y="2533987"/>
+              <a:ext cx="1128739" cy="402198"/>
             </a:xfrm>
             <a:prstGeom prst="roundRect">
               <a:avLst/>
             </a:prstGeom>
+            <a:grpFill/>
+            <a:ln>
+              <a:solidFill>
+                <a:schemeClr val="accent3"/>
+              </a:solidFill>
+              <a:prstDash val="dash"/>
+            </a:ln>
           </p:spPr>
           <p:style>
             <a:lnRef idx="2">
@@ -4304,22 +5338,22 @@
             <a:p>
               <a:pPr algn="ctr"/>
               <a:r>
-                <a:rPr lang="en-IE" dirty="0">
+                <a:rPr lang="en-US" noProof="1">
                   <a:solidFill>
-                    <a:schemeClr val="accent2"/>
+                    <a:schemeClr val="accent3"/>
                   </a:solidFill>
                 </a:rPr>
-                <a:t>DEWH</a:t>
+                <a:t>solar</a:t>
               </a:r>
             </a:p>
           </p:txBody>
         </p:sp>
         <p:sp>
           <p:nvSpPr>
-            <p:cNvPr id="17" name="Rectangle: Rounded Corners 16">
+            <p:cNvPr id="9" name="Rectangle: Rounded Corners 8">
               <a:extLst>
                 <a:ext uri="{FF2B5EF4-FFF2-40B4-BE49-F238E27FC236}">
-                  <a16:creationId xmlns:a16="http://schemas.microsoft.com/office/drawing/2014/main" id="{6495EA7B-423E-EBC2-EB65-4DFF35FC395F}"/>
+                  <a16:creationId xmlns:a16="http://schemas.microsoft.com/office/drawing/2014/main" id="{8B872FBA-CD7B-92DC-5BCE-269AB7734F07}"/>
                 </a:ext>
               </a:extLst>
             </p:cNvPr>
@@ -4328,12 +5362,18 @@
           </p:nvSpPr>
           <p:spPr>
             <a:xfrm>
-              <a:off x="3868846" y="5576046"/>
-              <a:ext cx="1761893" cy="501805"/>
+              <a:off x="1788940" y="2544139"/>
+              <a:ext cx="1128739" cy="402198"/>
             </a:xfrm>
             <a:prstGeom prst="roundRect">
               <a:avLst/>
             </a:prstGeom>
+            <a:grpFill/>
+            <a:ln>
+              <a:solidFill>
+                <a:schemeClr val="accent3"/>
+              </a:solidFill>
+            </a:ln>
           </p:spPr>
           <p:style>
             <a:lnRef idx="2">
@@ -4355,27 +5395,22 @@
             <a:p>
               <a:pPr algn="ctr"/>
               <a:r>
-                <a:rPr lang="en-IE" dirty="0" err="1">
+                <a:rPr lang="en-US" noProof="1">
                   <a:solidFill>
-                    <a:schemeClr val="accent2"/>
+                    <a:schemeClr val="accent3"/>
                   </a:solidFill>
                 </a:rPr>
-                <a:t>PVSystem</a:t>
+                <a:t>props</a:t>
               </a:r>
-              <a:endParaRPr lang="en-IE" dirty="0">
-                <a:solidFill>
-                  <a:schemeClr val="accent2"/>
-                </a:solidFill>
-              </a:endParaRPr>
             </a:p>
           </p:txBody>
         </p:sp>
         <p:sp>
           <p:nvSpPr>
-            <p:cNvPr id="18" name="Rectangle: Rounded Corners 17">
+            <p:cNvPr id="12" name="Rectangle: Rounded Corners 11">
               <a:extLst>
                 <a:ext uri="{FF2B5EF4-FFF2-40B4-BE49-F238E27FC236}">
-                  <a16:creationId xmlns:a16="http://schemas.microsoft.com/office/drawing/2014/main" id="{45CBA6FC-BF96-67E8-A1B8-C8FD88875E50}"/>
+                  <a16:creationId xmlns:a16="http://schemas.microsoft.com/office/drawing/2014/main" id="{9EB7DE0C-0FD7-E80F-9D94-F3AE0363B77C}"/>
                 </a:ext>
               </a:extLst>
             </p:cNvPr>
@@ -4384,12 +5419,505 @@
           </p:nvSpPr>
           <p:spPr>
             <a:xfrm>
-              <a:off x="3868846" y="6140372"/>
-              <a:ext cx="1761894" cy="501805"/>
+              <a:off x="6063818" y="2533987"/>
+              <a:ext cx="1128739" cy="402198"/>
             </a:xfrm>
             <a:prstGeom prst="roundRect">
               <a:avLst/>
             </a:prstGeom>
+            <a:grpFill/>
+            <a:ln>
+              <a:solidFill>
+                <a:schemeClr val="accent3"/>
+              </a:solidFill>
+              <a:prstDash val="dash"/>
+            </a:ln>
+          </p:spPr>
+          <p:style>
+            <a:lnRef idx="2">
+              <a:schemeClr val="accent2"/>
+            </a:lnRef>
+            <a:fillRef idx="1">
+              <a:schemeClr val="lt1"/>
+            </a:fillRef>
+            <a:effectRef idx="0">
+              <a:schemeClr val="accent2"/>
+            </a:effectRef>
+            <a:fontRef idx="minor">
+              <a:schemeClr val="dk1"/>
+            </a:fontRef>
+          </p:style>
+          <p:txBody>
+            <a:bodyPr rtlCol="0" anchor="ctr"/>
+            <a:lstStyle/>
+            <a:p>
+              <a:pPr algn="ctr"/>
+              <a:r>
+                <a:rPr lang="en-US" noProof="1">
+                  <a:solidFill>
+                    <a:schemeClr val="accent3"/>
+                  </a:solidFill>
+                </a:rPr>
+                <a:t>loc</a:t>
+              </a:r>
+            </a:p>
+          </p:txBody>
+        </p:sp>
+        <p:sp>
+          <p:nvSpPr>
+            <p:cNvPr id="13" name="Rectangle: Rounded Corners 12">
+              <a:extLst>
+                <a:ext uri="{FF2B5EF4-FFF2-40B4-BE49-F238E27FC236}">
+                  <a16:creationId xmlns:a16="http://schemas.microsoft.com/office/drawing/2014/main" id="{4571A80F-5F95-38F9-C27E-88F933001810}"/>
+                </a:ext>
+              </a:extLst>
+            </p:cNvPr>
+            <p:cNvSpPr/>
+            <p:nvPr/>
+          </p:nvSpPr>
+          <p:spPr>
+            <a:xfrm>
+              <a:off x="1561744" y="2130515"/>
+              <a:ext cx="6938534" cy="963330"/>
+            </a:xfrm>
+            <a:prstGeom prst="roundRect">
+              <a:avLst>
+                <a:gd name="adj" fmla="val 6212"/>
+              </a:avLst>
+            </a:prstGeom>
+            <a:grpFill/>
+            <a:ln>
+              <a:solidFill>
+                <a:schemeClr val="accent3"/>
+              </a:solidFill>
+            </a:ln>
+          </p:spPr>
+          <p:style>
+            <a:lnRef idx="2">
+              <a:schemeClr val="accent1"/>
+            </a:lnRef>
+            <a:fillRef idx="1">
+              <a:schemeClr val="lt1"/>
+            </a:fillRef>
+            <a:effectRef idx="0">
+              <a:schemeClr val="accent1"/>
+            </a:effectRef>
+            <a:fontRef idx="minor">
+              <a:schemeClr val="dk1"/>
+            </a:fontRef>
+          </p:style>
+          <p:txBody>
+            <a:bodyPr rtlCol="0" anchor="t"/>
+            <a:lstStyle/>
+            <a:p>
+              <a:r>
+                <a:rPr lang="en-US" noProof="1">
+                  <a:solidFill>
+                    <a:schemeClr val="accent3"/>
+                  </a:solidFill>
+                </a:rPr>
+                <a:t>utils</a:t>
+              </a:r>
+            </a:p>
+          </p:txBody>
+        </p:sp>
+      </p:grpSp>
+      <p:sp>
+        <p:nvSpPr>
+          <p:cNvPr id="17" name="Rectangle: Rounded Corners 16">
+            <a:extLst>
+              <a:ext uri="{FF2B5EF4-FFF2-40B4-BE49-F238E27FC236}">
+                <a16:creationId xmlns:a16="http://schemas.microsoft.com/office/drawing/2014/main" id="{E5613ACE-EBF2-9450-76C4-1B4C63E2AA35}"/>
+              </a:ext>
+            </a:extLst>
+          </p:cNvPr>
+          <p:cNvSpPr/>
+          <p:nvPr/>
+        </p:nvSpPr>
+        <p:spPr>
+          <a:xfrm>
+            <a:off x="9031843" y="2101755"/>
+            <a:ext cx="1897353" cy="4201745"/>
+          </a:xfrm>
+          <a:prstGeom prst="roundRect">
+            <a:avLst>
+              <a:gd name="adj" fmla="val 9731"/>
+            </a:avLst>
+          </a:prstGeom>
+          <a:noFill/>
+          <a:ln>
+            <a:solidFill>
+              <a:schemeClr val="accent2"/>
+            </a:solidFill>
+          </a:ln>
+        </p:spPr>
+        <p:style>
+          <a:lnRef idx="2">
+            <a:schemeClr val="accent1">
+              <a:shade val="15000"/>
+            </a:schemeClr>
+          </a:lnRef>
+          <a:fillRef idx="1">
+            <a:schemeClr val="accent1"/>
+          </a:fillRef>
+          <a:effectRef idx="0">
+            <a:schemeClr val="accent1"/>
+          </a:effectRef>
+          <a:fontRef idx="minor">
+            <a:schemeClr val="lt1"/>
+          </a:fontRef>
+        </p:style>
+        <p:txBody>
+          <a:bodyPr lIns="3600" rIns="3600" rtlCol="0" anchor="t"/>
+          <a:lstStyle/>
+          <a:p>
+            <a:pPr algn="ctr"/>
+            <a:r>
+              <a:rPr lang="en-US" sz="1600" noProof="1">
+                <a:solidFill>
+                  <a:schemeClr val="accent2"/>
+                </a:solidFill>
+              </a:rPr>
+              <a:t>catalog</a:t>
+            </a:r>
+          </a:p>
+        </p:txBody>
+      </p:sp>
+      <p:sp>
+        <p:nvSpPr>
+          <p:cNvPr id="18" name="Rectangle: Rounded Corners 17">
+            <a:extLst>
+              <a:ext uri="{FF2B5EF4-FFF2-40B4-BE49-F238E27FC236}">
+                <a16:creationId xmlns:a16="http://schemas.microsoft.com/office/drawing/2014/main" id="{617FBFD8-0ABA-8A26-A75D-15E2A691D412}"/>
+              </a:ext>
+            </a:extLst>
+          </p:cNvPr>
+          <p:cNvSpPr/>
+          <p:nvPr/>
+        </p:nvSpPr>
+        <p:spPr>
+          <a:xfrm>
+            <a:off x="9264027" y="3001344"/>
+            <a:ext cx="1452084" cy="365840"/>
+          </a:xfrm>
+          <a:prstGeom prst="roundRect">
+            <a:avLst/>
+          </a:prstGeom>
+          <a:noFill/>
+          <a:ln>
+            <a:solidFill>
+              <a:schemeClr val="accent2"/>
+            </a:solidFill>
+          </a:ln>
+        </p:spPr>
+        <p:style>
+          <a:lnRef idx="2">
+            <a:schemeClr val="accent2"/>
+          </a:lnRef>
+          <a:fillRef idx="1">
+            <a:schemeClr val="lt1"/>
+          </a:fillRef>
+          <a:effectRef idx="0">
+            <a:schemeClr val="accent2"/>
+          </a:effectRef>
+          <a:fontRef idx="minor">
+            <a:schemeClr val="dk1"/>
+          </a:fontRef>
+        </p:style>
+        <p:txBody>
+          <a:bodyPr rtlCol="0" anchor="ctr"/>
+          <a:lstStyle/>
+          <a:p>
+            <a:pPr algn="ctr"/>
+            <a:r>
+              <a:rPr lang="en-US" noProof="1">
+                <a:solidFill>
+                  <a:schemeClr val="accent2"/>
+                </a:solidFill>
+              </a:rPr>
+              <a:t>dwh</a:t>
+            </a:r>
+          </a:p>
+        </p:txBody>
+      </p:sp>
+      <p:sp>
+        <p:nvSpPr>
+          <p:cNvPr id="19" name="Rectangle: Rounded Corners 18">
+            <a:extLst>
+              <a:ext uri="{FF2B5EF4-FFF2-40B4-BE49-F238E27FC236}">
+                <a16:creationId xmlns:a16="http://schemas.microsoft.com/office/drawing/2014/main" id="{8DA861DE-8C9E-7A41-F399-22685ED78BC2}"/>
+              </a:ext>
+            </a:extLst>
+          </p:cNvPr>
+          <p:cNvSpPr/>
+          <p:nvPr/>
+        </p:nvSpPr>
+        <p:spPr>
+          <a:xfrm>
+            <a:off x="9267892" y="3899020"/>
+            <a:ext cx="1452084" cy="365840"/>
+          </a:xfrm>
+          <a:prstGeom prst="roundRect">
+            <a:avLst/>
+          </a:prstGeom>
+          <a:noFill/>
+          <a:ln>
+            <a:solidFill>
+              <a:schemeClr val="accent2"/>
+            </a:solidFill>
+            <a:prstDash val="sysDot"/>
+          </a:ln>
+        </p:spPr>
+        <p:style>
+          <a:lnRef idx="2">
+            <a:schemeClr val="accent2"/>
+          </a:lnRef>
+          <a:fillRef idx="1">
+            <a:schemeClr val="lt1"/>
+          </a:fillRef>
+          <a:effectRef idx="0">
+            <a:schemeClr val="accent2"/>
+          </a:effectRef>
+          <a:fontRef idx="minor">
+            <a:schemeClr val="dk1"/>
+          </a:fontRef>
+        </p:style>
+        <p:txBody>
+          <a:bodyPr rtlCol="0" anchor="ctr"/>
+          <a:lstStyle/>
+          <a:p>
+            <a:pPr algn="ctr"/>
+            <a:r>
+              <a:rPr lang="en-US" noProof="1">
+                <a:solidFill>
+                  <a:schemeClr val="accent2"/>
+                </a:solidFill>
+              </a:rPr>
+              <a:t>stg</a:t>
+            </a:r>
+          </a:p>
+        </p:txBody>
+      </p:sp>
+      <p:sp>
+        <p:nvSpPr>
+          <p:cNvPr id="20" name="Rectangle: Rounded Corners 19">
+            <a:extLst>
+              <a:ext uri="{FF2B5EF4-FFF2-40B4-BE49-F238E27FC236}">
+                <a16:creationId xmlns:a16="http://schemas.microsoft.com/office/drawing/2014/main" id="{86E78440-BB03-BDFB-EE39-A637007A651E}"/>
+              </a:ext>
+            </a:extLst>
+          </p:cNvPr>
+          <p:cNvSpPr/>
+          <p:nvPr/>
+        </p:nvSpPr>
+        <p:spPr>
+          <a:xfrm>
+            <a:off x="9264027" y="2560512"/>
+            <a:ext cx="1452084" cy="365840"/>
+          </a:xfrm>
+          <a:prstGeom prst="roundRect">
+            <a:avLst/>
+          </a:prstGeom>
+          <a:noFill/>
+          <a:ln>
+            <a:solidFill>
+              <a:schemeClr val="accent2"/>
+            </a:solidFill>
+          </a:ln>
+        </p:spPr>
+        <p:style>
+          <a:lnRef idx="2">
+            <a:schemeClr val="accent2"/>
+          </a:lnRef>
+          <a:fillRef idx="1">
+            <a:schemeClr val="lt1"/>
+          </a:fillRef>
+          <a:effectRef idx="0">
+            <a:schemeClr val="accent2"/>
+          </a:effectRef>
+          <a:fontRef idx="minor">
+            <a:schemeClr val="dk1"/>
+          </a:fontRef>
+        </p:style>
+        <p:txBody>
+          <a:bodyPr rtlCol="0" anchor="ctr"/>
+          <a:lstStyle/>
+          <a:p>
+            <a:pPr algn="ctr"/>
+            <a:r>
+              <a:rPr lang="en-US" noProof="1">
+                <a:solidFill>
+                  <a:schemeClr val="accent2"/>
+                </a:solidFill>
+              </a:rPr>
+              <a:t>csp</a:t>
+            </a:r>
+          </a:p>
+        </p:txBody>
+      </p:sp>
+      <p:sp>
+        <p:nvSpPr>
+          <p:cNvPr id="22" name="Rectangle: Rounded Corners 21">
+            <a:extLst>
+              <a:ext uri="{FF2B5EF4-FFF2-40B4-BE49-F238E27FC236}">
+                <a16:creationId xmlns:a16="http://schemas.microsoft.com/office/drawing/2014/main" id="{8F64DE1F-81BC-FBC5-42A4-C03EAF98180A}"/>
+              </a:ext>
+            </a:extLst>
+          </p:cNvPr>
+          <p:cNvSpPr/>
+          <p:nvPr/>
+        </p:nvSpPr>
+        <p:spPr>
+          <a:xfrm>
+            <a:off x="845574" y="1789472"/>
+            <a:ext cx="10451691" cy="4876800"/>
+          </a:xfrm>
+          <a:prstGeom prst="roundRect">
+            <a:avLst>
+              <a:gd name="adj" fmla="val 6781"/>
+            </a:avLst>
+          </a:prstGeom>
+          <a:noFill/>
+          <a:ln w="38100">
+            <a:solidFill>
+              <a:schemeClr val="bg1">
+                <a:lumMod val="50000"/>
+                <a:lumOff val="50000"/>
+              </a:schemeClr>
+            </a:solidFill>
+          </a:ln>
+        </p:spPr>
+        <p:style>
+          <a:lnRef idx="2">
+            <a:schemeClr val="accent1">
+              <a:shade val="15000"/>
+            </a:schemeClr>
+          </a:lnRef>
+          <a:fillRef idx="1">
+            <a:schemeClr val="accent1"/>
+          </a:fillRef>
+          <a:effectRef idx="0">
+            <a:schemeClr val="accent1"/>
+          </a:effectRef>
+          <a:fontRef idx="minor">
+            <a:schemeClr val="lt1"/>
+          </a:fontRef>
+        </p:style>
+        <p:txBody>
+          <a:bodyPr rtlCol="0" anchor="t"/>
+          <a:lstStyle/>
+          <a:p>
+            <a:pPr algn="ctr"/>
+            <a:endParaRPr lang="en-US" noProof="1">
+              <a:solidFill>
+                <a:schemeClr val="tx1"/>
+              </a:solidFill>
+            </a:endParaRPr>
+          </a:p>
+        </p:txBody>
+      </p:sp>
+      <p:sp>
+        <p:nvSpPr>
+          <p:cNvPr id="2" name="Rectangle: Rounded Corners 1">
+            <a:extLst>
+              <a:ext uri="{FF2B5EF4-FFF2-40B4-BE49-F238E27FC236}">
+                <a16:creationId xmlns:a16="http://schemas.microsoft.com/office/drawing/2014/main" id="{71B3E5F6-B4FE-7633-5625-48353B5F120E}"/>
+              </a:ext>
+            </a:extLst>
+          </p:cNvPr>
+          <p:cNvSpPr/>
+          <p:nvPr/>
+        </p:nvSpPr>
+        <p:spPr>
+          <a:xfrm>
+            <a:off x="9269670" y="3446864"/>
+            <a:ext cx="1452084" cy="365840"/>
+          </a:xfrm>
+          <a:prstGeom prst="roundRect">
+            <a:avLst/>
+          </a:prstGeom>
+          <a:noFill/>
+          <a:ln>
+            <a:solidFill>
+              <a:schemeClr val="accent2"/>
+            </a:solidFill>
+            <a:prstDash val="sysDot"/>
+          </a:ln>
+        </p:spPr>
+        <p:style>
+          <a:lnRef idx="2">
+            <a:schemeClr val="accent2"/>
+          </a:lnRef>
+          <a:fillRef idx="1">
+            <a:schemeClr val="lt1"/>
+          </a:fillRef>
+          <a:effectRef idx="0">
+            <a:schemeClr val="accent2"/>
+          </a:effectRef>
+          <a:fontRef idx="minor">
+            <a:schemeClr val="dk1"/>
+          </a:fontRef>
+        </p:style>
+        <p:txBody>
+          <a:bodyPr rtlCol="0" anchor="ctr"/>
+          <a:lstStyle/>
+          <a:p>
+            <a:pPr algn="ctr"/>
+            <a:r>
+              <a:rPr lang="en-US" noProof="1">
+                <a:solidFill>
+                  <a:schemeClr val="accent2"/>
+                </a:solidFill>
+              </a:rPr>
+              <a:t>desal</a:t>
+            </a:r>
+          </a:p>
+        </p:txBody>
+      </p:sp>
+      <p:grpSp>
+        <p:nvGrpSpPr>
+          <p:cNvPr id="24" name="Group 23">
+            <a:extLst>
+              <a:ext uri="{FF2B5EF4-FFF2-40B4-BE49-F238E27FC236}">
+                <a16:creationId xmlns:a16="http://schemas.microsoft.com/office/drawing/2014/main" id="{DB4B9BB6-2B03-C74A-B8D2-CB4A90CBCE3A}"/>
+              </a:ext>
+            </a:extLst>
+          </p:cNvPr>
+          <p:cNvGrpSpPr/>
+          <p:nvPr/>
+        </p:nvGrpSpPr>
+        <p:grpSpPr>
+          <a:xfrm>
+            <a:off x="1100554" y="4575318"/>
+            <a:ext cx="7739566" cy="1739476"/>
+            <a:chOff x="1581287" y="3723781"/>
+            <a:chExt cx="6938534" cy="1094125"/>
+          </a:xfrm>
+        </p:grpSpPr>
+        <p:sp>
+          <p:nvSpPr>
+            <p:cNvPr id="5" name="Rectangle: Rounded Corners 4">
+              <a:extLst>
+                <a:ext uri="{FF2B5EF4-FFF2-40B4-BE49-F238E27FC236}">
+                  <a16:creationId xmlns:a16="http://schemas.microsoft.com/office/drawing/2014/main" id="{A941E3E5-7B8E-A89E-E4B9-ACFC1F2E25BC}"/>
+                </a:ext>
+              </a:extLst>
+            </p:cNvPr>
+            <p:cNvSpPr/>
+            <p:nvPr/>
+          </p:nvSpPr>
+          <p:spPr>
+            <a:xfrm>
+              <a:off x="3246686" y="4129543"/>
+              <a:ext cx="1289646" cy="416152"/>
+            </a:xfrm>
+            <a:prstGeom prst="roundRect">
+              <a:avLst/>
+            </a:prstGeom>
+            <a:noFill/>
+            <a:ln>
+              <a:prstDash val="solid"/>
+            </a:ln>
           </p:spPr>
           <p:style>
             <a:lnRef idx="2">
@@ -4411,22 +5939,22 @@
             <a:p>
               <a:pPr algn="ctr"/>
               <a:r>
-                <a:rPr lang="en-IE" dirty="0">
+                <a:rPr lang="en-US" noProof="1">
                   <a:solidFill>
                     <a:schemeClr val="accent5"/>
                   </a:solidFill>
                 </a:rPr>
-                <a:t>Market</a:t>
+                <a:t>Plant</a:t>
               </a:r>
             </a:p>
           </p:txBody>
         </p:sp>
         <p:sp>
           <p:nvSpPr>
-            <p:cNvPr id="19" name="Rectangle: Rounded Corners 18">
+            <p:cNvPr id="10" name="Rectangle: Rounded Corners 9">
               <a:extLst>
                 <a:ext uri="{FF2B5EF4-FFF2-40B4-BE49-F238E27FC236}">
-                  <a16:creationId xmlns:a16="http://schemas.microsoft.com/office/drawing/2014/main" id="{38BEACDB-94C2-A5F9-242E-B4A660CDC40C}"/>
+                  <a16:creationId xmlns:a16="http://schemas.microsoft.com/office/drawing/2014/main" id="{E600AAD6-01EB-4536-0618-FCA27F567488}"/>
                 </a:ext>
               </a:extLst>
             </p:cNvPr>
@@ -4435,12 +5963,126 @@
           </p:nvSpPr>
           <p:spPr>
             <a:xfrm>
-              <a:off x="3868843" y="3280504"/>
-              <a:ext cx="1761893" cy="501805"/>
+              <a:off x="6550827" y="3839321"/>
+              <a:ext cx="1794481" cy="860375"/>
             </a:xfrm>
             <a:prstGeom prst="roundRect">
               <a:avLst/>
             </a:prstGeom>
+            <a:noFill/>
+            <a:ln>
+              <a:prstDash val="lgDash"/>
+            </a:ln>
+          </p:spPr>
+          <p:style>
+            <a:lnRef idx="2">
+              <a:schemeClr val="accent5"/>
+            </a:lnRef>
+            <a:fillRef idx="1">
+              <a:schemeClr val="lt1"/>
+            </a:fillRef>
+            <a:effectRef idx="0">
+              <a:schemeClr val="accent5"/>
+            </a:effectRef>
+            <a:fontRef idx="minor">
+              <a:schemeClr val="dk1"/>
+            </a:fontRef>
+          </p:style>
+          <p:txBody>
+            <a:bodyPr rtlCol="0" anchor="t" anchorCtr="0"/>
+            <a:lstStyle/>
+            <a:p>
+              <a:pPr algn="ctr"/>
+              <a:r>
+                <a:rPr lang="en-US" sz="1200" noProof="1">
+                  <a:solidFill>
+                    <a:schemeClr val="accent5"/>
+                  </a:solidFill>
+                </a:rPr>
+                <a:t>TSGs</a:t>
+              </a:r>
+            </a:p>
+          </p:txBody>
+        </p:sp>
+        <p:sp>
+          <p:nvSpPr>
+            <p:cNvPr id="15" name="Rectangle: Rounded Corners 14">
+              <a:extLst>
+                <a:ext uri="{FF2B5EF4-FFF2-40B4-BE49-F238E27FC236}">
+                  <a16:creationId xmlns:a16="http://schemas.microsoft.com/office/drawing/2014/main" id="{2DD8CDD5-858B-E394-E6F8-0785261DB6DA}"/>
+                </a:ext>
+              </a:extLst>
+            </p:cNvPr>
+            <p:cNvSpPr/>
+            <p:nvPr/>
+          </p:nvSpPr>
+          <p:spPr>
+            <a:xfrm>
+              <a:off x="1581287" y="3723781"/>
+              <a:ext cx="6938534" cy="1094125"/>
+            </a:xfrm>
+            <a:prstGeom prst="roundRect">
+              <a:avLst>
+                <a:gd name="adj" fmla="val 6212"/>
+              </a:avLst>
+            </a:prstGeom>
+            <a:noFill/>
+            <a:ln>
+              <a:solidFill>
+                <a:schemeClr val="accent5"/>
+              </a:solidFill>
+            </a:ln>
+          </p:spPr>
+          <p:style>
+            <a:lnRef idx="2">
+              <a:schemeClr val="accent1"/>
+            </a:lnRef>
+            <a:fillRef idx="1">
+              <a:schemeClr val="lt1"/>
+            </a:fillRef>
+            <a:effectRef idx="0">
+              <a:schemeClr val="accent1"/>
+            </a:effectRef>
+            <a:fontRef idx="minor">
+              <a:schemeClr val="dk1"/>
+            </a:fontRef>
+          </p:style>
+          <p:txBody>
+            <a:bodyPr rtlCol="0" anchor="t"/>
+            <a:lstStyle/>
+            <a:p>
+              <a:r>
+                <a:rPr lang="en-US" noProof="1">
+                  <a:solidFill>
+                    <a:schemeClr val="accent5"/>
+                  </a:solidFill>
+                </a:rPr>
+                <a:t>simulation</a:t>
+              </a:r>
+            </a:p>
+          </p:txBody>
+        </p:sp>
+        <p:sp>
+          <p:nvSpPr>
+            <p:cNvPr id="16" name="Rectangle: Rounded Corners 15">
+              <a:extLst>
+                <a:ext uri="{FF2B5EF4-FFF2-40B4-BE49-F238E27FC236}">
+                  <a16:creationId xmlns:a16="http://schemas.microsoft.com/office/drawing/2014/main" id="{569BD1DC-71BD-6FEB-EAD9-B5ED918C3DD3}"/>
+                </a:ext>
+              </a:extLst>
+            </p:cNvPr>
+            <p:cNvSpPr/>
+            <p:nvPr/>
+          </p:nvSpPr>
+          <p:spPr>
+            <a:xfrm>
+              <a:off x="4783450" y="4132879"/>
+              <a:ext cx="1559223" cy="415413"/>
+            </a:xfrm>
+            <a:prstGeom prst="roundRect">
+              <a:avLst/>
+            </a:prstGeom>
+            <a:noFill/>
           </p:spPr>
           <p:style>
             <a:lnRef idx="2">
@@ -4462,22 +6104,22 @@
             <a:p>
               <a:pPr algn="ctr"/>
               <a:r>
-                <a:rPr lang="en-IE" dirty="0">
+                <a:rPr lang="en-US" noProof="1">
                   <a:solidFill>
                     <a:schemeClr val="accent5"/>
                   </a:solidFill>
                 </a:rPr>
-                <a:t>Weather</a:t>
+                <a:t>Parametric</a:t>
               </a:r>
             </a:p>
           </p:txBody>
         </p:sp>
         <p:sp>
           <p:nvSpPr>
-            <p:cNvPr id="20" name="Rectangle: Rounded Corners 19">
+            <p:cNvPr id="8" name="Rectangle: Rounded Corners 7">
               <a:extLst>
                 <a:ext uri="{FF2B5EF4-FFF2-40B4-BE49-F238E27FC236}">
-                  <a16:creationId xmlns:a16="http://schemas.microsoft.com/office/drawing/2014/main" id="{C6B1A716-1BA0-D3E0-D8AD-41A8E5703B3C}"/>
+                  <a16:creationId xmlns:a16="http://schemas.microsoft.com/office/drawing/2014/main" id="{636B3AAB-9CE1-9957-DF31-58F2778F124E}"/>
                 </a:ext>
               </a:extLst>
             </p:cNvPr>
@@ -4486,12 +6128,16 @@
           </p:nvSpPr>
           <p:spPr>
             <a:xfrm>
-              <a:off x="3868846" y="3850346"/>
-              <a:ext cx="1761893" cy="501805"/>
+              <a:off x="1976368" y="4132982"/>
+              <a:ext cx="1023200" cy="415413"/>
             </a:xfrm>
             <a:prstGeom prst="roundRect">
               <a:avLst/>
             </a:prstGeom>
+            <a:noFill/>
+            <a:ln>
+              <a:prstDash val="lgDash"/>
+            </a:ln>
           </p:spPr>
           <p:style>
             <a:lnRef idx="2">
@@ -4513,1243 +6159,23 @@
             <a:p>
               <a:pPr algn="ctr"/>
               <a:r>
-                <a:rPr lang="en-IE" dirty="0">
+                <a:rPr lang="en-US" noProof="1">
                   <a:solidFill>
                     <a:schemeClr val="accent5"/>
                   </a:solidFill>
                 </a:rPr>
-                <a:t>HWDP</a:t>
+                <a:t>Model</a:t>
               </a:r>
             </a:p>
           </p:txBody>
         </p:sp>
       </p:grpSp>
-      <p:grpSp>
-        <p:nvGrpSpPr>
-          <p:cNvPr id="43" name="Group 42">
-            <a:extLst>
-              <a:ext uri="{FF2B5EF4-FFF2-40B4-BE49-F238E27FC236}">
-                <a16:creationId xmlns:a16="http://schemas.microsoft.com/office/drawing/2014/main" id="{BE7BE618-0E11-8A12-4395-20A971711CE9}"/>
-              </a:ext>
-            </a:extLst>
-          </p:cNvPr>
-          <p:cNvGrpSpPr/>
-          <p:nvPr/>
-        </p:nvGrpSpPr>
-        <p:grpSpPr>
-          <a:xfrm>
-            <a:off x="465872" y="1614489"/>
-            <a:ext cx="2732049" cy="5053088"/>
-            <a:chOff x="465872" y="1614489"/>
-            <a:chExt cx="2732049" cy="5053088"/>
-          </a:xfrm>
-        </p:grpSpPr>
-        <p:sp>
-          <p:nvSpPr>
-            <p:cNvPr id="4" name="Rectangle: Rounded Corners 3">
-              <a:extLst>
-                <a:ext uri="{FF2B5EF4-FFF2-40B4-BE49-F238E27FC236}">
-                  <a16:creationId xmlns:a16="http://schemas.microsoft.com/office/drawing/2014/main" id="{C3EA13C2-952C-A74C-04E2-0EEC64D40398}"/>
-                </a:ext>
-              </a:extLst>
-            </p:cNvPr>
-            <p:cNvSpPr/>
-            <p:nvPr/>
-          </p:nvSpPr>
-          <p:spPr>
-            <a:xfrm>
-              <a:off x="465872" y="1614489"/>
-              <a:ext cx="2732049" cy="5053088"/>
-            </a:xfrm>
-            <a:prstGeom prst="roundRect">
-              <a:avLst/>
-            </a:prstGeom>
-          </p:spPr>
-          <p:style>
-            <a:lnRef idx="2">
-              <a:schemeClr val="accent1"/>
-            </a:lnRef>
-            <a:fillRef idx="1">
-              <a:schemeClr val="lt1"/>
-            </a:fillRef>
-            <a:effectRef idx="0">
-              <a:schemeClr val="accent1"/>
-            </a:effectRef>
-            <a:fontRef idx="minor">
-              <a:schemeClr val="dk1"/>
-            </a:fontRef>
-          </p:style>
-          <p:txBody>
-            <a:bodyPr rtlCol="0" anchor="t"/>
-            <a:lstStyle/>
-            <a:p>
-              <a:pPr algn="ctr"/>
-              <a:r>
-                <a:rPr lang="en-IE" dirty="0" err="1"/>
-                <a:t>PlantCSP</a:t>
-              </a:r>
-              <a:endParaRPr lang="en-IE" dirty="0"/>
-            </a:p>
-          </p:txBody>
-        </p:sp>
-        <p:sp>
-          <p:nvSpPr>
-            <p:cNvPr id="5" name="Rectangle: Rounded Corners 4">
-              <a:extLst>
-                <a:ext uri="{FF2B5EF4-FFF2-40B4-BE49-F238E27FC236}">
-                  <a16:creationId xmlns:a16="http://schemas.microsoft.com/office/drawing/2014/main" id="{D5EDF7B1-5FB2-42DC-8966-F8934614CA3E}"/>
-                </a:ext>
-              </a:extLst>
-            </p:cNvPr>
-            <p:cNvSpPr/>
-            <p:nvPr/>
-          </p:nvSpPr>
-          <p:spPr>
-            <a:xfrm>
-              <a:off x="950952" y="3253059"/>
-              <a:ext cx="1761893" cy="501805"/>
-            </a:xfrm>
-            <a:prstGeom prst="roundRect">
-              <a:avLst/>
-            </a:prstGeom>
-          </p:spPr>
-          <p:style>
-            <a:lnRef idx="2">
-              <a:schemeClr val="accent5"/>
-            </a:lnRef>
-            <a:fillRef idx="1">
-              <a:schemeClr val="lt1"/>
-            </a:fillRef>
-            <a:effectRef idx="0">
-              <a:schemeClr val="accent5"/>
-            </a:effectRef>
-            <a:fontRef idx="minor">
-              <a:schemeClr val="dk1"/>
-            </a:fontRef>
-          </p:style>
-          <p:txBody>
-            <a:bodyPr rtlCol="0" anchor="ctr"/>
-            <a:lstStyle/>
-            <a:p>
-              <a:pPr algn="ctr"/>
-              <a:r>
-                <a:rPr lang="en-IE" dirty="0">
-                  <a:solidFill>
-                    <a:schemeClr val="accent5"/>
-                  </a:solidFill>
-                </a:rPr>
-                <a:t>Weather</a:t>
-              </a:r>
-            </a:p>
-          </p:txBody>
-        </p:sp>
-        <p:sp>
-          <p:nvSpPr>
-            <p:cNvPr id="6" name="Rectangle: Rounded Corners 5">
-              <a:extLst>
-                <a:ext uri="{FF2B5EF4-FFF2-40B4-BE49-F238E27FC236}">
-                  <a16:creationId xmlns:a16="http://schemas.microsoft.com/office/drawing/2014/main" id="{AC6DDA8C-B32E-4A11-6242-162DA4F0D4A1}"/>
-                </a:ext>
-              </a:extLst>
-            </p:cNvPr>
-            <p:cNvSpPr/>
-            <p:nvPr/>
-          </p:nvSpPr>
-          <p:spPr>
-            <a:xfrm>
-              <a:off x="950951" y="4390278"/>
-              <a:ext cx="1761893" cy="501805"/>
-            </a:xfrm>
-            <a:prstGeom prst="roundRect">
-              <a:avLst/>
-            </a:prstGeom>
-          </p:spPr>
-          <p:style>
-            <a:lnRef idx="2">
-              <a:schemeClr val="accent2"/>
-            </a:lnRef>
-            <a:fillRef idx="1">
-              <a:schemeClr val="lt1"/>
-            </a:fillRef>
-            <a:effectRef idx="0">
-              <a:schemeClr val="accent2"/>
-            </a:effectRef>
-            <a:fontRef idx="minor">
-              <a:schemeClr val="dk1"/>
-            </a:fontRef>
-          </p:style>
-          <p:txBody>
-            <a:bodyPr rtlCol="0" anchor="ctr"/>
-            <a:lstStyle/>
-            <a:p>
-              <a:pPr algn="ctr"/>
-              <a:r>
-                <a:rPr lang="en-IE" dirty="0">
-                  <a:solidFill>
-                    <a:schemeClr val="accent2"/>
-                  </a:solidFill>
-                </a:rPr>
-                <a:t>Receiver</a:t>
-              </a:r>
-            </a:p>
-          </p:txBody>
-        </p:sp>
-        <p:sp>
-          <p:nvSpPr>
-            <p:cNvPr id="7" name="Rectangle: Rounded Corners 6">
-              <a:extLst>
-                <a:ext uri="{FF2B5EF4-FFF2-40B4-BE49-F238E27FC236}">
-                  <a16:creationId xmlns:a16="http://schemas.microsoft.com/office/drawing/2014/main" id="{40528BCC-1630-29A9-07F0-C23F9AD6281C}"/>
-                </a:ext>
-              </a:extLst>
-            </p:cNvPr>
-            <p:cNvSpPr/>
-            <p:nvPr/>
-          </p:nvSpPr>
-          <p:spPr>
-            <a:xfrm>
-              <a:off x="950950" y="4949067"/>
-              <a:ext cx="1761894" cy="501805"/>
-            </a:xfrm>
-            <a:prstGeom prst="roundRect">
-              <a:avLst/>
-            </a:prstGeom>
-          </p:spPr>
-          <p:style>
-            <a:lnRef idx="2">
-              <a:schemeClr val="accent2"/>
-            </a:lnRef>
-            <a:fillRef idx="1">
-              <a:schemeClr val="lt1"/>
-            </a:fillRef>
-            <a:effectRef idx="0">
-              <a:schemeClr val="accent2"/>
-            </a:effectRef>
-            <a:fontRef idx="minor">
-              <a:schemeClr val="dk1"/>
-            </a:fontRef>
-          </p:style>
-          <p:txBody>
-            <a:bodyPr rtlCol="0" anchor="ctr"/>
-            <a:lstStyle/>
-            <a:p>
-              <a:pPr algn="ctr"/>
-              <a:r>
-                <a:rPr lang="en-IE" dirty="0">
-                  <a:solidFill>
-                    <a:schemeClr val="accent2"/>
-                  </a:solidFill>
-                </a:rPr>
-                <a:t>Storage</a:t>
-              </a:r>
-            </a:p>
-          </p:txBody>
-        </p:sp>
-        <p:sp>
-          <p:nvSpPr>
-            <p:cNvPr id="8" name="Rectangle: Rounded Corners 7">
-              <a:extLst>
-                <a:ext uri="{FF2B5EF4-FFF2-40B4-BE49-F238E27FC236}">
-                  <a16:creationId xmlns:a16="http://schemas.microsoft.com/office/drawing/2014/main" id="{0D05ECB8-196C-721C-99B5-6BC4BFE6F586}"/>
-                </a:ext>
-              </a:extLst>
-            </p:cNvPr>
-            <p:cNvSpPr/>
-            <p:nvPr/>
-          </p:nvSpPr>
-          <p:spPr>
-            <a:xfrm>
-              <a:off x="950950" y="5515538"/>
-              <a:ext cx="1761894" cy="501805"/>
-            </a:xfrm>
-            <a:prstGeom prst="roundRect">
-              <a:avLst/>
-            </a:prstGeom>
-          </p:spPr>
-          <p:style>
-            <a:lnRef idx="2">
-              <a:schemeClr val="accent2"/>
-            </a:lnRef>
-            <a:fillRef idx="1">
-              <a:schemeClr val="lt1"/>
-            </a:fillRef>
-            <a:effectRef idx="0">
-              <a:schemeClr val="accent2"/>
-            </a:effectRef>
-            <a:fontRef idx="minor">
-              <a:schemeClr val="dk1"/>
-            </a:fontRef>
-          </p:style>
-          <p:txBody>
-            <a:bodyPr rtlCol="0" anchor="ctr"/>
-            <a:lstStyle/>
-            <a:p>
-              <a:pPr algn="ctr"/>
-              <a:r>
-                <a:rPr lang="en-IE" dirty="0" err="1">
-                  <a:solidFill>
-                    <a:schemeClr val="accent2"/>
-                  </a:solidFill>
-                </a:rPr>
-                <a:t>PowerBlock</a:t>
-              </a:r>
-              <a:endParaRPr lang="en-IE" dirty="0">
-                <a:solidFill>
-                  <a:schemeClr val="accent2"/>
-                </a:solidFill>
-              </a:endParaRPr>
-            </a:p>
-          </p:txBody>
-        </p:sp>
-        <p:sp>
-          <p:nvSpPr>
-            <p:cNvPr id="9" name="Rectangle: Rounded Corners 8">
-              <a:extLst>
-                <a:ext uri="{FF2B5EF4-FFF2-40B4-BE49-F238E27FC236}">
-                  <a16:creationId xmlns:a16="http://schemas.microsoft.com/office/drawing/2014/main" id="{65B93AE6-6057-4A02-754E-7423EC2A8D08}"/>
-                </a:ext>
-              </a:extLst>
-            </p:cNvPr>
-            <p:cNvSpPr/>
-            <p:nvPr/>
-          </p:nvSpPr>
-          <p:spPr>
-            <a:xfrm>
-              <a:off x="950951" y="3831489"/>
-              <a:ext cx="1761893" cy="501805"/>
-            </a:xfrm>
-            <a:prstGeom prst="roundRect">
-              <a:avLst/>
-            </a:prstGeom>
-          </p:spPr>
-          <p:style>
-            <a:lnRef idx="2">
-              <a:schemeClr val="accent2"/>
-            </a:lnRef>
-            <a:fillRef idx="1">
-              <a:schemeClr val="lt1"/>
-            </a:fillRef>
-            <a:effectRef idx="0">
-              <a:schemeClr val="accent2"/>
-            </a:effectRef>
-            <a:fontRef idx="minor">
-              <a:schemeClr val="dk1"/>
-            </a:fontRef>
-          </p:style>
-          <p:txBody>
-            <a:bodyPr rtlCol="0" anchor="ctr"/>
-            <a:lstStyle/>
-            <a:p>
-              <a:pPr algn="ctr"/>
-              <a:r>
-                <a:rPr lang="en-IE" dirty="0" err="1">
-                  <a:solidFill>
-                    <a:schemeClr val="accent2"/>
-                  </a:solidFill>
-                </a:rPr>
-                <a:t>OpticalSystem</a:t>
-              </a:r>
-              <a:endParaRPr lang="en-IE" dirty="0">
-                <a:solidFill>
-                  <a:schemeClr val="accent2"/>
-                </a:solidFill>
-              </a:endParaRPr>
-            </a:p>
-          </p:txBody>
-        </p:sp>
-        <p:sp>
-          <p:nvSpPr>
-            <p:cNvPr id="10" name="Rectangle: Rounded Corners 9">
-              <a:extLst>
-                <a:ext uri="{FF2B5EF4-FFF2-40B4-BE49-F238E27FC236}">
-                  <a16:creationId xmlns:a16="http://schemas.microsoft.com/office/drawing/2014/main" id="{3DF61A14-E8AD-F12A-F9D0-3B35656B0E8E}"/>
-                </a:ext>
-              </a:extLst>
-            </p:cNvPr>
-            <p:cNvSpPr/>
-            <p:nvPr/>
-          </p:nvSpPr>
-          <p:spPr>
-            <a:xfrm>
-              <a:off x="950950" y="6094183"/>
-              <a:ext cx="1761894" cy="501805"/>
-            </a:xfrm>
-            <a:prstGeom prst="roundRect">
-              <a:avLst/>
-            </a:prstGeom>
-          </p:spPr>
-          <p:style>
-            <a:lnRef idx="2">
-              <a:schemeClr val="accent5"/>
-            </a:lnRef>
-            <a:fillRef idx="1">
-              <a:schemeClr val="lt1"/>
-            </a:fillRef>
-            <a:effectRef idx="0">
-              <a:schemeClr val="accent5"/>
-            </a:effectRef>
-            <a:fontRef idx="minor">
-              <a:schemeClr val="dk1"/>
-            </a:fontRef>
-          </p:style>
-          <p:txBody>
-            <a:bodyPr rtlCol="0" anchor="ctr"/>
-            <a:lstStyle/>
-            <a:p>
-              <a:pPr algn="ctr"/>
-              <a:r>
-                <a:rPr lang="en-IE" dirty="0">
-                  <a:solidFill>
-                    <a:schemeClr val="accent5"/>
-                  </a:solidFill>
-                </a:rPr>
-                <a:t>Market</a:t>
-              </a:r>
-            </a:p>
-          </p:txBody>
-        </p:sp>
-        <p:sp>
-          <p:nvSpPr>
-            <p:cNvPr id="14" name="Rectangle: Rounded Corners 13">
-              <a:extLst>
-                <a:ext uri="{FF2B5EF4-FFF2-40B4-BE49-F238E27FC236}">
-                  <a16:creationId xmlns:a16="http://schemas.microsoft.com/office/drawing/2014/main" id="{FE4A9761-134A-6C68-5439-4A991A9047B5}"/>
-                </a:ext>
-              </a:extLst>
-            </p:cNvPr>
-            <p:cNvSpPr/>
-            <p:nvPr/>
-          </p:nvSpPr>
-          <p:spPr>
-            <a:xfrm>
-              <a:off x="950949" y="2109645"/>
-              <a:ext cx="1761893" cy="501805"/>
-            </a:xfrm>
-            <a:prstGeom prst="roundRect">
-              <a:avLst/>
-            </a:prstGeom>
-          </p:spPr>
-          <p:style>
-            <a:lnRef idx="2">
-              <a:schemeClr val="accent1"/>
-            </a:lnRef>
-            <a:fillRef idx="1">
-              <a:schemeClr val="lt1"/>
-            </a:fillRef>
-            <a:effectRef idx="0">
-              <a:schemeClr val="accent1"/>
-            </a:effectRef>
-            <a:fontRef idx="minor">
-              <a:schemeClr val="dk1"/>
-            </a:fontRef>
-          </p:style>
-          <p:txBody>
-            <a:bodyPr rtlCol="0" anchor="ctr"/>
-            <a:lstStyle/>
-            <a:p>
-              <a:pPr algn="ctr"/>
-              <a:r>
-                <a:rPr lang="en-IE" dirty="0">
-                  <a:solidFill>
-                    <a:schemeClr val="accent1"/>
-                  </a:solidFill>
-                </a:rPr>
-                <a:t>Settings</a:t>
-              </a:r>
-            </a:p>
-          </p:txBody>
-        </p:sp>
-        <p:sp>
-          <p:nvSpPr>
-            <p:cNvPr id="28" name="Rectangle: Rounded Corners 27">
-              <a:extLst>
-                <a:ext uri="{FF2B5EF4-FFF2-40B4-BE49-F238E27FC236}">
-                  <a16:creationId xmlns:a16="http://schemas.microsoft.com/office/drawing/2014/main" id="{C4E967BD-1DDD-24A8-54D2-9E26F36FF367}"/>
-                </a:ext>
-              </a:extLst>
-            </p:cNvPr>
-            <p:cNvSpPr/>
-            <p:nvPr/>
-          </p:nvSpPr>
-          <p:spPr>
-            <a:xfrm>
-              <a:off x="950949" y="2676116"/>
-              <a:ext cx="1761893" cy="501805"/>
-            </a:xfrm>
-            <a:prstGeom prst="roundRect">
-              <a:avLst/>
-            </a:prstGeom>
-          </p:spPr>
-          <p:style>
-            <a:lnRef idx="2">
-              <a:schemeClr val="accent1"/>
-            </a:lnRef>
-            <a:fillRef idx="1">
-              <a:schemeClr val="lt1"/>
-            </a:fillRef>
-            <a:effectRef idx="0">
-              <a:schemeClr val="accent1"/>
-            </a:effectRef>
-            <a:fontRef idx="minor">
-              <a:schemeClr val="dk1"/>
-            </a:fontRef>
-          </p:style>
-          <p:txBody>
-            <a:bodyPr rtlCol="0" anchor="ctr"/>
-            <a:lstStyle/>
-            <a:p>
-              <a:pPr algn="ctr"/>
-              <a:r>
-                <a:rPr lang="en-IE" dirty="0">
-                  <a:solidFill>
-                    <a:schemeClr val="accent1"/>
-                  </a:solidFill>
-                </a:rPr>
-                <a:t>Location</a:t>
-              </a:r>
-            </a:p>
-          </p:txBody>
-        </p:sp>
-      </p:grpSp>
-      <p:grpSp>
-        <p:nvGrpSpPr>
-          <p:cNvPr id="46" name="Group 45">
-            <a:extLst>
-              <a:ext uri="{FF2B5EF4-FFF2-40B4-BE49-F238E27FC236}">
-                <a16:creationId xmlns:a16="http://schemas.microsoft.com/office/drawing/2014/main" id="{E6ED06A7-32A6-8373-3247-36BA39DD1228}"/>
-              </a:ext>
-            </a:extLst>
-          </p:cNvPr>
-          <p:cNvGrpSpPr/>
-          <p:nvPr/>
-        </p:nvGrpSpPr>
-        <p:grpSpPr>
-          <a:xfrm>
-            <a:off x="6301662" y="1576465"/>
-            <a:ext cx="2732049" cy="4202035"/>
-            <a:chOff x="6301662" y="1576465"/>
-            <a:chExt cx="2732049" cy="4202035"/>
-          </a:xfrm>
-        </p:grpSpPr>
-        <p:sp>
-          <p:nvSpPr>
-            <p:cNvPr id="21" name="Rectangle: Rounded Corners 20">
-              <a:extLst>
-                <a:ext uri="{FF2B5EF4-FFF2-40B4-BE49-F238E27FC236}">
-                  <a16:creationId xmlns:a16="http://schemas.microsoft.com/office/drawing/2014/main" id="{53B0F28A-B4C7-EA7C-0057-AA6FF43E78AF}"/>
-                </a:ext>
-              </a:extLst>
-            </p:cNvPr>
-            <p:cNvSpPr/>
-            <p:nvPr/>
-          </p:nvSpPr>
-          <p:spPr>
-            <a:xfrm>
-              <a:off x="6301662" y="1576465"/>
-              <a:ext cx="2732049" cy="4202035"/>
-            </a:xfrm>
-            <a:prstGeom prst="roundRect">
-              <a:avLst/>
-            </a:prstGeom>
-          </p:spPr>
-          <p:style>
-            <a:lnRef idx="2">
-              <a:schemeClr val="accent1"/>
-            </a:lnRef>
-            <a:fillRef idx="1">
-              <a:schemeClr val="lt1"/>
-            </a:fillRef>
-            <a:effectRef idx="0">
-              <a:schemeClr val="accent1"/>
-            </a:effectRef>
-            <a:fontRef idx="minor">
-              <a:schemeClr val="dk1"/>
-            </a:fontRef>
-          </p:style>
-          <p:txBody>
-            <a:bodyPr rtlCol="0" anchor="t"/>
-            <a:lstStyle/>
-            <a:p>
-              <a:pPr algn="ctr"/>
-              <a:r>
-                <a:rPr lang="en-IE" dirty="0"/>
-                <a:t>MED-Solar</a:t>
-              </a:r>
-            </a:p>
-          </p:txBody>
-        </p:sp>
-        <p:sp>
-          <p:nvSpPr>
-            <p:cNvPr id="30" name="Rectangle: Rounded Corners 29">
-              <a:extLst>
-                <a:ext uri="{FF2B5EF4-FFF2-40B4-BE49-F238E27FC236}">
-                  <a16:creationId xmlns:a16="http://schemas.microsoft.com/office/drawing/2014/main" id="{EC4F3EA9-8516-5629-5E5E-EE4ED9D0183C}"/>
-                </a:ext>
-              </a:extLst>
-            </p:cNvPr>
-            <p:cNvSpPr/>
-            <p:nvPr/>
-          </p:nvSpPr>
-          <p:spPr>
-            <a:xfrm>
-              <a:off x="6789849" y="2126670"/>
-              <a:ext cx="1761893" cy="501805"/>
-            </a:xfrm>
-            <a:prstGeom prst="roundRect">
-              <a:avLst/>
-            </a:prstGeom>
-          </p:spPr>
-          <p:style>
-            <a:lnRef idx="2">
-              <a:schemeClr val="accent1"/>
-            </a:lnRef>
-            <a:fillRef idx="1">
-              <a:schemeClr val="lt1"/>
-            </a:fillRef>
-            <a:effectRef idx="0">
-              <a:schemeClr val="accent1"/>
-            </a:effectRef>
-            <a:fontRef idx="minor">
-              <a:schemeClr val="dk1"/>
-            </a:fontRef>
-          </p:style>
-          <p:txBody>
-            <a:bodyPr rtlCol="0" anchor="ctr"/>
-            <a:lstStyle/>
-            <a:p>
-              <a:pPr algn="ctr"/>
-              <a:r>
-                <a:rPr lang="en-IE" dirty="0">
-                  <a:solidFill>
-                    <a:schemeClr val="accent1"/>
-                  </a:solidFill>
-                </a:rPr>
-                <a:t>Settings</a:t>
-              </a:r>
-            </a:p>
-          </p:txBody>
-        </p:sp>
-        <p:sp>
-          <p:nvSpPr>
-            <p:cNvPr id="31" name="Rectangle: Rounded Corners 30">
-              <a:extLst>
-                <a:ext uri="{FF2B5EF4-FFF2-40B4-BE49-F238E27FC236}">
-                  <a16:creationId xmlns:a16="http://schemas.microsoft.com/office/drawing/2014/main" id="{D19A5861-F1FC-C19F-A36F-57668C224537}"/>
-                </a:ext>
-              </a:extLst>
-            </p:cNvPr>
-            <p:cNvSpPr/>
-            <p:nvPr/>
-          </p:nvSpPr>
-          <p:spPr>
-            <a:xfrm>
-              <a:off x="6789844" y="2714909"/>
-              <a:ext cx="1761893" cy="501805"/>
-            </a:xfrm>
-            <a:prstGeom prst="roundRect">
-              <a:avLst/>
-            </a:prstGeom>
-          </p:spPr>
-          <p:style>
-            <a:lnRef idx="2">
-              <a:schemeClr val="accent1"/>
-            </a:lnRef>
-            <a:fillRef idx="1">
-              <a:schemeClr val="lt1"/>
-            </a:fillRef>
-            <a:effectRef idx="0">
-              <a:schemeClr val="accent1"/>
-            </a:effectRef>
-            <a:fontRef idx="minor">
-              <a:schemeClr val="dk1"/>
-            </a:fontRef>
-          </p:style>
-          <p:txBody>
-            <a:bodyPr rtlCol="0" anchor="ctr"/>
-            <a:lstStyle/>
-            <a:p>
-              <a:pPr algn="ctr"/>
-              <a:r>
-                <a:rPr lang="en-IE" dirty="0">
-                  <a:solidFill>
-                    <a:schemeClr val="accent1"/>
-                  </a:solidFill>
-                </a:rPr>
-                <a:t>Location</a:t>
-              </a:r>
-            </a:p>
-          </p:txBody>
-        </p:sp>
-        <p:sp>
-          <p:nvSpPr>
-            <p:cNvPr id="32" name="Rectangle: Rounded Corners 31">
-              <a:extLst>
-                <a:ext uri="{FF2B5EF4-FFF2-40B4-BE49-F238E27FC236}">
-                  <a16:creationId xmlns:a16="http://schemas.microsoft.com/office/drawing/2014/main" id="{006246F9-993D-0B9A-3C6E-E0CFF21C520F}"/>
-                </a:ext>
-              </a:extLst>
-            </p:cNvPr>
-            <p:cNvSpPr/>
-            <p:nvPr/>
-          </p:nvSpPr>
-          <p:spPr>
-            <a:xfrm>
-              <a:off x="6786739" y="3868743"/>
-              <a:ext cx="1761893" cy="501805"/>
-            </a:xfrm>
-            <a:prstGeom prst="roundRect">
-              <a:avLst/>
-            </a:prstGeom>
-          </p:spPr>
-          <p:style>
-            <a:lnRef idx="2">
-              <a:schemeClr val="accent2"/>
-            </a:lnRef>
-            <a:fillRef idx="1">
-              <a:schemeClr val="lt1"/>
-            </a:fillRef>
-            <a:effectRef idx="0">
-              <a:schemeClr val="accent2"/>
-            </a:effectRef>
-            <a:fontRef idx="minor">
-              <a:schemeClr val="dk1"/>
-            </a:fontRef>
-          </p:style>
-          <p:txBody>
-            <a:bodyPr rtlCol="0" anchor="ctr"/>
-            <a:lstStyle/>
-            <a:p>
-              <a:pPr algn="ctr"/>
-              <a:r>
-                <a:rPr lang="en-IE" dirty="0">
-                  <a:solidFill>
-                    <a:schemeClr val="accent2"/>
-                  </a:solidFill>
-                </a:rPr>
-                <a:t>PTC</a:t>
-              </a:r>
-            </a:p>
-          </p:txBody>
-        </p:sp>
-        <p:sp>
-          <p:nvSpPr>
-            <p:cNvPr id="33" name="Rectangle: Rounded Corners 32">
-              <a:extLst>
-                <a:ext uri="{FF2B5EF4-FFF2-40B4-BE49-F238E27FC236}">
-                  <a16:creationId xmlns:a16="http://schemas.microsoft.com/office/drawing/2014/main" id="{9BFB76D7-B9BD-176A-487F-FD77F7C77165}"/>
-                </a:ext>
-              </a:extLst>
-            </p:cNvPr>
-            <p:cNvSpPr/>
-            <p:nvPr/>
-          </p:nvSpPr>
-          <p:spPr>
-            <a:xfrm>
-              <a:off x="6786739" y="4481727"/>
-              <a:ext cx="1761893" cy="501805"/>
-            </a:xfrm>
-            <a:prstGeom prst="roundRect">
-              <a:avLst/>
-            </a:prstGeom>
-          </p:spPr>
-          <p:style>
-            <a:lnRef idx="2">
-              <a:schemeClr val="accent2"/>
-            </a:lnRef>
-            <a:fillRef idx="1">
-              <a:schemeClr val="lt1"/>
-            </a:fillRef>
-            <a:effectRef idx="0">
-              <a:schemeClr val="accent2"/>
-            </a:effectRef>
-            <a:fontRef idx="minor">
-              <a:schemeClr val="dk1"/>
-            </a:fontRef>
-          </p:style>
-          <p:txBody>
-            <a:bodyPr rtlCol="0" anchor="ctr"/>
-            <a:lstStyle/>
-            <a:p>
-              <a:pPr algn="ctr"/>
-              <a:r>
-                <a:rPr lang="en-IE" dirty="0">
-                  <a:solidFill>
-                    <a:schemeClr val="accent2"/>
-                  </a:solidFill>
-                </a:rPr>
-                <a:t>MED</a:t>
-              </a:r>
-            </a:p>
-          </p:txBody>
-        </p:sp>
-        <p:sp>
-          <p:nvSpPr>
-            <p:cNvPr id="34" name="Rectangle: Rounded Corners 33">
-              <a:extLst>
-                <a:ext uri="{FF2B5EF4-FFF2-40B4-BE49-F238E27FC236}">
-                  <a16:creationId xmlns:a16="http://schemas.microsoft.com/office/drawing/2014/main" id="{2C3B487D-7B4E-4BC5-7F4D-F242125B5150}"/>
-                </a:ext>
-              </a:extLst>
-            </p:cNvPr>
-            <p:cNvSpPr/>
-            <p:nvPr/>
-          </p:nvSpPr>
-          <p:spPr>
-            <a:xfrm>
-              <a:off x="6786738" y="5074241"/>
-              <a:ext cx="1761894" cy="501805"/>
-            </a:xfrm>
-            <a:prstGeom prst="roundRect">
-              <a:avLst/>
-            </a:prstGeom>
-          </p:spPr>
-          <p:style>
-            <a:lnRef idx="2">
-              <a:schemeClr val="accent5"/>
-            </a:lnRef>
-            <a:fillRef idx="1">
-              <a:schemeClr val="lt1"/>
-            </a:fillRef>
-            <a:effectRef idx="0">
-              <a:schemeClr val="accent5"/>
-            </a:effectRef>
-            <a:fontRef idx="minor">
-              <a:schemeClr val="dk1"/>
-            </a:fontRef>
-          </p:style>
-          <p:txBody>
-            <a:bodyPr rtlCol="0" anchor="ctr"/>
-            <a:lstStyle/>
-            <a:p>
-              <a:pPr algn="ctr"/>
-              <a:r>
-                <a:rPr lang="en-IE" dirty="0">
-                  <a:solidFill>
-                    <a:schemeClr val="accent5"/>
-                  </a:solidFill>
-                </a:rPr>
-                <a:t>Market</a:t>
-              </a:r>
-            </a:p>
-          </p:txBody>
-        </p:sp>
-        <p:sp>
-          <p:nvSpPr>
-            <p:cNvPr id="35" name="Rectangle: Rounded Corners 34">
-              <a:extLst>
-                <a:ext uri="{FF2B5EF4-FFF2-40B4-BE49-F238E27FC236}">
-                  <a16:creationId xmlns:a16="http://schemas.microsoft.com/office/drawing/2014/main" id="{BC462F86-B144-2AB9-2267-7FFE18EC71C0}"/>
-                </a:ext>
-              </a:extLst>
-            </p:cNvPr>
-            <p:cNvSpPr/>
-            <p:nvPr/>
-          </p:nvSpPr>
-          <p:spPr>
-            <a:xfrm>
-              <a:off x="6789843" y="3280504"/>
-              <a:ext cx="1761893" cy="501805"/>
-            </a:xfrm>
-            <a:prstGeom prst="roundRect">
-              <a:avLst/>
-            </a:prstGeom>
-          </p:spPr>
-          <p:style>
-            <a:lnRef idx="2">
-              <a:schemeClr val="accent5"/>
-            </a:lnRef>
-            <a:fillRef idx="1">
-              <a:schemeClr val="lt1"/>
-            </a:fillRef>
-            <a:effectRef idx="0">
-              <a:schemeClr val="accent5"/>
-            </a:effectRef>
-            <a:fontRef idx="minor">
-              <a:schemeClr val="dk1"/>
-            </a:fontRef>
-          </p:style>
-          <p:txBody>
-            <a:bodyPr rtlCol="0" anchor="ctr"/>
-            <a:lstStyle/>
-            <a:p>
-              <a:pPr algn="ctr"/>
-              <a:r>
-                <a:rPr lang="en-IE" dirty="0">
-                  <a:solidFill>
-                    <a:schemeClr val="accent5"/>
-                  </a:solidFill>
-                </a:rPr>
-                <a:t>Weather</a:t>
-              </a:r>
-            </a:p>
-          </p:txBody>
-        </p:sp>
-      </p:grpSp>
-      <p:grpSp>
-        <p:nvGrpSpPr>
-          <p:cNvPr id="47" name="Group 46">
-            <a:extLst>
-              <a:ext uri="{FF2B5EF4-FFF2-40B4-BE49-F238E27FC236}">
-                <a16:creationId xmlns:a16="http://schemas.microsoft.com/office/drawing/2014/main" id="{1937D759-E297-45D5-A433-8D5CB3DFBB5C}"/>
-              </a:ext>
-            </a:extLst>
-          </p:cNvPr>
-          <p:cNvGrpSpPr/>
-          <p:nvPr/>
-        </p:nvGrpSpPr>
-        <p:grpSpPr>
-          <a:xfrm>
-            <a:off x="9336962" y="1576465"/>
-            <a:ext cx="2732049" cy="4202035"/>
-            <a:chOff x="9336962" y="1576465"/>
-            <a:chExt cx="2732049" cy="4202035"/>
-          </a:xfrm>
-        </p:grpSpPr>
-        <p:sp>
-          <p:nvSpPr>
-            <p:cNvPr id="36" name="Rectangle: Rounded Corners 35">
-              <a:extLst>
-                <a:ext uri="{FF2B5EF4-FFF2-40B4-BE49-F238E27FC236}">
-                  <a16:creationId xmlns:a16="http://schemas.microsoft.com/office/drawing/2014/main" id="{3FFFFB88-F2EB-57A1-E43C-77240FF7E545}"/>
-                </a:ext>
-              </a:extLst>
-            </p:cNvPr>
-            <p:cNvSpPr/>
-            <p:nvPr/>
-          </p:nvSpPr>
-          <p:spPr>
-            <a:xfrm>
-              <a:off x="9336962" y="1576465"/>
-              <a:ext cx="2732049" cy="4202035"/>
-            </a:xfrm>
-            <a:prstGeom prst="roundRect">
-              <a:avLst/>
-            </a:prstGeom>
-          </p:spPr>
-          <p:style>
-            <a:lnRef idx="2">
-              <a:schemeClr val="accent1"/>
-            </a:lnRef>
-            <a:fillRef idx="1">
-              <a:schemeClr val="lt1"/>
-            </a:fillRef>
-            <a:effectRef idx="0">
-              <a:schemeClr val="accent1"/>
-            </a:effectRef>
-            <a:fontRef idx="minor">
-              <a:schemeClr val="dk1"/>
-            </a:fontRef>
-          </p:style>
-          <p:txBody>
-            <a:bodyPr rtlCol="0" anchor="t"/>
-            <a:lstStyle/>
-            <a:p>
-              <a:pPr algn="ctr"/>
-              <a:r>
-                <a:rPr lang="en-IE" dirty="0"/>
-                <a:t>CAES</a:t>
-              </a:r>
-            </a:p>
-          </p:txBody>
-        </p:sp>
-        <p:sp>
-          <p:nvSpPr>
-            <p:cNvPr id="37" name="Rectangle: Rounded Corners 36">
-              <a:extLst>
-                <a:ext uri="{FF2B5EF4-FFF2-40B4-BE49-F238E27FC236}">
-                  <a16:creationId xmlns:a16="http://schemas.microsoft.com/office/drawing/2014/main" id="{B075F9B0-89F4-4B63-5E23-B7F04CF45FD0}"/>
-                </a:ext>
-              </a:extLst>
-            </p:cNvPr>
-            <p:cNvSpPr/>
-            <p:nvPr/>
-          </p:nvSpPr>
-          <p:spPr>
-            <a:xfrm>
-              <a:off x="9825149" y="2126670"/>
-              <a:ext cx="1761893" cy="501805"/>
-            </a:xfrm>
-            <a:prstGeom prst="roundRect">
-              <a:avLst/>
-            </a:prstGeom>
-          </p:spPr>
-          <p:style>
-            <a:lnRef idx="2">
-              <a:schemeClr val="accent1"/>
-            </a:lnRef>
-            <a:fillRef idx="1">
-              <a:schemeClr val="lt1"/>
-            </a:fillRef>
-            <a:effectRef idx="0">
-              <a:schemeClr val="accent1"/>
-            </a:effectRef>
-            <a:fontRef idx="minor">
-              <a:schemeClr val="dk1"/>
-            </a:fontRef>
-          </p:style>
-          <p:txBody>
-            <a:bodyPr rtlCol="0" anchor="ctr"/>
-            <a:lstStyle/>
-            <a:p>
-              <a:pPr algn="ctr"/>
-              <a:r>
-                <a:rPr lang="en-IE" dirty="0">
-                  <a:solidFill>
-                    <a:schemeClr val="accent1"/>
-                  </a:solidFill>
-                </a:rPr>
-                <a:t>Settings</a:t>
-              </a:r>
-            </a:p>
-          </p:txBody>
-        </p:sp>
-        <p:sp>
-          <p:nvSpPr>
-            <p:cNvPr id="38" name="Rectangle: Rounded Corners 37">
-              <a:extLst>
-                <a:ext uri="{FF2B5EF4-FFF2-40B4-BE49-F238E27FC236}">
-                  <a16:creationId xmlns:a16="http://schemas.microsoft.com/office/drawing/2014/main" id="{71476E60-46A5-8351-70E9-0F31E36DB2E6}"/>
-                </a:ext>
-              </a:extLst>
-            </p:cNvPr>
-            <p:cNvSpPr/>
-            <p:nvPr/>
-          </p:nvSpPr>
-          <p:spPr>
-            <a:xfrm>
-              <a:off x="9825144" y="2714909"/>
-              <a:ext cx="1761893" cy="501805"/>
-            </a:xfrm>
-            <a:prstGeom prst="roundRect">
-              <a:avLst/>
-            </a:prstGeom>
-          </p:spPr>
-          <p:style>
-            <a:lnRef idx="2">
-              <a:schemeClr val="accent1"/>
-            </a:lnRef>
-            <a:fillRef idx="1">
-              <a:schemeClr val="lt1"/>
-            </a:fillRef>
-            <a:effectRef idx="0">
-              <a:schemeClr val="accent1"/>
-            </a:effectRef>
-            <a:fontRef idx="minor">
-              <a:schemeClr val="dk1"/>
-            </a:fontRef>
-          </p:style>
-          <p:txBody>
-            <a:bodyPr rtlCol="0" anchor="ctr"/>
-            <a:lstStyle/>
-            <a:p>
-              <a:pPr algn="ctr"/>
-              <a:r>
-                <a:rPr lang="en-IE" dirty="0">
-                  <a:solidFill>
-                    <a:schemeClr val="accent1"/>
-                  </a:solidFill>
-                </a:rPr>
-                <a:t>Location</a:t>
-              </a:r>
-            </a:p>
-          </p:txBody>
-        </p:sp>
-        <p:sp>
-          <p:nvSpPr>
-            <p:cNvPr id="39" name="Rectangle: Rounded Corners 38">
-              <a:extLst>
-                <a:ext uri="{FF2B5EF4-FFF2-40B4-BE49-F238E27FC236}">
-                  <a16:creationId xmlns:a16="http://schemas.microsoft.com/office/drawing/2014/main" id="{5D6D9959-0FCF-D180-BE28-37D2B56F61C5}"/>
-                </a:ext>
-              </a:extLst>
-            </p:cNvPr>
-            <p:cNvSpPr/>
-            <p:nvPr/>
-          </p:nvSpPr>
-          <p:spPr>
-            <a:xfrm>
-              <a:off x="9822039" y="3868743"/>
-              <a:ext cx="1761893" cy="501805"/>
-            </a:xfrm>
-            <a:prstGeom prst="roundRect">
-              <a:avLst/>
-            </a:prstGeom>
-          </p:spPr>
-          <p:style>
-            <a:lnRef idx="2">
-              <a:schemeClr val="accent2"/>
-            </a:lnRef>
-            <a:fillRef idx="1">
-              <a:schemeClr val="lt1"/>
-            </a:fillRef>
-            <a:effectRef idx="0">
-              <a:schemeClr val="accent2"/>
-            </a:effectRef>
-            <a:fontRef idx="minor">
-              <a:schemeClr val="dk1"/>
-            </a:fontRef>
-          </p:style>
-          <p:txBody>
-            <a:bodyPr rtlCol="0" anchor="ctr"/>
-            <a:lstStyle/>
-            <a:p>
-              <a:pPr algn="ctr"/>
-              <a:r>
-                <a:rPr lang="en-IE" dirty="0">
-                  <a:solidFill>
-                    <a:schemeClr val="accent2"/>
-                  </a:solidFill>
-                </a:rPr>
-                <a:t>CAES</a:t>
-              </a:r>
-            </a:p>
-          </p:txBody>
-        </p:sp>
-        <p:sp>
-          <p:nvSpPr>
-            <p:cNvPr id="41" name="Rectangle: Rounded Corners 40">
-              <a:extLst>
-                <a:ext uri="{FF2B5EF4-FFF2-40B4-BE49-F238E27FC236}">
-                  <a16:creationId xmlns:a16="http://schemas.microsoft.com/office/drawing/2014/main" id="{8F74EA40-F44E-2E38-9FBB-4D1D6F8BAE50}"/>
-                </a:ext>
-              </a:extLst>
-            </p:cNvPr>
-            <p:cNvSpPr/>
-            <p:nvPr/>
-          </p:nvSpPr>
-          <p:spPr>
-            <a:xfrm>
-              <a:off x="9822039" y="4466477"/>
-              <a:ext cx="1761894" cy="501805"/>
-            </a:xfrm>
-            <a:prstGeom prst="roundRect">
-              <a:avLst/>
-            </a:prstGeom>
-          </p:spPr>
-          <p:style>
-            <a:lnRef idx="2">
-              <a:schemeClr val="accent5"/>
-            </a:lnRef>
-            <a:fillRef idx="1">
-              <a:schemeClr val="lt1"/>
-            </a:fillRef>
-            <a:effectRef idx="0">
-              <a:schemeClr val="accent5"/>
-            </a:effectRef>
-            <a:fontRef idx="minor">
-              <a:schemeClr val="dk1"/>
-            </a:fontRef>
-          </p:style>
-          <p:txBody>
-            <a:bodyPr rtlCol="0" anchor="ctr"/>
-            <a:lstStyle/>
-            <a:p>
-              <a:pPr algn="ctr"/>
-              <a:r>
-                <a:rPr lang="en-IE" dirty="0">
-                  <a:solidFill>
-                    <a:schemeClr val="accent5"/>
-                  </a:solidFill>
-                </a:rPr>
-                <a:t>Market</a:t>
-              </a:r>
-            </a:p>
-          </p:txBody>
-        </p:sp>
-        <p:sp>
-          <p:nvSpPr>
-            <p:cNvPr id="42" name="Rectangle: Rounded Corners 41">
-              <a:extLst>
-                <a:ext uri="{FF2B5EF4-FFF2-40B4-BE49-F238E27FC236}">
-                  <a16:creationId xmlns:a16="http://schemas.microsoft.com/office/drawing/2014/main" id="{C540D844-2E26-5EBA-07CF-B0D198E37699}"/>
-                </a:ext>
-              </a:extLst>
-            </p:cNvPr>
-            <p:cNvSpPr/>
-            <p:nvPr/>
-          </p:nvSpPr>
-          <p:spPr>
-            <a:xfrm>
-              <a:off x="9825143" y="3280504"/>
-              <a:ext cx="1761893" cy="501805"/>
-            </a:xfrm>
-            <a:prstGeom prst="roundRect">
-              <a:avLst/>
-            </a:prstGeom>
-          </p:spPr>
-          <p:style>
-            <a:lnRef idx="2">
-              <a:schemeClr val="accent5"/>
-            </a:lnRef>
-            <a:fillRef idx="1">
-              <a:schemeClr val="lt1"/>
-            </a:fillRef>
-            <a:effectRef idx="0">
-              <a:schemeClr val="accent5"/>
-            </a:effectRef>
-            <a:fontRef idx="minor">
-              <a:schemeClr val="dk1"/>
-            </a:fontRef>
-          </p:style>
-          <p:txBody>
-            <a:bodyPr rtlCol="0" anchor="ctr"/>
-            <a:lstStyle/>
-            <a:p>
-              <a:pPr algn="ctr"/>
-              <a:r>
-                <a:rPr lang="en-IE" dirty="0">
-                  <a:solidFill>
-                    <a:schemeClr val="accent5"/>
-                  </a:solidFill>
-                </a:rPr>
-                <a:t>Weather</a:t>
-              </a:r>
-            </a:p>
-          </p:txBody>
-        </p:sp>
-      </p:grpSp>
-    </p:spTree>
-    <p:extLst>
-      <p:ext uri="{BB962C8B-B14F-4D97-AF65-F5344CB8AC3E}">
-        <p14:creationId xmlns:p14="http://schemas.microsoft.com/office/powerpoint/2010/main" val="2168866448"/>
-      </p:ext>
-    </p:extLst>
-  </p:cSld>
-  <p:clrMapOvr>
-    <a:masterClrMapping/>
-  </p:clrMapOvr>
-</p:sld>
-</file>
-
-<file path=ppt/slides/slide5.xml><?xml version="1.0" encoding="utf-8"?>
-<p:sld xmlns:a="http://schemas.openxmlformats.org/drawingml/2006/main" xmlns:r="http://schemas.openxmlformats.org/officeDocument/2006/relationships" xmlns:p="http://schemas.openxmlformats.org/presentationml/2006/main">
-  <p:cSld>
-    <p:spTree>
-      <p:nvGrpSpPr>
-        <p:cNvPr id="1" name="">
-          <a:extLst>
-            <a:ext uri="{FF2B5EF4-FFF2-40B4-BE49-F238E27FC236}">
-              <a16:creationId xmlns:a16="http://schemas.microsoft.com/office/drawing/2014/main" id="{7D3F4F01-37B0-3372-A4BE-D70EEA6CC651}"/>
-            </a:ext>
-          </a:extLst>
-        </p:cNvPr>
-        <p:cNvGrpSpPr/>
-        <p:nvPr/>
-      </p:nvGrpSpPr>
-      <p:grpSpPr>
-        <a:xfrm>
-          <a:off x="0" y="0"/>
-          <a:ext cx="0" cy="0"/>
-          <a:chOff x="0" y="0"/>
-          <a:chExt cx="0" cy="0"/>
-        </a:xfrm>
-      </p:grpSpPr>
-      <p:sp>
-        <p:nvSpPr>
-          <p:cNvPr id="22" name="Rectangle: Rounded Corners 21">
-            <a:extLst>
-              <a:ext uri="{FF2B5EF4-FFF2-40B4-BE49-F238E27FC236}">
-                <a16:creationId xmlns:a16="http://schemas.microsoft.com/office/drawing/2014/main" id="{B8F654D3-516D-24FB-3674-2826E893C927}"/>
+      <p:sp>
+        <p:nvSpPr>
+          <p:cNvPr id="23" name="Rectangle: Rounded Corners 22">
+            <a:extLst>
+              <a:ext uri="{FF2B5EF4-FFF2-40B4-BE49-F238E27FC236}">
+                <a16:creationId xmlns:a16="http://schemas.microsoft.com/office/drawing/2014/main" id="{F7354F53-62DD-C51D-004C-1AEE1BC87CD3}"/>
               </a:ext>
             </a:extLst>
           </p:cNvPr>
@@ -5758,14 +6184,603 @@
         </p:nvSpPr>
         <p:spPr>
           <a:xfrm>
-            <a:off x="3466509" y="1613777"/>
-            <a:ext cx="7964449" cy="5053088"/>
+            <a:off x="9269670" y="4355444"/>
+            <a:ext cx="1452084" cy="365840"/>
           </a:xfrm>
           <a:prstGeom prst="roundRect">
-            <a:avLst>
-              <a:gd name="adj" fmla="val 7368"/>
-            </a:avLst>
+            <a:avLst/>
           </a:prstGeom>
+          <a:noFill/>
+          <a:ln>
+            <a:solidFill>
+              <a:schemeClr val="accent2"/>
+            </a:solidFill>
+            <a:prstDash val="sysDot"/>
+          </a:ln>
+        </p:spPr>
+        <p:style>
+          <a:lnRef idx="2">
+            <a:schemeClr val="accent2"/>
+          </a:lnRef>
+          <a:fillRef idx="1">
+            <a:schemeClr val="lt1"/>
+          </a:fillRef>
+          <a:effectRef idx="0">
+            <a:schemeClr val="accent2"/>
+          </a:effectRef>
+          <a:fontRef idx="minor">
+            <a:schemeClr val="dk1"/>
+          </a:fontRef>
+        </p:style>
+        <p:txBody>
+          <a:bodyPr rtlCol="0" anchor="ctr"/>
+          <a:lstStyle/>
+          <a:p>
+            <a:pPr algn="ctr"/>
+            <a:r>
+              <a:rPr lang="en-US" noProof="1">
+                <a:solidFill>
+                  <a:schemeClr val="accent2"/>
+                </a:solidFill>
+              </a:rPr>
+              <a:t>cycles</a:t>
+            </a:r>
+          </a:p>
+        </p:txBody>
+      </p:sp>
+      <p:sp>
+        <p:nvSpPr>
+          <p:cNvPr id="3" name="Rectangle: Rounded Corners 2">
+            <a:extLst>
+              <a:ext uri="{FF2B5EF4-FFF2-40B4-BE49-F238E27FC236}">
+                <a16:creationId xmlns:a16="http://schemas.microsoft.com/office/drawing/2014/main" id="{C80B8BD0-C504-112E-29E6-362D47AA58C1}"/>
+              </a:ext>
+            </a:extLst>
+          </p:cNvPr>
+          <p:cNvSpPr/>
+          <p:nvPr/>
+        </p:nvSpPr>
+        <p:spPr>
+          <a:xfrm>
+            <a:off x="9264027" y="4827442"/>
+            <a:ext cx="1452084" cy="365840"/>
+          </a:xfrm>
+          <a:prstGeom prst="roundRect">
+            <a:avLst/>
+          </a:prstGeom>
+          <a:noFill/>
+          <a:ln>
+            <a:solidFill>
+              <a:schemeClr val="accent2"/>
+            </a:solidFill>
+            <a:prstDash val="sysDot"/>
+          </a:ln>
+        </p:spPr>
+        <p:style>
+          <a:lnRef idx="2">
+            <a:schemeClr val="accent2"/>
+          </a:lnRef>
+          <a:fillRef idx="1">
+            <a:schemeClr val="lt1"/>
+          </a:fillRef>
+          <a:effectRef idx="0">
+            <a:schemeClr val="accent2"/>
+          </a:effectRef>
+          <a:fontRef idx="minor">
+            <a:schemeClr val="dk1"/>
+          </a:fontRef>
+        </p:style>
+        <p:txBody>
+          <a:bodyPr rtlCol="0" anchor="ctr"/>
+          <a:lstStyle/>
+          <a:p>
+            <a:pPr algn="ctr"/>
+            <a:r>
+              <a:rPr lang="en-US" noProof="1">
+                <a:solidFill>
+                  <a:schemeClr val="accent2"/>
+                </a:solidFill>
+              </a:rPr>
+              <a:t>chem</a:t>
+            </a:r>
+          </a:p>
+        </p:txBody>
+      </p:sp>
+      <p:sp>
+        <p:nvSpPr>
+          <p:cNvPr id="21" name="Rectangle: Rounded Corners 20">
+            <a:extLst>
+              <a:ext uri="{FF2B5EF4-FFF2-40B4-BE49-F238E27FC236}">
+                <a16:creationId xmlns:a16="http://schemas.microsoft.com/office/drawing/2014/main" id="{698F1227-885D-13AA-1FF6-A5A1FA3A8B61}"/>
+              </a:ext>
+            </a:extLst>
+          </p:cNvPr>
+          <p:cNvSpPr/>
+          <p:nvPr/>
+        </p:nvSpPr>
+        <p:spPr>
+          <a:xfrm>
+            <a:off x="9264027" y="5294013"/>
+            <a:ext cx="1452084" cy="365840"/>
+          </a:xfrm>
+          <a:prstGeom prst="roundRect">
+            <a:avLst/>
+          </a:prstGeom>
+          <a:noFill/>
+          <a:ln>
+            <a:solidFill>
+              <a:schemeClr val="accent2"/>
+            </a:solidFill>
+            <a:prstDash val="sysDot"/>
+          </a:ln>
+        </p:spPr>
+        <p:style>
+          <a:lnRef idx="2">
+            <a:schemeClr val="accent2"/>
+          </a:lnRef>
+          <a:fillRef idx="1">
+            <a:schemeClr val="lt1"/>
+          </a:fillRef>
+          <a:effectRef idx="0">
+            <a:schemeClr val="accent2"/>
+          </a:effectRef>
+          <a:fontRef idx="minor">
+            <a:schemeClr val="dk1"/>
+          </a:fontRef>
+        </p:style>
+        <p:txBody>
+          <a:bodyPr rtlCol="0" anchor="ctr"/>
+          <a:lstStyle/>
+          <a:p>
+            <a:pPr algn="ctr"/>
+            <a:r>
+              <a:rPr lang="en-US" noProof="1">
+                <a:solidFill>
+                  <a:schemeClr val="accent2"/>
+                </a:solidFill>
+              </a:rPr>
+              <a:t>cold</a:t>
+            </a:r>
+          </a:p>
+        </p:txBody>
+      </p:sp>
+      <p:sp>
+        <p:nvSpPr>
+          <p:cNvPr id="26" name="Rectangle: Rounded Corners 25">
+            <a:extLst>
+              <a:ext uri="{FF2B5EF4-FFF2-40B4-BE49-F238E27FC236}">
+                <a16:creationId xmlns:a16="http://schemas.microsoft.com/office/drawing/2014/main" id="{86E8A25C-B823-0418-6721-2A4A98CF3504}"/>
+              </a:ext>
+            </a:extLst>
+          </p:cNvPr>
+          <p:cNvSpPr/>
+          <p:nvPr/>
+        </p:nvSpPr>
+        <p:spPr>
+          <a:xfrm>
+            <a:off x="9280812" y="5769380"/>
+            <a:ext cx="1452084" cy="365840"/>
+          </a:xfrm>
+          <a:prstGeom prst="roundRect">
+            <a:avLst/>
+          </a:prstGeom>
+          <a:noFill/>
+          <a:ln>
+            <a:solidFill>
+              <a:schemeClr val="accent2"/>
+            </a:solidFill>
+            <a:prstDash val="sysDot"/>
+          </a:ln>
+        </p:spPr>
+        <p:style>
+          <a:lnRef idx="2">
+            <a:schemeClr val="accent2"/>
+          </a:lnRef>
+          <a:fillRef idx="1">
+            <a:schemeClr val="lt1"/>
+          </a:fillRef>
+          <a:effectRef idx="0">
+            <a:schemeClr val="accent2"/>
+          </a:effectRef>
+          <a:fontRef idx="minor">
+            <a:schemeClr val="dk1"/>
+          </a:fontRef>
+        </p:style>
+        <p:txBody>
+          <a:bodyPr rtlCol="0" anchor="ctr"/>
+          <a:lstStyle/>
+          <a:p>
+            <a:pPr algn="ctr"/>
+            <a:r>
+              <a:rPr lang="en-US" noProof="1">
+                <a:solidFill>
+                  <a:schemeClr val="accent2"/>
+                </a:solidFill>
+              </a:rPr>
+              <a:t>+</a:t>
+            </a:r>
+          </a:p>
+        </p:txBody>
+      </p:sp>
+      <p:sp>
+        <p:nvSpPr>
+          <p:cNvPr id="27" name="Rectangle: Rounded Corners 26">
+            <a:extLst>
+              <a:ext uri="{FF2B5EF4-FFF2-40B4-BE49-F238E27FC236}">
+                <a16:creationId xmlns:a16="http://schemas.microsoft.com/office/drawing/2014/main" id="{D72C649E-AA45-6272-8598-5F08DF9DA447}"/>
+              </a:ext>
+            </a:extLst>
+          </p:cNvPr>
+          <p:cNvSpPr/>
+          <p:nvPr/>
+        </p:nvSpPr>
+        <p:spPr>
+          <a:xfrm>
+            <a:off x="6799818" y="5120321"/>
+            <a:ext cx="772011" cy="224636"/>
+          </a:xfrm>
+          <a:prstGeom prst="roundRect">
+            <a:avLst/>
+          </a:prstGeom>
+          <a:noFill/>
+          <a:ln>
+            <a:prstDash val="dash"/>
+          </a:ln>
+        </p:spPr>
+        <p:style>
+          <a:lnRef idx="2">
+            <a:schemeClr val="accent5"/>
+          </a:lnRef>
+          <a:fillRef idx="1">
+            <a:schemeClr val="lt1"/>
+          </a:fillRef>
+          <a:effectRef idx="0">
+            <a:schemeClr val="accent5"/>
+          </a:effectRef>
+          <a:fontRef idx="minor">
+            <a:schemeClr val="dk1"/>
+          </a:fontRef>
+        </p:style>
+        <p:txBody>
+          <a:bodyPr lIns="18000" tIns="18000" rIns="18000" bIns="18000" rtlCol="0" anchor="ctr"/>
+          <a:lstStyle/>
+          <a:p>
+            <a:pPr algn="ctr"/>
+            <a:r>
+              <a:rPr lang="en-US" sz="1000" noProof="1">
+                <a:solidFill>
+                  <a:schemeClr val="accent5"/>
+                </a:solidFill>
+              </a:rPr>
+              <a:t>Weather</a:t>
+            </a:r>
+            <a:endParaRPr lang="en-US" noProof="1">
+              <a:solidFill>
+                <a:schemeClr val="accent5"/>
+              </a:solidFill>
+            </a:endParaRPr>
+          </a:p>
+        </p:txBody>
+      </p:sp>
+      <p:sp>
+        <p:nvSpPr>
+          <p:cNvPr id="29" name="Rectangle: Rounded Corners 28">
+            <a:extLst>
+              <a:ext uri="{FF2B5EF4-FFF2-40B4-BE49-F238E27FC236}">
+                <a16:creationId xmlns:a16="http://schemas.microsoft.com/office/drawing/2014/main" id="{21D68607-E3FD-684F-20B3-49CE57EAED5B}"/>
+              </a:ext>
+            </a:extLst>
+          </p:cNvPr>
+          <p:cNvSpPr/>
+          <p:nvPr/>
+        </p:nvSpPr>
+        <p:spPr>
+          <a:xfrm>
+            <a:off x="7724892" y="5120321"/>
+            <a:ext cx="772011" cy="224636"/>
+          </a:xfrm>
+          <a:prstGeom prst="roundRect">
+            <a:avLst/>
+          </a:prstGeom>
+          <a:noFill/>
+          <a:ln>
+            <a:prstDash val="dash"/>
+          </a:ln>
+        </p:spPr>
+        <p:style>
+          <a:lnRef idx="2">
+            <a:schemeClr val="accent5"/>
+          </a:lnRef>
+          <a:fillRef idx="1">
+            <a:schemeClr val="lt1"/>
+          </a:fillRef>
+          <a:effectRef idx="0">
+            <a:schemeClr val="accent5"/>
+          </a:effectRef>
+          <a:fontRef idx="minor">
+            <a:schemeClr val="dk1"/>
+          </a:fontRef>
+        </p:style>
+        <p:txBody>
+          <a:bodyPr lIns="18000" tIns="18000" rIns="18000" bIns="18000" rtlCol="0" anchor="ctr"/>
+          <a:lstStyle/>
+          <a:p>
+            <a:pPr algn="ctr"/>
+            <a:r>
+              <a:rPr lang="en-US" sz="1000" noProof="1">
+                <a:solidFill>
+                  <a:schemeClr val="accent5"/>
+                </a:solidFill>
+              </a:rPr>
+              <a:t>Market</a:t>
+            </a:r>
+            <a:endParaRPr lang="en-US" noProof="1">
+              <a:solidFill>
+                <a:schemeClr val="accent5"/>
+              </a:solidFill>
+            </a:endParaRPr>
+          </a:p>
+        </p:txBody>
+      </p:sp>
+      <p:sp>
+        <p:nvSpPr>
+          <p:cNvPr id="30" name="Rectangle: Rounded Corners 29">
+            <a:extLst>
+              <a:ext uri="{FF2B5EF4-FFF2-40B4-BE49-F238E27FC236}">
+                <a16:creationId xmlns:a16="http://schemas.microsoft.com/office/drawing/2014/main" id="{66F90816-86C2-772F-80FF-19578D2032DF}"/>
+              </a:ext>
+            </a:extLst>
+          </p:cNvPr>
+          <p:cNvSpPr/>
+          <p:nvPr/>
+        </p:nvSpPr>
+        <p:spPr>
+          <a:xfrm>
+            <a:off x="6799818" y="5459821"/>
+            <a:ext cx="772011" cy="224636"/>
+          </a:xfrm>
+          <a:prstGeom prst="roundRect">
+            <a:avLst/>
+          </a:prstGeom>
+          <a:noFill/>
+          <a:ln>
+            <a:prstDash val="dash"/>
+          </a:ln>
+        </p:spPr>
+        <p:style>
+          <a:lnRef idx="2">
+            <a:schemeClr val="accent5"/>
+          </a:lnRef>
+          <a:fillRef idx="1">
+            <a:schemeClr val="lt1"/>
+          </a:fillRef>
+          <a:effectRef idx="0">
+            <a:schemeClr val="accent5"/>
+          </a:effectRef>
+          <a:fontRef idx="minor">
+            <a:schemeClr val="dk1"/>
+          </a:fontRef>
+        </p:style>
+        <p:txBody>
+          <a:bodyPr lIns="18000" tIns="18000" rIns="18000" bIns="18000" rtlCol="0" anchor="ctr"/>
+          <a:lstStyle/>
+          <a:p>
+            <a:pPr algn="ctr"/>
+            <a:r>
+              <a:rPr lang="en-US" sz="1000" noProof="1">
+                <a:solidFill>
+                  <a:schemeClr val="accent5"/>
+                </a:solidFill>
+              </a:rPr>
+              <a:t>HWD</a:t>
+            </a:r>
+            <a:endParaRPr lang="en-US" noProof="1">
+              <a:solidFill>
+                <a:schemeClr val="accent5"/>
+              </a:solidFill>
+            </a:endParaRPr>
+          </a:p>
+        </p:txBody>
+      </p:sp>
+      <p:sp>
+        <p:nvSpPr>
+          <p:cNvPr id="31" name="Rectangle: Rounded Corners 30">
+            <a:extLst>
+              <a:ext uri="{FF2B5EF4-FFF2-40B4-BE49-F238E27FC236}">
+                <a16:creationId xmlns:a16="http://schemas.microsoft.com/office/drawing/2014/main" id="{8D639D98-D523-A6ED-EFAC-B25EFED0FED3}"/>
+              </a:ext>
+            </a:extLst>
+          </p:cNvPr>
+          <p:cNvSpPr/>
+          <p:nvPr/>
+        </p:nvSpPr>
+        <p:spPr>
+          <a:xfrm>
+            <a:off x="7731776" y="5459821"/>
+            <a:ext cx="772011" cy="224636"/>
+          </a:xfrm>
+          <a:prstGeom prst="roundRect">
+            <a:avLst/>
+          </a:prstGeom>
+          <a:noFill/>
+          <a:ln>
+            <a:prstDash val="sysDot"/>
+          </a:ln>
+        </p:spPr>
+        <p:style>
+          <a:lnRef idx="2">
+            <a:schemeClr val="accent5"/>
+          </a:lnRef>
+          <a:fillRef idx="1">
+            <a:schemeClr val="lt1"/>
+          </a:fillRef>
+          <a:effectRef idx="0">
+            <a:schemeClr val="accent5"/>
+          </a:effectRef>
+          <a:fontRef idx="minor">
+            <a:schemeClr val="dk1"/>
+          </a:fontRef>
+        </p:style>
+        <p:txBody>
+          <a:bodyPr lIns="18000" tIns="18000" rIns="18000" bIns="18000" rtlCol="0" anchor="ctr"/>
+          <a:lstStyle/>
+          <a:p>
+            <a:pPr algn="ctr"/>
+            <a:r>
+              <a:rPr lang="en-US" sz="1000" noProof="1">
+                <a:solidFill>
+                  <a:schemeClr val="accent5"/>
+                </a:solidFill>
+              </a:rPr>
+              <a:t>Loads</a:t>
+            </a:r>
+            <a:endParaRPr lang="en-US" noProof="1">
+              <a:solidFill>
+                <a:schemeClr val="accent5"/>
+              </a:solidFill>
+            </a:endParaRPr>
+          </a:p>
+        </p:txBody>
+      </p:sp>
+      <p:sp>
+        <p:nvSpPr>
+          <p:cNvPr id="32" name="Rectangle: Rounded Corners 31">
+            <a:extLst>
+              <a:ext uri="{FF2B5EF4-FFF2-40B4-BE49-F238E27FC236}">
+                <a16:creationId xmlns:a16="http://schemas.microsoft.com/office/drawing/2014/main" id="{4DB7CC37-3D0E-AC6F-71D1-8D84D8807A50}"/>
+              </a:ext>
+            </a:extLst>
+          </p:cNvPr>
+          <p:cNvSpPr/>
+          <p:nvPr/>
+        </p:nvSpPr>
+        <p:spPr>
+          <a:xfrm>
+            <a:off x="7378793" y="5793341"/>
+            <a:ext cx="531683" cy="224636"/>
+          </a:xfrm>
+          <a:prstGeom prst="roundRect">
+            <a:avLst/>
+          </a:prstGeom>
+          <a:noFill/>
+          <a:ln>
+            <a:prstDash val="sysDot"/>
+          </a:ln>
+        </p:spPr>
+        <p:style>
+          <a:lnRef idx="2">
+            <a:schemeClr val="accent5"/>
+          </a:lnRef>
+          <a:fillRef idx="1">
+            <a:schemeClr val="lt1"/>
+          </a:fillRef>
+          <a:effectRef idx="0">
+            <a:schemeClr val="accent5"/>
+          </a:effectRef>
+          <a:fontRef idx="minor">
+            <a:schemeClr val="dk1"/>
+          </a:fontRef>
+        </p:style>
+        <p:txBody>
+          <a:bodyPr lIns="18000" tIns="18000" rIns="18000" bIns="18000" rtlCol="0" anchor="ctr"/>
+          <a:lstStyle/>
+          <a:p>
+            <a:pPr algn="ctr"/>
+            <a:r>
+              <a:rPr lang="en-US" sz="1000" noProof="1">
+                <a:solidFill>
+                  <a:schemeClr val="accent5"/>
+                </a:solidFill>
+              </a:rPr>
+              <a:t>+</a:t>
+            </a:r>
+            <a:endParaRPr lang="en-US" noProof="1">
+              <a:solidFill>
+                <a:schemeClr val="accent5"/>
+              </a:solidFill>
+            </a:endParaRPr>
+          </a:p>
+        </p:txBody>
+      </p:sp>
+      <p:sp>
+        <p:nvSpPr>
+          <p:cNvPr id="33" name="Rectangle: Rounded Corners 32">
+            <a:extLst>
+              <a:ext uri="{FF2B5EF4-FFF2-40B4-BE49-F238E27FC236}">
+                <a16:creationId xmlns:a16="http://schemas.microsoft.com/office/drawing/2014/main" id="{7572FF06-3D93-0E80-BAAC-B4F02AA1CF01}"/>
+              </a:ext>
+            </a:extLst>
+          </p:cNvPr>
+          <p:cNvSpPr/>
+          <p:nvPr/>
+        </p:nvSpPr>
+        <p:spPr>
+          <a:xfrm>
+            <a:off x="7724474" y="3832025"/>
+            <a:ext cx="961375" cy="454826"/>
+          </a:xfrm>
+          <a:prstGeom prst="roundRect">
+            <a:avLst/>
+          </a:prstGeom>
+          <a:noFill/>
+          <a:ln>
+            <a:solidFill>
+              <a:schemeClr val="accent3"/>
+            </a:solidFill>
+            <a:prstDash val="dash"/>
+          </a:ln>
+        </p:spPr>
+        <p:style>
+          <a:lnRef idx="2">
+            <a:schemeClr val="accent2"/>
+          </a:lnRef>
+          <a:fillRef idx="1">
+            <a:schemeClr val="lt1"/>
+          </a:fillRef>
+          <a:effectRef idx="0">
+            <a:schemeClr val="accent2"/>
+          </a:effectRef>
+          <a:fontRef idx="minor">
+            <a:schemeClr val="dk1"/>
+          </a:fontRef>
+        </p:style>
+        <p:txBody>
+          <a:bodyPr rtlCol="0" anchor="ctr"/>
+          <a:lstStyle/>
+          <a:p>
+            <a:pPr algn="ctr"/>
+            <a:r>
+              <a:rPr lang="en-US" noProof="1">
+                <a:solidFill>
+                  <a:schemeClr val="accent3"/>
+                </a:solidFill>
+              </a:rPr>
+              <a:t>+</a:t>
+            </a:r>
+          </a:p>
+        </p:txBody>
+      </p:sp>
+      <p:sp>
+        <p:nvSpPr>
+          <p:cNvPr id="35" name="Rectangle: Rounded Corners 34">
+            <a:extLst>
+              <a:ext uri="{FF2B5EF4-FFF2-40B4-BE49-F238E27FC236}">
+                <a16:creationId xmlns:a16="http://schemas.microsoft.com/office/drawing/2014/main" id="{1B028F6B-E244-B508-5881-9188812C2F5C}"/>
+              </a:ext>
+            </a:extLst>
+          </p:cNvPr>
+          <p:cNvSpPr/>
+          <p:nvPr/>
+        </p:nvSpPr>
+        <p:spPr>
+          <a:xfrm>
+            <a:off x="1597855" y="2538988"/>
+            <a:ext cx="1218310" cy="542074"/>
+          </a:xfrm>
+          <a:prstGeom prst="roundRect">
+            <a:avLst/>
+          </a:prstGeom>
+          <a:noFill/>
         </p:spPr>
         <p:style>
           <a:lnRef idx="2">
@@ -5782,1298 +6797,79 @@
           </a:fontRef>
         </p:style>
         <p:txBody>
-          <a:bodyPr rtlCol="0" anchor="t"/>
+          <a:bodyPr rtlCol="0" anchor="ctr"/>
           <a:lstStyle/>
           <a:p>
             <a:pPr algn="ctr"/>
             <a:r>
-              <a:rPr lang="en-IE" dirty="0"/>
-              <a:t>Process</a:t>
-            </a:r>
-          </a:p>
-        </p:txBody>
-      </p:sp>
-      <p:sp>
-        <p:nvSpPr>
-          <p:cNvPr id="58" name="Rectangle: Rounded Corners 57">
-            <a:extLst>
-              <a:ext uri="{FF2B5EF4-FFF2-40B4-BE49-F238E27FC236}">
-                <a16:creationId xmlns:a16="http://schemas.microsoft.com/office/drawing/2014/main" id="{32E43CD7-B2DC-2167-5601-D281A282AC00}"/>
-              </a:ext>
-            </a:extLst>
-          </p:cNvPr>
-          <p:cNvSpPr/>
-          <p:nvPr/>
+              <a:rPr lang="en-US" noProof="1">
+                <a:solidFill>
+                  <a:schemeClr val="accent1"/>
+                </a:solidFill>
+              </a:rPr>
+              <a:t>Unit</a:t>
+            </a:r>
+          </a:p>
+        </p:txBody>
+      </p:sp>
+      <p:sp>
+        <p:nvSpPr>
+          <p:cNvPr id="36" name="Title 1">
+            <a:extLst>
+              <a:ext uri="{FF2B5EF4-FFF2-40B4-BE49-F238E27FC236}">
+                <a16:creationId xmlns:a16="http://schemas.microsoft.com/office/drawing/2014/main" id="{5115FBB2-B037-5A61-D382-7B54356A2176}"/>
+              </a:ext>
+            </a:extLst>
+          </p:cNvPr>
+          <p:cNvSpPr>
+            <a:spLocks noGrp="1"/>
+          </p:cNvSpPr>
+          <p:nvPr>
+            <p:ph type="title"/>
+          </p:nvPr>
         </p:nvSpPr>
         <p:spPr>
           <a:xfrm>
-            <a:off x="4062760" y="2345744"/>
-            <a:ext cx="3213100" cy="3975100"/>
+            <a:off x="838200" y="365125"/>
+            <a:ext cx="10515600" cy="1325563"/>
           </a:xfrm>
-          <a:prstGeom prst="roundRect">
-            <a:avLst/>
-          </a:prstGeom>
         </p:spPr>
-        <p:style>
-          <a:lnRef idx="2">
-            <a:schemeClr val="accent1"/>
-          </a:lnRef>
-          <a:fillRef idx="1">
-            <a:schemeClr val="lt1"/>
-          </a:fillRef>
-          <a:effectRef idx="0">
-            <a:schemeClr val="accent1"/>
-          </a:effectRef>
-          <a:fontRef idx="minor">
-            <a:schemeClr val="dk1"/>
-          </a:fontRef>
-        </p:style>
-        <p:txBody>
-          <a:bodyPr rtlCol="0" anchor="t"/>
-          <a:lstStyle/>
-          <a:p>
-            <a:pPr algn="ctr"/>
-            <a:r>
-              <a:rPr lang="en-IE" dirty="0">
-                <a:solidFill>
-                  <a:schemeClr val="accent1"/>
+        <p:txBody>
+          <a:bodyPr/>
+          <a:lstStyle/>
+          <a:p>
+            <a:r>
+              <a:rPr lang="en-US" noProof="1">
+                <a:solidFill>
+                  <a:srgbClr val="FFCC99"/>
                 </a:solidFill>
               </a:rPr>
-              <a:t>Parametric Analysis</a:t>
-            </a:r>
-          </a:p>
-        </p:txBody>
-      </p:sp>
-      <p:sp>
-        <p:nvSpPr>
-          <p:cNvPr id="2" name="Title 1">
-            <a:extLst>
-              <a:ext uri="{FF2B5EF4-FFF2-40B4-BE49-F238E27FC236}">
-                <a16:creationId xmlns:a16="http://schemas.microsoft.com/office/drawing/2014/main" id="{61C9D469-4418-AE5B-90F1-B039D071ECEB}"/>
-              </a:ext>
-            </a:extLst>
-          </p:cNvPr>
-          <p:cNvSpPr>
-            <a:spLocks noGrp="1"/>
-          </p:cNvSpPr>
-          <p:nvPr>
-            <p:ph type="title"/>
-          </p:nvPr>
-        </p:nvSpPr>
-        <p:spPr/>
-        <p:txBody>
-          <a:bodyPr/>
-          <a:lstStyle/>
-          <a:p>
-            <a:r>
-              <a:rPr lang="en-US" dirty="0"/>
-              <a:t>module architectures example: </a:t>
-            </a:r>
-            <a:r>
-              <a:rPr lang="en-US" dirty="0" err="1"/>
-              <a:t>csp</a:t>
-            </a:r>
-            <a:endParaRPr lang="en-IE" dirty="0"/>
-          </a:p>
-        </p:txBody>
-      </p:sp>
-      <p:grpSp>
-        <p:nvGrpSpPr>
-          <p:cNvPr id="43" name="Group 42">
-            <a:extLst>
-              <a:ext uri="{FF2B5EF4-FFF2-40B4-BE49-F238E27FC236}">
-                <a16:creationId xmlns:a16="http://schemas.microsoft.com/office/drawing/2014/main" id="{4630F986-D38E-F38A-929A-3BBE627C4DDD}"/>
-              </a:ext>
-            </a:extLst>
-          </p:cNvPr>
-          <p:cNvGrpSpPr/>
-          <p:nvPr/>
-        </p:nvGrpSpPr>
-        <p:grpSpPr>
-          <a:xfrm>
-            <a:off x="465872" y="1614489"/>
-            <a:ext cx="2732049" cy="5053088"/>
-            <a:chOff x="465872" y="1614489"/>
-            <a:chExt cx="2732049" cy="5053088"/>
-          </a:xfrm>
-        </p:grpSpPr>
-        <p:sp>
-          <p:nvSpPr>
-            <p:cNvPr id="4" name="Rectangle: Rounded Corners 3">
-              <a:extLst>
-                <a:ext uri="{FF2B5EF4-FFF2-40B4-BE49-F238E27FC236}">
-                  <a16:creationId xmlns:a16="http://schemas.microsoft.com/office/drawing/2014/main" id="{191C49CA-D05D-40DA-58B6-D9DC88B4F4CA}"/>
-                </a:ext>
-              </a:extLst>
-            </p:cNvPr>
-            <p:cNvSpPr/>
-            <p:nvPr/>
-          </p:nvSpPr>
-          <p:spPr>
-            <a:xfrm>
-              <a:off x="465872" y="1614489"/>
-              <a:ext cx="2732049" cy="5053088"/>
-            </a:xfrm>
-            <a:prstGeom prst="roundRect">
-              <a:avLst/>
-            </a:prstGeom>
-          </p:spPr>
-          <p:style>
-            <a:lnRef idx="2">
-              <a:schemeClr val="accent1"/>
-            </a:lnRef>
-            <a:fillRef idx="1">
-              <a:schemeClr val="lt1"/>
-            </a:fillRef>
-            <a:effectRef idx="0">
-              <a:schemeClr val="accent1"/>
-            </a:effectRef>
-            <a:fontRef idx="minor">
-              <a:schemeClr val="dk1"/>
-            </a:fontRef>
-          </p:style>
-          <p:txBody>
-            <a:bodyPr rtlCol="0" anchor="t"/>
-            <a:lstStyle/>
-            <a:p>
-              <a:pPr algn="ctr"/>
-              <a:r>
-                <a:rPr lang="en-IE" dirty="0" err="1"/>
-                <a:t>PlantCSP</a:t>
-              </a:r>
-              <a:endParaRPr lang="en-IE" dirty="0"/>
-            </a:p>
-          </p:txBody>
-        </p:sp>
-        <p:sp>
-          <p:nvSpPr>
-            <p:cNvPr id="5" name="Rectangle: Rounded Corners 4">
-              <a:extLst>
-                <a:ext uri="{FF2B5EF4-FFF2-40B4-BE49-F238E27FC236}">
-                  <a16:creationId xmlns:a16="http://schemas.microsoft.com/office/drawing/2014/main" id="{8A08004D-C969-D567-E62E-7519C4DCE557}"/>
-                </a:ext>
-              </a:extLst>
-            </p:cNvPr>
-            <p:cNvSpPr/>
-            <p:nvPr/>
-          </p:nvSpPr>
-          <p:spPr>
-            <a:xfrm>
-              <a:off x="950952" y="3253059"/>
-              <a:ext cx="1761893" cy="501805"/>
-            </a:xfrm>
-            <a:prstGeom prst="roundRect">
-              <a:avLst/>
-            </a:prstGeom>
-          </p:spPr>
-          <p:style>
-            <a:lnRef idx="2">
-              <a:schemeClr val="accent5"/>
-            </a:lnRef>
-            <a:fillRef idx="1">
-              <a:schemeClr val="lt1"/>
-            </a:fillRef>
-            <a:effectRef idx="0">
-              <a:schemeClr val="accent5"/>
-            </a:effectRef>
-            <a:fontRef idx="minor">
-              <a:schemeClr val="dk1"/>
-            </a:fontRef>
-          </p:style>
-          <p:txBody>
-            <a:bodyPr rtlCol="0" anchor="ctr"/>
-            <a:lstStyle/>
-            <a:p>
-              <a:pPr algn="ctr"/>
-              <a:r>
-                <a:rPr lang="en-IE" dirty="0">
-                  <a:solidFill>
-                    <a:schemeClr val="accent5"/>
-                  </a:solidFill>
-                </a:rPr>
-                <a:t>Weather</a:t>
-              </a:r>
-            </a:p>
-          </p:txBody>
-        </p:sp>
-        <p:sp>
-          <p:nvSpPr>
-            <p:cNvPr id="6" name="Rectangle: Rounded Corners 5">
-              <a:extLst>
-                <a:ext uri="{FF2B5EF4-FFF2-40B4-BE49-F238E27FC236}">
-                  <a16:creationId xmlns:a16="http://schemas.microsoft.com/office/drawing/2014/main" id="{6B2A663C-2760-6C41-5086-C0BE0E667E9F}"/>
-                </a:ext>
-              </a:extLst>
-            </p:cNvPr>
-            <p:cNvSpPr/>
-            <p:nvPr/>
-          </p:nvSpPr>
-          <p:spPr>
-            <a:xfrm>
-              <a:off x="950951" y="4390278"/>
-              <a:ext cx="1761893" cy="501805"/>
-            </a:xfrm>
-            <a:prstGeom prst="roundRect">
-              <a:avLst/>
-            </a:prstGeom>
-          </p:spPr>
-          <p:style>
-            <a:lnRef idx="2">
-              <a:schemeClr val="accent2"/>
-            </a:lnRef>
-            <a:fillRef idx="1">
-              <a:schemeClr val="lt1"/>
-            </a:fillRef>
-            <a:effectRef idx="0">
-              <a:schemeClr val="accent2"/>
-            </a:effectRef>
-            <a:fontRef idx="minor">
-              <a:schemeClr val="dk1"/>
-            </a:fontRef>
-          </p:style>
-          <p:txBody>
-            <a:bodyPr rtlCol="0" anchor="ctr"/>
-            <a:lstStyle/>
-            <a:p>
-              <a:pPr algn="ctr"/>
-              <a:r>
-                <a:rPr lang="en-IE" dirty="0">
-                  <a:solidFill>
-                    <a:schemeClr val="accent2"/>
-                  </a:solidFill>
-                </a:rPr>
-                <a:t>Receiver</a:t>
-              </a:r>
-            </a:p>
-          </p:txBody>
-        </p:sp>
-        <p:sp>
-          <p:nvSpPr>
-            <p:cNvPr id="7" name="Rectangle: Rounded Corners 6">
-              <a:extLst>
-                <a:ext uri="{FF2B5EF4-FFF2-40B4-BE49-F238E27FC236}">
-                  <a16:creationId xmlns:a16="http://schemas.microsoft.com/office/drawing/2014/main" id="{5E6DCA5C-157F-9A24-38AC-AADBE8A7C57E}"/>
-                </a:ext>
-              </a:extLst>
-            </p:cNvPr>
-            <p:cNvSpPr/>
-            <p:nvPr/>
-          </p:nvSpPr>
-          <p:spPr>
-            <a:xfrm>
-              <a:off x="950950" y="4949067"/>
-              <a:ext cx="1761894" cy="501805"/>
-            </a:xfrm>
-            <a:prstGeom prst="roundRect">
-              <a:avLst/>
-            </a:prstGeom>
-          </p:spPr>
-          <p:style>
-            <a:lnRef idx="2">
-              <a:schemeClr val="accent2"/>
-            </a:lnRef>
-            <a:fillRef idx="1">
-              <a:schemeClr val="lt1"/>
-            </a:fillRef>
-            <a:effectRef idx="0">
-              <a:schemeClr val="accent2"/>
-            </a:effectRef>
-            <a:fontRef idx="minor">
-              <a:schemeClr val="dk1"/>
-            </a:fontRef>
-          </p:style>
-          <p:txBody>
-            <a:bodyPr rtlCol="0" anchor="ctr"/>
-            <a:lstStyle/>
-            <a:p>
-              <a:pPr algn="ctr"/>
-              <a:r>
-                <a:rPr lang="en-IE" dirty="0">
-                  <a:solidFill>
-                    <a:schemeClr val="accent2"/>
-                  </a:solidFill>
-                </a:rPr>
-                <a:t>Storage</a:t>
-              </a:r>
-            </a:p>
-          </p:txBody>
-        </p:sp>
-        <p:sp>
-          <p:nvSpPr>
-            <p:cNvPr id="8" name="Rectangle: Rounded Corners 7">
-              <a:extLst>
-                <a:ext uri="{FF2B5EF4-FFF2-40B4-BE49-F238E27FC236}">
-                  <a16:creationId xmlns:a16="http://schemas.microsoft.com/office/drawing/2014/main" id="{7F3F7DA8-E8A5-4997-16DC-B414EF79FECF}"/>
-                </a:ext>
-              </a:extLst>
-            </p:cNvPr>
-            <p:cNvSpPr/>
-            <p:nvPr/>
-          </p:nvSpPr>
-          <p:spPr>
-            <a:xfrm>
-              <a:off x="950950" y="5515538"/>
-              <a:ext cx="1761894" cy="501805"/>
-            </a:xfrm>
-            <a:prstGeom prst="roundRect">
-              <a:avLst/>
-            </a:prstGeom>
-          </p:spPr>
-          <p:style>
-            <a:lnRef idx="2">
-              <a:schemeClr val="accent2"/>
-            </a:lnRef>
-            <a:fillRef idx="1">
-              <a:schemeClr val="lt1"/>
-            </a:fillRef>
-            <a:effectRef idx="0">
-              <a:schemeClr val="accent2"/>
-            </a:effectRef>
-            <a:fontRef idx="minor">
-              <a:schemeClr val="dk1"/>
-            </a:fontRef>
-          </p:style>
-          <p:txBody>
-            <a:bodyPr rtlCol="0" anchor="ctr"/>
-            <a:lstStyle/>
-            <a:p>
-              <a:pPr algn="ctr"/>
-              <a:r>
-                <a:rPr lang="en-IE" dirty="0" err="1">
-                  <a:solidFill>
-                    <a:schemeClr val="accent2"/>
-                  </a:solidFill>
-                </a:rPr>
-                <a:t>PowerBlock</a:t>
-              </a:r>
-              <a:endParaRPr lang="en-IE" dirty="0">
-                <a:solidFill>
-                  <a:schemeClr val="accent2"/>
-                </a:solidFill>
-              </a:endParaRPr>
-            </a:p>
-          </p:txBody>
-        </p:sp>
-        <p:sp>
-          <p:nvSpPr>
-            <p:cNvPr id="9" name="Rectangle: Rounded Corners 8">
-              <a:extLst>
-                <a:ext uri="{FF2B5EF4-FFF2-40B4-BE49-F238E27FC236}">
-                  <a16:creationId xmlns:a16="http://schemas.microsoft.com/office/drawing/2014/main" id="{8C0D062C-8F5B-E493-B935-B456ADECF5C8}"/>
-                </a:ext>
-              </a:extLst>
-            </p:cNvPr>
-            <p:cNvSpPr/>
-            <p:nvPr/>
-          </p:nvSpPr>
-          <p:spPr>
-            <a:xfrm>
-              <a:off x="950951" y="3831489"/>
-              <a:ext cx="1761893" cy="501805"/>
-            </a:xfrm>
-            <a:prstGeom prst="roundRect">
-              <a:avLst/>
-            </a:prstGeom>
-          </p:spPr>
-          <p:style>
-            <a:lnRef idx="2">
-              <a:schemeClr val="accent2"/>
-            </a:lnRef>
-            <a:fillRef idx="1">
-              <a:schemeClr val="lt1"/>
-            </a:fillRef>
-            <a:effectRef idx="0">
-              <a:schemeClr val="accent2"/>
-            </a:effectRef>
-            <a:fontRef idx="minor">
-              <a:schemeClr val="dk1"/>
-            </a:fontRef>
-          </p:style>
-          <p:txBody>
-            <a:bodyPr rtlCol="0" anchor="ctr"/>
-            <a:lstStyle/>
-            <a:p>
-              <a:pPr algn="ctr"/>
-              <a:r>
-                <a:rPr lang="en-IE" dirty="0" err="1">
-                  <a:solidFill>
-                    <a:schemeClr val="accent2"/>
-                  </a:solidFill>
-                </a:rPr>
-                <a:t>OpticalSystem</a:t>
-              </a:r>
-              <a:endParaRPr lang="en-IE" dirty="0">
-                <a:solidFill>
-                  <a:schemeClr val="accent2"/>
-                </a:solidFill>
-              </a:endParaRPr>
-            </a:p>
-          </p:txBody>
-        </p:sp>
-        <p:sp>
-          <p:nvSpPr>
-            <p:cNvPr id="10" name="Rectangle: Rounded Corners 9">
-              <a:extLst>
-                <a:ext uri="{FF2B5EF4-FFF2-40B4-BE49-F238E27FC236}">
-                  <a16:creationId xmlns:a16="http://schemas.microsoft.com/office/drawing/2014/main" id="{A5F44C31-F5BE-DCD7-DA85-41CEEF22AF1B}"/>
-                </a:ext>
-              </a:extLst>
-            </p:cNvPr>
-            <p:cNvSpPr/>
-            <p:nvPr/>
-          </p:nvSpPr>
-          <p:spPr>
-            <a:xfrm>
-              <a:off x="950950" y="6094183"/>
-              <a:ext cx="1761894" cy="501805"/>
-            </a:xfrm>
-            <a:prstGeom prst="roundRect">
-              <a:avLst/>
-            </a:prstGeom>
-          </p:spPr>
-          <p:style>
-            <a:lnRef idx="2">
-              <a:schemeClr val="accent5"/>
-            </a:lnRef>
-            <a:fillRef idx="1">
-              <a:schemeClr val="lt1"/>
-            </a:fillRef>
-            <a:effectRef idx="0">
-              <a:schemeClr val="accent5"/>
-            </a:effectRef>
-            <a:fontRef idx="minor">
-              <a:schemeClr val="dk1"/>
-            </a:fontRef>
-          </p:style>
-          <p:txBody>
-            <a:bodyPr rtlCol="0" anchor="ctr"/>
-            <a:lstStyle/>
-            <a:p>
-              <a:pPr algn="ctr"/>
-              <a:r>
-                <a:rPr lang="en-IE" dirty="0">
-                  <a:solidFill>
-                    <a:schemeClr val="accent5"/>
-                  </a:solidFill>
-                </a:rPr>
-                <a:t>Market</a:t>
-              </a:r>
-            </a:p>
-          </p:txBody>
-        </p:sp>
-        <p:sp>
-          <p:nvSpPr>
-            <p:cNvPr id="14" name="Rectangle: Rounded Corners 13">
-              <a:extLst>
-                <a:ext uri="{FF2B5EF4-FFF2-40B4-BE49-F238E27FC236}">
-                  <a16:creationId xmlns:a16="http://schemas.microsoft.com/office/drawing/2014/main" id="{69E29F03-A7AF-A034-75F2-656059A28835}"/>
-                </a:ext>
-              </a:extLst>
-            </p:cNvPr>
-            <p:cNvSpPr/>
-            <p:nvPr/>
-          </p:nvSpPr>
-          <p:spPr>
-            <a:xfrm>
-              <a:off x="950949" y="2109645"/>
-              <a:ext cx="1761893" cy="501805"/>
-            </a:xfrm>
-            <a:prstGeom prst="roundRect">
-              <a:avLst/>
-            </a:prstGeom>
-          </p:spPr>
-          <p:style>
-            <a:lnRef idx="2">
-              <a:schemeClr val="accent1"/>
-            </a:lnRef>
-            <a:fillRef idx="1">
-              <a:schemeClr val="lt1"/>
-            </a:fillRef>
-            <a:effectRef idx="0">
-              <a:schemeClr val="accent1"/>
-            </a:effectRef>
-            <a:fontRef idx="minor">
-              <a:schemeClr val="dk1"/>
-            </a:fontRef>
-          </p:style>
-          <p:txBody>
-            <a:bodyPr rtlCol="0" anchor="ctr"/>
-            <a:lstStyle/>
-            <a:p>
-              <a:pPr algn="ctr"/>
-              <a:r>
-                <a:rPr lang="en-IE" dirty="0">
-                  <a:solidFill>
-                    <a:schemeClr val="accent1"/>
-                  </a:solidFill>
-                </a:rPr>
-                <a:t>Settings</a:t>
-              </a:r>
-            </a:p>
-          </p:txBody>
-        </p:sp>
-        <p:sp>
-          <p:nvSpPr>
-            <p:cNvPr id="28" name="Rectangle: Rounded Corners 27">
-              <a:extLst>
-                <a:ext uri="{FF2B5EF4-FFF2-40B4-BE49-F238E27FC236}">
-                  <a16:creationId xmlns:a16="http://schemas.microsoft.com/office/drawing/2014/main" id="{E4654FD5-87FE-948B-5F5E-6A23F5E7A6E2}"/>
-                </a:ext>
-              </a:extLst>
-            </p:cNvPr>
-            <p:cNvSpPr/>
-            <p:nvPr/>
-          </p:nvSpPr>
-          <p:spPr>
-            <a:xfrm>
-              <a:off x="950949" y="2676116"/>
-              <a:ext cx="1761893" cy="501805"/>
-            </a:xfrm>
-            <a:prstGeom prst="roundRect">
-              <a:avLst/>
-            </a:prstGeom>
-          </p:spPr>
-          <p:style>
-            <a:lnRef idx="2">
-              <a:schemeClr val="accent1"/>
-            </a:lnRef>
-            <a:fillRef idx="1">
-              <a:schemeClr val="lt1"/>
-            </a:fillRef>
-            <a:effectRef idx="0">
-              <a:schemeClr val="accent1"/>
-            </a:effectRef>
-            <a:fontRef idx="minor">
-              <a:schemeClr val="dk1"/>
-            </a:fontRef>
-          </p:style>
-          <p:txBody>
-            <a:bodyPr rtlCol="0" anchor="ctr"/>
-            <a:lstStyle/>
-            <a:p>
-              <a:pPr algn="ctr"/>
-              <a:r>
-                <a:rPr lang="en-IE" dirty="0">
-                  <a:solidFill>
-                    <a:schemeClr val="accent1"/>
-                  </a:solidFill>
-                </a:rPr>
-                <a:t>Location</a:t>
-              </a:r>
-            </a:p>
-          </p:txBody>
-        </p:sp>
-      </p:grpSp>
-      <p:sp>
-        <p:nvSpPr>
-          <p:cNvPr id="48" name="Rectangle: Rounded Corners 47">
-            <a:extLst>
-              <a:ext uri="{FF2B5EF4-FFF2-40B4-BE49-F238E27FC236}">
-                <a16:creationId xmlns:a16="http://schemas.microsoft.com/office/drawing/2014/main" id="{A27782EA-1ABC-8E05-01EA-7559B0860C78}"/>
-              </a:ext>
-            </a:extLst>
-          </p:cNvPr>
-          <p:cNvSpPr/>
-          <p:nvPr/>
-        </p:nvSpPr>
-        <p:spPr>
-          <a:xfrm>
-            <a:off x="4189760" y="2872048"/>
-            <a:ext cx="2997200" cy="3257548"/>
-          </a:xfrm>
-          <a:prstGeom prst="roundRect">
-            <a:avLst/>
-          </a:prstGeom>
-        </p:spPr>
-        <p:style>
-          <a:lnRef idx="2">
-            <a:schemeClr val="accent1"/>
-          </a:lnRef>
-          <a:fillRef idx="1">
-            <a:schemeClr val="lt1"/>
-          </a:fillRef>
-          <a:effectRef idx="0">
-            <a:schemeClr val="accent1"/>
-          </a:effectRef>
-          <a:fontRef idx="minor">
-            <a:schemeClr val="dk1"/>
-          </a:fontRef>
-        </p:style>
-        <p:txBody>
-          <a:bodyPr rtlCol="0" anchor="t"/>
-          <a:lstStyle/>
-          <a:p>
-            <a:pPr algn="ctr"/>
-            <a:r>
-              <a:rPr lang="en-IE" dirty="0">
-                <a:solidFill>
-                  <a:schemeClr val="accent1"/>
+              <a:t>antu</a:t>
+            </a:r>
+            <a:r>
+              <a:rPr lang="en-US" noProof="1">
+                <a:solidFill>
+                  <a:schemeClr val="accent5"/>
                 </a:solidFill>
               </a:rPr>
-              <a:t>Annual Performance (TMY)</a:t>
-            </a:r>
-          </a:p>
-        </p:txBody>
-      </p:sp>
-      <p:sp>
-        <p:nvSpPr>
-          <p:cNvPr id="53" name="Rectangle: Rounded Corners 52">
-            <a:extLst>
-              <a:ext uri="{FF2B5EF4-FFF2-40B4-BE49-F238E27FC236}">
-                <a16:creationId xmlns:a16="http://schemas.microsoft.com/office/drawing/2014/main" id="{C571C063-2086-07D3-8F2F-A5550D9233A6}"/>
-              </a:ext>
-            </a:extLst>
-          </p:cNvPr>
-          <p:cNvSpPr/>
-          <p:nvPr/>
-        </p:nvSpPr>
-        <p:spPr>
-          <a:xfrm>
-            <a:off x="7848600" y="2393164"/>
-            <a:ext cx="2997200" cy="3783852"/>
-          </a:xfrm>
-          <a:prstGeom prst="roundRect">
-            <a:avLst/>
-          </a:prstGeom>
-        </p:spPr>
-        <p:style>
-          <a:lnRef idx="2">
-            <a:schemeClr val="accent1"/>
-          </a:lnRef>
-          <a:fillRef idx="1">
-            <a:schemeClr val="lt1"/>
-          </a:fillRef>
-          <a:effectRef idx="0">
-            <a:schemeClr val="accent1"/>
-          </a:effectRef>
-          <a:fontRef idx="minor">
-            <a:schemeClr val="dk1"/>
-          </a:fontRef>
-        </p:style>
-        <p:txBody>
-          <a:bodyPr rtlCol="0" anchor="t"/>
-          <a:lstStyle/>
-          <a:p>
-            <a:pPr algn="ctr"/>
-            <a:r>
-              <a:rPr lang="en-IE" dirty="0">
-                <a:solidFill>
-                  <a:schemeClr val="accent1"/>
-                </a:solidFill>
-              </a:rPr>
-              <a:t>Stochastic Analysis</a:t>
-            </a:r>
-          </a:p>
-          <a:p>
-            <a:pPr algn="ctr"/>
-            <a:r>
-              <a:rPr lang="en-IE" dirty="0">
-                <a:solidFill>
-                  <a:schemeClr val="accent1"/>
-                </a:solidFill>
-              </a:rPr>
-              <a:t>(</a:t>
-            </a:r>
-            <a:r>
-              <a:rPr lang="en-IE" dirty="0" err="1">
-                <a:solidFill>
-                  <a:schemeClr val="accent1"/>
-                </a:solidFill>
-              </a:rPr>
-              <a:t>MonteCarlo</a:t>
-            </a:r>
-            <a:r>
-              <a:rPr lang="en-IE" dirty="0">
-                <a:solidFill>
-                  <a:schemeClr val="accent1"/>
-                </a:solidFill>
-              </a:rPr>
-              <a:t> Simulation)</a:t>
-            </a:r>
-          </a:p>
-        </p:txBody>
-      </p:sp>
-      <p:grpSp>
-        <p:nvGrpSpPr>
-          <p:cNvPr id="66" name="Group 65">
-            <a:extLst>
-              <a:ext uri="{FF2B5EF4-FFF2-40B4-BE49-F238E27FC236}">
-                <a16:creationId xmlns:a16="http://schemas.microsoft.com/office/drawing/2014/main" id="{DD1A5EF6-E86D-F2A3-FDF7-79E23984C7BE}"/>
-              </a:ext>
-            </a:extLst>
-          </p:cNvPr>
-          <p:cNvGrpSpPr/>
-          <p:nvPr/>
-        </p:nvGrpSpPr>
-        <p:grpSpPr>
-          <a:xfrm>
-            <a:off x="4459094" y="3672031"/>
-            <a:ext cx="1632752" cy="2422152"/>
-            <a:chOff x="8483600" y="3423723"/>
-            <a:chExt cx="1727200" cy="2614341"/>
-          </a:xfrm>
-        </p:grpSpPr>
-        <p:sp>
-          <p:nvSpPr>
-            <p:cNvPr id="59" name="Rectangle: Rounded Corners 58">
-              <a:extLst>
-                <a:ext uri="{FF2B5EF4-FFF2-40B4-BE49-F238E27FC236}">
-                  <a16:creationId xmlns:a16="http://schemas.microsoft.com/office/drawing/2014/main" id="{A510200D-E428-3857-ACE2-595D20C26796}"/>
-                </a:ext>
-              </a:extLst>
-            </p:cNvPr>
-            <p:cNvSpPr/>
-            <p:nvPr/>
-          </p:nvSpPr>
-          <p:spPr>
-            <a:xfrm>
-              <a:off x="8483600" y="3423723"/>
-              <a:ext cx="1727200" cy="2614341"/>
-            </a:xfrm>
-            <a:prstGeom prst="roundRect">
-              <a:avLst/>
-            </a:prstGeom>
-          </p:spPr>
-          <p:style>
-            <a:lnRef idx="2">
-              <a:schemeClr val="accent1"/>
-            </a:lnRef>
-            <a:fillRef idx="1">
-              <a:schemeClr val="lt1"/>
-            </a:fillRef>
-            <a:effectRef idx="0">
-              <a:schemeClr val="accent1"/>
-            </a:effectRef>
-            <a:fontRef idx="minor">
-              <a:schemeClr val="dk1"/>
-            </a:fontRef>
-          </p:style>
-          <p:txBody>
-            <a:bodyPr rtlCol="0" anchor="t"/>
-            <a:lstStyle/>
-            <a:p>
-              <a:pPr algn="ctr"/>
-              <a:r>
-                <a:rPr lang="en-IE" dirty="0">
-                  <a:solidFill>
-                    <a:schemeClr val="accent1"/>
-                  </a:solidFill>
-                </a:rPr>
-                <a:t>Simulation</a:t>
-              </a:r>
-            </a:p>
-          </p:txBody>
-        </p:sp>
-        <mc:AlternateContent xmlns:mc="http://schemas.openxmlformats.org/markup-compatibility/2006">
-          <mc:Choice xmlns:a14="http://schemas.microsoft.com/office/drawing/2010/main" Requires="a14">
-            <p:sp>
-              <p:nvSpPr>
-                <p:cNvPr id="54" name="Rectangle: Rounded Corners 53">
-                  <a:extLst>
-                    <a:ext uri="{FF2B5EF4-FFF2-40B4-BE49-F238E27FC236}">
-                      <a16:creationId xmlns:a16="http://schemas.microsoft.com/office/drawing/2014/main" id="{2723F7D9-E5FE-729A-C287-4E7DF42F3CB0}"/>
-                    </a:ext>
-                  </a:extLst>
-                </p:cNvPr>
-                <p:cNvSpPr/>
-                <p:nvPr/>
-              </p:nvSpPr>
-              <p:spPr>
-                <a:xfrm>
-                  <a:off x="8610600" y="3874627"/>
-                  <a:ext cx="1473200" cy="416528"/>
-                </a:xfrm>
-                <a:prstGeom prst="roundRect">
-                  <a:avLst/>
-                </a:prstGeom>
-              </p:spPr>
-              <p:style>
-                <a:lnRef idx="2">
-                  <a:schemeClr val="accent1"/>
-                </a:lnRef>
-                <a:fillRef idx="1">
-                  <a:schemeClr val="lt1"/>
-                </a:fillRef>
-                <a:effectRef idx="0">
-                  <a:schemeClr val="accent1"/>
-                </a:effectRef>
-                <a:fontRef idx="minor">
-                  <a:schemeClr val="dk1"/>
-                </a:fontRef>
-              </p:style>
-              <p:txBody>
-                <a:bodyPr rtlCol="0" anchor="t"/>
-                <a:lstStyle/>
-                <a:p>
-                  <a:pPr algn="ctr"/>
-                  <a14:m>
-                    <m:oMathPara xmlns:m="http://schemas.openxmlformats.org/officeDocument/2006/math">
-                      <m:oMathParaPr>
-                        <m:jc m:val="centerGroup"/>
-                      </m:oMathParaPr>
-                      <m:oMath xmlns:m="http://schemas.openxmlformats.org/officeDocument/2006/math">
-                        <m:sSub>
-                          <m:sSubPr>
-                            <m:ctrlPr>
-                              <a:rPr lang="en-IE" b="0" i="1" smtClean="0">
-                                <a:solidFill>
-                                  <a:schemeClr val="accent1"/>
-                                </a:solidFill>
-                                <a:latin typeface="Cambria Math" panose="02040503050406030204" pitchFamily="18" charset="0"/>
-                              </a:rPr>
-                            </m:ctrlPr>
-                          </m:sSubPr>
-                          <m:e>
-                            <m:r>
-                              <a:rPr lang="en-IE" b="0" i="1" smtClean="0">
-                                <a:solidFill>
-                                  <a:schemeClr val="accent1"/>
-                                </a:solidFill>
-                                <a:latin typeface="Cambria Math" panose="02040503050406030204" pitchFamily="18" charset="0"/>
-                              </a:rPr>
-                              <m:t>𝜂</m:t>
-                            </m:r>
-                          </m:e>
-                          <m:sub>
-                            <m:r>
-                              <a:rPr lang="en-IE" b="0" i="1" smtClean="0">
-                                <a:solidFill>
-                                  <a:schemeClr val="accent1"/>
-                                </a:solidFill>
-                                <a:latin typeface="Cambria Math" panose="02040503050406030204" pitchFamily="18" charset="0"/>
-                              </a:rPr>
-                              <m:t>𝑠𝑓</m:t>
-                            </m:r>
-                          </m:sub>
-                        </m:sSub>
-                      </m:oMath>
-                    </m:oMathPara>
-                  </a14:m>
-                  <a:endParaRPr lang="en-IE" b="0" dirty="0">
-                    <a:solidFill>
-                      <a:schemeClr val="accent1"/>
-                    </a:solidFill>
-                  </a:endParaRPr>
-                </a:p>
-                <a:p>
-                  <a:pPr algn="ctr"/>
-                  <a:endParaRPr lang="en-IE" dirty="0">
-                    <a:solidFill>
-                      <a:schemeClr val="accent1"/>
-                    </a:solidFill>
-                  </a:endParaRPr>
-                </a:p>
-              </p:txBody>
-            </p:sp>
-          </mc:Choice>
-          <mc:Fallback>
-            <p:sp>
-              <p:nvSpPr>
-                <p:cNvPr id="54" name="Rectangle: Rounded Corners 53">
-                  <a:extLst>
-                    <a:ext uri="{FF2B5EF4-FFF2-40B4-BE49-F238E27FC236}">
-                      <a16:creationId xmlns:a16="http://schemas.microsoft.com/office/drawing/2014/main" id="{2723F7D9-E5FE-729A-C287-4E7DF42F3CB0}"/>
-                    </a:ext>
-                  </a:extLst>
-                </p:cNvPr>
-                <p:cNvSpPr>
-                  <a:spLocks noRot="1" noChangeAspect="1" noMove="1" noResize="1" noEditPoints="1" noAdjustHandles="1" noChangeArrowheads="1" noChangeShapeType="1" noTextEdit="1"/>
-                </p:cNvSpPr>
-                <p:nvPr/>
-              </p:nvSpPr>
-              <p:spPr>
-                <a:xfrm>
-                  <a:off x="8610600" y="3874627"/>
-                  <a:ext cx="1473200" cy="416528"/>
-                </a:xfrm>
-                <a:prstGeom prst="roundRect">
-                  <a:avLst/>
-                </a:prstGeom>
-                <a:blipFill>
-                  <a:blip r:embed="rId2"/>
-                  <a:stretch>
-                    <a:fillRect b="-12121"/>
-                  </a:stretch>
-                </a:blipFill>
-              </p:spPr>
-              <p:txBody>
-                <a:bodyPr/>
-                <a:lstStyle/>
-                <a:p>
-                  <a:r>
-                    <a:rPr lang="en-IE">
-                      <a:noFill/>
-                    </a:rPr>
-                    <a:t> </a:t>
-                  </a:r>
-                </a:p>
-              </p:txBody>
-            </p:sp>
-          </mc:Fallback>
-        </mc:AlternateContent>
-        <mc:AlternateContent xmlns:mc="http://schemas.openxmlformats.org/markup-compatibility/2006">
-          <mc:Choice xmlns:a14="http://schemas.microsoft.com/office/drawing/2010/main" Requires="a14">
-            <p:sp>
-              <p:nvSpPr>
-                <p:cNvPr id="55" name="Rectangle: Rounded Corners 54">
-                  <a:extLst>
-                    <a:ext uri="{FF2B5EF4-FFF2-40B4-BE49-F238E27FC236}">
-                      <a16:creationId xmlns:a16="http://schemas.microsoft.com/office/drawing/2014/main" id="{14D21E38-2E5A-0DD9-4527-7A91D1AFDBBA}"/>
-                    </a:ext>
-                  </a:extLst>
-                </p:cNvPr>
-                <p:cNvSpPr/>
-                <p:nvPr/>
-              </p:nvSpPr>
-              <p:spPr>
-                <a:xfrm>
-                  <a:off x="8610600" y="4396010"/>
-                  <a:ext cx="1473200" cy="416528"/>
-                </a:xfrm>
-                <a:prstGeom prst="roundRect">
-                  <a:avLst/>
-                </a:prstGeom>
-              </p:spPr>
-              <p:style>
-                <a:lnRef idx="2">
-                  <a:schemeClr val="accent1"/>
-                </a:lnRef>
-                <a:fillRef idx="1">
-                  <a:schemeClr val="lt1"/>
-                </a:fillRef>
-                <a:effectRef idx="0">
-                  <a:schemeClr val="accent1"/>
-                </a:effectRef>
-                <a:fontRef idx="minor">
-                  <a:schemeClr val="dk1"/>
-                </a:fontRef>
-              </p:style>
-              <p:txBody>
-                <a:bodyPr rtlCol="0" anchor="t"/>
-                <a:lstStyle/>
-                <a:p>
-                  <a:pPr algn="ctr"/>
-                  <a14:m>
-                    <m:oMathPara xmlns:m="http://schemas.openxmlformats.org/officeDocument/2006/math">
-                      <m:oMathParaPr>
-                        <m:jc m:val="centerGroup"/>
-                      </m:oMathParaPr>
-                      <m:oMath xmlns:m="http://schemas.openxmlformats.org/officeDocument/2006/math">
-                        <m:sSub>
-                          <m:sSubPr>
-                            <m:ctrlPr>
-                              <a:rPr lang="en-IE" b="0" i="1" smtClean="0">
-                                <a:solidFill>
-                                  <a:schemeClr val="accent1"/>
-                                </a:solidFill>
-                                <a:latin typeface="Cambria Math" panose="02040503050406030204" pitchFamily="18" charset="0"/>
-                              </a:rPr>
-                            </m:ctrlPr>
-                          </m:sSubPr>
-                          <m:e>
-                            <m:r>
-                              <a:rPr lang="en-IE" b="0" i="1" smtClean="0">
-                                <a:solidFill>
-                                  <a:schemeClr val="accent1"/>
-                                </a:solidFill>
-                                <a:latin typeface="Cambria Math" panose="02040503050406030204" pitchFamily="18" charset="0"/>
-                              </a:rPr>
-                              <m:t>𝜂</m:t>
-                            </m:r>
-                          </m:e>
-                          <m:sub>
-                            <m:r>
-                              <a:rPr lang="en-IE" b="0" i="1" smtClean="0">
-                                <a:solidFill>
-                                  <a:schemeClr val="accent1"/>
-                                </a:solidFill>
-                                <a:latin typeface="Cambria Math" panose="02040503050406030204" pitchFamily="18" charset="0"/>
-                              </a:rPr>
-                              <m:t>𝑟𝑐𝑣</m:t>
-                            </m:r>
-                          </m:sub>
-                        </m:sSub>
-                      </m:oMath>
-                    </m:oMathPara>
-                  </a14:m>
-                  <a:endParaRPr lang="en-IE" b="0" dirty="0">
-                    <a:solidFill>
-                      <a:schemeClr val="accent1"/>
-                    </a:solidFill>
-                  </a:endParaRPr>
-                </a:p>
-                <a:p>
-                  <a:pPr algn="ctr"/>
-                  <a:endParaRPr lang="en-IE" dirty="0">
-                    <a:solidFill>
-                      <a:schemeClr val="accent1"/>
-                    </a:solidFill>
-                  </a:endParaRPr>
-                </a:p>
-              </p:txBody>
-            </p:sp>
-          </mc:Choice>
-          <mc:Fallback>
-            <p:sp>
-              <p:nvSpPr>
-                <p:cNvPr id="55" name="Rectangle: Rounded Corners 54">
-                  <a:extLst>
-                    <a:ext uri="{FF2B5EF4-FFF2-40B4-BE49-F238E27FC236}">
-                      <a16:creationId xmlns:a16="http://schemas.microsoft.com/office/drawing/2014/main" id="{14D21E38-2E5A-0DD9-4527-7A91D1AFDBBA}"/>
-                    </a:ext>
-                  </a:extLst>
-                </p:cNvPr>
-                <p:cNvSpPr>
-                  <a:spLocks noRot="1" noChangeAspect="1" noMove="1" noResize="1" noEditPoints="1" noAdjustHandles="1" noChangeArrowheads="1" noChangeShapeType="1" noTextEdit="1"/>
-                </p:cNvSpPr>
-                <p:nvPr/>
-              </p:nvSpPr>
-              <p:spPr>
-                <a:xfrm>
-                  <a:off x="8610600" y="4396010"/>
-                  <a:ext cx="1473200" cy="416528"/>
-                </a:xfrm>
-                <a:prstGeom prst="roundRect">
-                  <a:avLst/>
-                </a:prstGeom>
-                <a:blipFill>
-                  <a:blip r:embed="rId3"/>
-                  <a:stretch>
-                    <a:fillRect b="-4545"/>
-                  </a:stretch>
-                </a:blipFill>
-              </p:spPr>
-              <p:txBody>
-                <a:bodyPr/>
-                <a:lstStyle/>
-                <a:p>
-                  <a:r>
-                    <a:rPr lang="en-IE">
-                      <a:noFill/>
-                    </a:rPr>
-                    <a:t> </a:t>
-                  </a:r>
-                </a:p>
-              </p:txBody>
-            </p:sp>
-          </mc:Fallback>
-        </mc:AlternateContent>
-        <mc:AlternateContent xmlns:mc="http://schemas.openxmlformats.org/markup-compatibility/2006">
-          <mc:Choice xmlns:a14="http://schemas.microsoft.com/office/drawing/2010/main" Requires="a14">
-            <p:sp>
-              <p:nvSpPr>
-                <p:cNvPr id="56" name="Rectangle: Rounded Corners 55">
-                  <a:extLst>
-                    <a:ext uri="{FF2B5EF4-FFF2-40B4-BE49-F238E27FC236}">
-                      <a16:creationId xmlns:a16="http://schemas.microsoft.com/office/drawing/2014/main" id="{B613F0D6-FA92-C645-662C-7EBD537DD219}"/>
-                    </a:ext>
-                  </a:extLst>
-                </p:cNvPr>
-                <p:cNvSpPr/>
-                <p:nvPr/>
-              </p:nvSpPr>
-              <p:spPr>
-                <a:xfrm>
-                  <a:off x="8610600" y="4926785"/>
-                  <a:ext cx="1473200" cy="416528"/>
-                </a:xfrm>
-                <a:prstGeom prst="roundRect">
-                  <a:avLst/>
-                </a:prstGeom>
-              </p:spPr>
-              <p:style>
-                <a:lnRef idx="2">
-                  <a:schemeClr val="accent1"/>
-                </a:lnRef>
-                <a:fillRef idx="1">
-                  <a:schemeClr val="lt1"/>
-                </a:fillRef>
-                <a:effectRef idx="0">
-                  <a:schemeClr val="accent1"/>
-                </a:effectRef>
-                <a:fontRef idx="minor">
-                  <a:schemeClr val="dk1"/>
-                </a:fontRef>
-              </p:style>
-              <p:txBody>
-                <a:bodyPr rtlCol="0" anchor="t"/>
-                <a:lstStyle/>
-                <a:p>
-                  <a:pPr algn="ctr"/>
-                  <a14:m>
-                    <m:oMathPara xmlns:m="http://schemas.openxmlformats.org/officeDocument/2006/math">
-                      <m:oMathParaPr>
-                        <m:jc m:val="centerGroup"/>
-                      </m:oMathParaPr>
-                      <m:oMath xmlns:m="http://schemas.openxmlformats.org/officeDocument/2006/math">
-                        <m:sSub>
-                          <m:sSubPr>
-                            <m:ctrlPr>
-                              <a:rPr lang="en-IE" b="0" i="1" smtClean="0">
-                                <a:solidFill>
-                                  <a:schemeClr val="accent1"/>
-                                </a:solidFill>
-                                <a:latin typeface="Cambria Math" panose="02040503050406030204" pitchFamily="18" charset="0"/>
-                              </a:rPr>
-                            </m:ctrlPr>
-                          </m:sSubPr>
-                          <m:e>
-                            <m:r>
-                              <a:rPr lang="en-IE" b="0" i="1" smtClean="0">
-                                <a:solidFill>
-                                  <a:schemeClr val="accent1"/>
-                                </a:solidFill>
-                                <a:latin typeface="Cambria Math" panose="02040503050406030204" pitchFamily="18" charset="0"/>
-                              </a:rPr>
-                              <m:t>𝜂</m:t>
-                            </m:r>
-                          </m:e>
-                          <m:sub>
-                            <m:r>
-                              <a:rPr lang="en-IE" b="0" i="1" smtClean="0">
-                                <a:solidFill>
-                                  <a:schemeClr val="accent1"/>
-                                </a:solidFill>
-                                <a:latin typeface="Cambria Math" panose="02040503050406030204" pitchFamily="18" charset="0"/>
-                              </a:rPr>
-                              <m:t>𝑝𝑏</m:t>
-                            </m:r>
-                          </m:sub>
-                        </m:sSub>
-                      </m:oMath>
-                    </m:oMathPara>
-                  </a14:m>
-                  <a:endParaRPr lang="en-IE" b="0" dirty="0">
-                    <a:solidFill>
-                      <a:schemeClr val="accent1"/>
-                    </a:solidFill>
-                  </a:endParaRPr>
-                </a:p>
-                <a:p>
-                  <a:pPr algn="ctr"/>
-                  <a:endParaRPr lang="en-IE" dirty="0">
-                    <a:solidFill>
-                      <a:schemeClr val="accent1"/>
-                    </a:solidFill>
-                  </a:endParaRPr>
-                </a:p>
-              </p:txBody>
-            </p:sp>
-          </mc:Choice>
-          <mc:Fallback>
-            <p:sp>
-              <p:nvSpPr>
-                <p:cNvPr id="56" name="Rectangle: Rounded Corners 55">
-                  <a:extLst>
-                    <a:ext uri="{FF2B5EF4-FFF2-40B4-BE49-F238E27FC236}">
-                      <a16:creationId xmlns:a16="http://schemas.microsoft.com/office/drawing/2014/main" id="{B613F0D6-FA92-C645-662C-7EBD537DD219}"/>
-                    </a:ext>
-                  </a:extLst>
-                </p:cNvPr>
-                <p:cNvSpPr>
-                  <a:spLocks noRot="1" noChangeAspect="1" noMove="1" noResize="1" noEditPoints="1" noAdjustHandles="1" noChangeArrowheads="1" noChangeShapeType="1" noTextEdit="1"/>
-                </p:cNvSpPr>
-                <p:nvPr/>
-              </p:nvSpPr>
-              <p:spPr>
-                <a:xfrm>
-                  <a:off x="8610600" y="4926785"/>
-                  <a:ext cx="1473200" cy="416528"/>
-                </a:xfrm>
-                <a:prstGeom prst="roundRect">
-                  <a:avLst/>
-                </a:prstGeom>
-                <a:blipFill>
-                  <a:blip r:embed="rId4"/>
-                  <a:stretch>
-                    <a:fillRect b="-10606"/>
-                  </a:stretch>
-                </a:blipFill>
-              </p:spPr>
-              <p:txBody>
-                <a:bodyPr/>
-                <a:lstStyle/>
-                <a:p>
-                  <a:r>
-                    <a:rPr lang="en-IE">
-                      <a:noFill/>
-                    </a:rPr>
-                    <a:t> </a:t>
-                  </a:r>
-                </a:p>
-              </p:txBody>
-            </p:sp>
-          </mc:Fallback>
-        </mc:AlternateContent>
-        <p:sp>
-          <p:nvSpPr>
-            <p:cNvPr id="57" name="Rectangle: Rounded Corners 56">
-              <a:extLst>
-                <a:ext uri="{FF2B5EF4-FFF2-40B4-BE49-F238E27FC236}">
-                  <a16:creationId xmlns:a16="http://schemas.microsoft.com/office/drawing/2014/main" id="{146BC885-353B-5980-DF8E-8434783CBB92}"/>
-                </a:ext>
-              </a:extLst>
-            </p:cNvPr>
-            <p:cNvSpPr/>
-            <p:nvPr/>
-          </p:nvSpPr>
-          <p:spPr>
-            <a:xfrm>
-              <a:off x="8610600" y="5452257"/>
-              <a:ext cx="1473200" cy="416528"/>
-            </a:xfrm>
-            <a:prstGeom prst="roundRect">
-              <a:avLst/>
-            </a:prstGeom>
-          </p:spPr>
-          <p:style>
-            <a:lnRef idx="2">
-              <a:schemeClr val="accent1"/>
-            </a:lnRef>
-            <a:fillRef idx="1">
-              <a:schemeClr val="lt1"/>
-            </a:fillRef>
-            <a:effectRef idx="0">
-              <a:schemeClr val="accent1"/>
-            </a:effectRef>
-            <a:fontRef idx="minor">
-              <a:schemeClr val="dk1"/>
-            </a:fontRef>
-          </p:style>
-          <p:txBody>
-            <a:bodyPr rtlCol="0" anchor="t"/>
-            <a:lstStyle/>
-            <a:p>
-              <a:pPr algn="ctr"/>
-              <a:r>
-                <a:rPr lang="en-IE" sz="1400" b="0" dirty="0">
-                  <a:solidFill>
-                    <a:schemeClr val="accent1"/>
-                  </a:solidFill>
-                </a:rPr>
-                <a:t>Dispatch</a:t>
-              </a:r>
-              <a:endParaRPr lang="en-IE" b="0" dirty="0">
-                <a:solidFill>
-                  <a:schemeClr val="accent1"/>
-                </a:solidFill>
-              </a:endParaRPr>
-            </a:p>
-            <a:p>
-              <a:pPr algn="ctr"/>
-              <a:endParaRPr lang="en-IE" dirty="0">
-                <a:solidFill>
-                  <a:schemeClr val="accent1"/>
-                </a:solidFill>
-              </a:endParaRPr>
-            </a:p>
-          </p:txBody>
-        </p:sp>
-      </p:grpSp>
+              <a:t>py</a:t>
+            </a:r>
+            <a:r>
+              <a:rPr lang="en-US" noProof="1"/>
+              <a:t> (0.6.0) architecture</a:t>
+            </a:r>
+            <a:endParaRPr lang="en-US" noProof="1">
+              <a:solidFill>
+                <a:schemeClr val="accent5"/>
+              </a:solidFill>
+            </a:endParaRPr>
+          </a:p>
+        </p:txBody>
+      </p:sp>
     </p:spTree>
     <p:extLst>
       <p:ext uri="{BB962C8B-B14F-4D97-AF65-F5344CB8AC3E}">
-        <p14:creationId xmlns:p14="http://schemas.microsoft.com/office/powerpoint/2010/main" val="1238632186"/>
+        <p14:creationId xmlns:p14="http://schemas.microsoft.com/office/powerpoint/2010/main" val="2222423162"/>
       </p:ext>
     </p:extLst>
   </p:cSld>
@@ -7084,6 +6880,729 @@
 </file>
 
 <file path=ppt/slides/slide6.xml><?xml version="1.0" encoding="utf-8"?>
+<p:sld xmlns:a="http://schemas.openxmlformats.org/drawingml/2006/main" xmlns:r="http://schemas.openxmlformats.org/officeDocument/2006/relationships" xmlns:p="http://schemas.openxmlformats.org/presentationml/2006/main">
+  <p:cSld>
+    <p:spTree>
+      <p:nvGrpSpPr>
+        <p:cNvPr id="1" name="">
+          <a:extLst>
+            <a:ext uri="{FF2B5EF4-FFF2-40B4-BE49-F238E27FC236}">
+              <a16:creationId xmlns:a16="http://schemas.microsoft.com/office/drawing/2014/main" id="{194B623F-3908-5345-1CFC-7107400D233A}"/>
+            </a:ext>
+          </a:extLst>
+        </p:cNvPr>
+        <p:cNvGrpSpPr/>
+        <p:nvPr/>
+      </p:nvGrpSpPr>
+      <p:grpSpPr>
+        <a:xfrm>
+          <a:off x="0" y="0"/>
+          <a:ext cx="0" cy="0"/>
+          <a:chOff x="0" y="0"/>
+          <a:chExt cx="0" cy="0"/>
+        </a:xfrm>
+      </p:grpSpPr>
+      <p:sp>
+        <p:nvSpPr>
+          <p:cNvPr id="2" name="Title 1">
+            <a:extLst>
+              <a:ext uri="{FF2B5EF4-FFF2-40B4-BE49-F238E27FC236}">
+                <a16:creationId xmlns:a16="http://schemas.microsoft.com/office/drawing/2014/main" id="{4E02BAFB-7D63-988E-0FBE-AED8B5A9D9AB}"/>
+              </a:ext>
+            </a:extLst>
+          </p:cNvPr>
+          <p:cNvSpPr>
+            <a:spLocks noGrp="1"/>
+          </p:cNvSpPr>
+          <p:nvPr>
+            <p:ph type="title"/>
+          </p:nvPr>
+        </p:nvSpPr>
+        <p:spPr/>
+        <p:txBody>
+          <a:bodyPr/>
+          <a:lstStyle/>
+          <a:p>
+            <a:r>
+              <a:rPr lang="en-US" noProof="1">
+                <a:solidFill>
+                  <a:srgbClr val="FFCC99"/>
+                </a:solidFill>
+              </a:rPr>
+              <a:t>antu</a:t>
+            </a:r>
+            <a:r>
+              <a:rPr lang="en-US" noProof="1">
+                <a:solidFill>
+                  <a:schemeClr val="accent5"/>
+                </a:solidFill>
+              </a:rPr>
+              <a:t>py</a:t>
+            </a:r>
+            <a:r>
+              <a:rPr lang="en-US" noProof="1"/>
+              <a:t>: core classes</a:t>
+            </a:r>
+          </a:p>
+        </p:txBody>
+      </p:sp>
+      <p:sp>
+        <p:nvSpPr>
+          <p:cNvPr id="3" name="Content Placeholder 2">
+            <a:extLst>
+              <a:ext uri="{FF2B5EF4-FFF2-40B4-BE49-F238E27FC236}">
+                <a16:creationId xmlns:a16="http://schemas.microsoft.com/office/drawing/2014/main" id="{21A33A9E-3977-B6B6-DDBD-9E32F73C1543}"/>
+              </a:ext>
+            </a:extLst>
+          </p:cNvPr>
+          <p:cNvSpPr>
+            <a:spLocks noGrp="1"/>
+          </p:cNvSpPr>
+          <p:nvPr>
+            <p:ph idx="1"/>
+          </p:nvPr>
+        </p:nvSpPr>
+        <p:spPr>
+          <a:xfrm>
+            <a:off x="838200" y="1825624"/>
+            <a:ext cx="5415116" cy="4938969"/>
+          </a:xfrm>
+        </p:spPr>
+        <p:txBody>
+          <a:bodyPr>
+            <a:normAutofit/>
+          </a:bodyPr>
+          <a:lstStyle/>
+          <a:p>
+            <a:r>
+              <a:rPr lang="en-US" noProof="1"/>
+              <a:t>Var:</a:t>
+            </a:r>
+          </a:p>
+        </p:txBody>
+      </p:sp>
+      <p:pic>
+        <p:nvPicPr>
+          <p:cNvPr id="4" name="Picture 3">
+            <a:extLst>
+              <a:ext uri="{FF2B5EF4-FFF2-40B4-BE49-F238E27FC236}">
+                <a16:creationId xmlns:a16="http://schemas.microsoft.com/office/drawing/2014/main" id="{47D30EB4-D4E6-B71B-11E2-4C0214CE9489}"/>
+              </a:ext>
+            </a:extLst>
+          </p:cNvPr>
+          <p:cNvPicPr>
+            <a:picLocks noChangeAspect="1"/>
+          </p:cNvPicPr>
+          <p:nvPr/>
+        </p:nvPicPr>
+        <p:blipFill>
+          <a:blip r:embed="rId2"/>
+          <a:stretch>
+            <a:fillRect/>
+          </a:stretch>
+        </p:blipFill>
+        <p:spPr>
+          <a:xfrm rot="10800000">
+            <a:off x="629262" y="2618571"/>
+            <a:ext cx="4821029" cy="3353074"/>
+          </a:xfrm>
+          <a:prstGeom prst="rect">
+            <a:avLst/>
+          </a:prstGeom>
+        </p:spPr>
+      </p:pic>
+      <p:sp>
+        <p:nvSpPr>
+          <p:cNvPr id="5" name="Content Placeholder 2">
+            <a:extLst>
+              <a:ext uri="{FF2B5EF4-FFF2-40B4-BE49-F238E27FC236}">
+                <a16:creationId xmlns:a16="http://schemas.microsoft.com/office/drawing/2014/main" id="{6D6609AF-E7DE-8F46-3972-FD685D345BF5}"/>
+              </a:ext>
+            </a:extLst>
+          </p:cNvPr>
+          <p:cNvSpPr txBox="1">
+            <a:spLocks/>
+          </p:cNvSpPr>
+          <p:nvPr/>
+        </p:nvSpPr>
+        <p:spPr>
+          <a:xfrm>
+            <a:off x="6349181" y="1825623"/>
+            <a:ext cx="5415116" cy="4938969"/>
+          </a:xfrm>
+          <a:prstGeom prst="rect">
+            <a:avLst/>
+          </a:prstGeom>
+        </p:spPr>
+        <p:txBody>
+          <a:bodyPr vert="horz" lIns="91440" tIns="45720" rIns="91440" bIns="45720" rtlCol="0">
+            <a:normAutofit/>
+          </a:bodyPr>
+          <a:lstStyle>
+            <a:lvl1pPr marL="228600" indent="-228600" algn="l" defTabSz="914400" rtl="0" eaLnBrk="1" latinLnBrk="0" hangingPunct="1">
+              <a:lnSpc>
+                <a:spcPct val="90000"/>
+              </a:lnSpc>
+              <a:spcBef>
+                <a:spcPts val="1000"/>
+              </a:spcBef>
+              <a:buFont typeface="Arial" panose="020B0604020202020204" pitchFamily="34" charset="0"/>
+              <a:buChar char="•"/>
+              <a:defRPr sz="2800" kern="1200">
+                <a:solidFill>
+                  <a:schemeClr val="tx1"/>
+                </a:solidFill>
+                <a:latin typeface="+mn-lt"/>
+                <a:ea typeface="+mn-ea"/>
+                <a:cs typeface="+mn-cs"/>
+              </a:defRPr>
+            </a:lvl1pPr>
+            <a:lvl2pPr marL="685800" indent="-228600" algn="l" defTabSz="914400" rtl="0" eaLnBrk="1" latinLnBrk="0" hangingPunct="1">
+              <a:lnSpc>
+                <a:spcPct val="90000"/>
+              </a:lnSpc>
+              <a:spcBef>
+                <a:spcPts val="500"/>
+              </a:spcBef>
+              <a:buFont typeface="Arial" panose="020B0604020202020204" pitchFamily="34" charset="0"/>
+              <a:buChar char="•"/>
+              <a:defRPr sz="2400" kern="1200">
+                <a:solidFill>
+                  <a:schemeClr val="tx1"/>
+                </a:solidFill>
+                <a:latin typeface="+mn-lt"/>
+                <a:ea typeface="+mn-ea"/>
+                <a:cs typeface="+mn-cs"/>
+              </a:defRPr>
+            </a:lvl2pPr>
+            <a:lvl3pPr marL="1143000" indent="-228600" algn="l" defTabSz="914400" rtl="0" eaLnBrk="1" latinLnBrk="0" hangingPunct="1">
+              <a:lnSpc>
+                <a:spcPct val="90000"/>
+              </a:lnSpc>
+              <a:spcBef>
+                <a:spcPts val="500"/>
+              </a:spcBef>
+              <a:buFont typeface="Arial" panose="020B0604020202020204" pitchFamily="34" charset="0"/>
+              <a:buChar char="•"/>
+              <a:defRPr sz="2000" kern="1200">
+                <a:solidFill>
+                  <a:schemeClr val="tx1"/>
+                </a:solidFill>
+                <a:latin typeface="+mn-lt"/>
+                <a:ea typeface="+mn-ea"/>
+                <a:cs typeface="+mn-cs"/>
+              </a:defRPr>
+            </a:lvl3pPr>
+            <a:lvl4pPr marL="1600200" indent="-228600" algn="l" defTabSz="914400" rtl="0" eaLnBrk="1" latinLnBrk="0" hangingPunct="1">
+              <a:lnSpc>
+                <a:spcPct val="90000"/>
+              </a:lnSpc>
+              <a:spcBef>
+                <a:spcPts val="500"/>
+              </a:spcBef>
+              <a:buFont typeface="Arial" panose="020B0604020202020204" pitchFamily="34" charset="0"/>
+              <a:buChar char="•"/>
+              <a:defRPr sz="1800" kern="1200">
+                <a:solidFill>
+                  <a:schemeClr val="tx1"/>
+                </a:solidFill>
+                <a:latin typeface="+mn-lt"/>
+                <a:ea typeface="+mn-ea"/>
+                <a:cs typeface="+mn-cs"/>
+              </a:defRPr>
+            </a:lvl4pPr>
+            <a:lvl5pPr marL="2057400" indent="-228600" algn="l" defTabSz="914400" rtl="0" eaLnBrk="1" latinLnBrk="0" hangingPunct="1">
+              <a:lnSpc>
+                <a:spcPct val="90000"/>
+              </a:lnSpc>
+              <a:spcBef>
+                <a:spcPts val="500"/>
+              </a:spcBef>
+              <a:buFont typeface="Arial" panose="020B0604020202020204" pitchFamily="34" charset="0"/>
+              <a:buChar char="•"/>
+              <a:defRPr sz="1800" kern="1200">
+                <a:solidFill>
+                  <a:schemeClr val="tx1"/>
+                </a:solidFill>
+                <a:latin typeface="+mn-lt"/>
+                <a:ea typeface="+mn-ea"/>
+                <a:cs typeface="+mn-cs"/>
+              </a:defRPr>
+            </a:lvl5pPr>
+            <a:lvl6pPr marL="2514600" indent="-228600" algn="l" defTabSz="914400" rtl="0" eaLnBrk="1" latinLnBrk="0" hangingPunct="1">
+              <a:lnSpc>
+                <a:spcPct val="90000"/>
+              </a:lnSpc>
+              <a:spcBef>
+                <a:spcPts val="500"/>
+              </a:spcBef>
+              <a:buFont typeface="Arial" panose="020B0604020202020204" pitchFamily="34" charset="0"/>
+              <a:buChar char="•"/>
+              <a:defRPr sz="1800" kern="1200">
+                <a:solidFill>
+                  <a:schemeClr val="tx1"/>
+                </a:solidFill>
+                <a:latin typeface="+mn-lt"/>
+                <a:ea typeface="+mn-ea"/>
+                <a:cs typeface="+mn-cs"/>
+              </a:defRPr>
+            </a:lvl6pPr>
+            <a:lvl7pPr marL="2971800" indent="-228600" algn="l" defTabSz="914400" rtl="0" eaLnBrk="1" latinLnBrk="0" hangingPunct="1">
+              <a:lnSpc>
+                <a:spcPct val="90000"/>
+              </a:lnSpc>
+              <a:spcBef>
+                <a:spcPts val="500"/>
+              </a:spcBef>
+              <a:buFont typeface="Arial" panose="020B0604020202020204" pitchFamily="34" charset="0"/>
+              <a:buChar char="•"/>
+              <a:defRPr sz="1800" kern="1200">
+                <a:solidFill>
+                  <a:schemeClr val="tx1"/>
+                </a:solidFill>
+                <a:latin typeface="+mn-lt"/>
+                <a:ea typeface="+mn-ea"/>
+                <a:cs typeface="+mn-cs"/>
+              </a:defRPr>
+            </a:lvl7pPr>
+            <a:lvl8pPr marL="3429000" indent="-228600" algn="l" defTabSz="914400" rtl="0" eaLnBrk="1" latinLnBrk="0" hangingPunct="1">
+              <a:lnSpc>
+                <a:spcPct val="90000"/>
+              </a:lnSpc>
+              <a:spcBef>
+                <a:spcPts val="500"/>
+              </a:spcBef>
+              <a:buFont typeface="Arial" panose="020B0604020202020204" pitchFamily="34" charset="0"/>
+              <a:buChar char="•"/>
+              <a:defRPr sz="1800" kern="1200">
+                <a:solidFill>
+                  <a:schemeClr val="tx1"/>
+                </a:solidFill>
+                <a:latin typeface="+mn-lt"/>
+                <a:ea typeface="+mn-ea"/>
+                <a:cs typeface="+mn-cs"/>
+              </a:defRPr>
+            </a:lvl8pPr>
+            <a:lvl9pPr marL="3886200" indent="-228600" algn="l" defTabSz="914400" rtl="0" eaLnBrk="1" latinLnBrk="0" hangingPunct="1">
+              <a:lnSpc>
+                <a:spcPct val="90000"/>
+              </a:lnSpc>
+              <a:spcBef>
+                <a:spcPts val="500"/>
+              </a:spcBef>
+              <a:buFont typeface="Arial" panose="020B0604020202020204" pitchFamily="34" charset="0"/>
+              <a:buChar char="•"/>
+              <a:defRPr sz="1800" kern="1200">
+                <a:solidFill>
+                  <a:schemeClr val="tx1"/>
+                </a:solidFill>
+                <a:latin typeface="+mn-lt"/>
+                <a:ea typeface="+mn-ea"/>
+                <a:cs typeface="+mn-cs"/>
+              </a:defRPr>
+            </a:lvl9pPr>
+          </a:lstStyle>
+          <a:p>
+            <a:r>
+              <a:rPr lang="en-US" noProof="1"/>
+              <a:t>Array:</a:t>
+            </a:r>
+          </a:p>
+        </p:txBody>
+      </p:sp>
+      <p:pic>
+        <p:nvPicPr>
+          <p:cNvPr id="6" name="Picture 5">
+            <a:extLst>
+              <a:ext uri="{FF2B5EF4-FFF2-40B4-BE49-F238E27FC236}">
+                <a16:creationId xmlns:a16="http://schemas.microsoft.com/office/drawing/2014/main" id="{985D1D4D-BBB1-CF2B-3648-DC3162CB0BEC}"/>
+              </a:ext>
+            </a:extLst>
+          </p:cNvPr>
+          <p:cNvPicPr>
+            <a:picLocks noChangeAspect="1"/>
+          </p:cNvPicPr>
+          <p:nvPr/>
+        </p:nvPicPr>
+        <p:blipFill>
+          <a:blip r:embed="rId2"/>
+          <a:stretch>
+            <a:fillRect/>
+          </a:stretch>
+        </p:blipFill>
+        <p:spPr>
+          <a:xfrm rot="10800000">
+            <a:off x="6349181" y="2618570"/>
+            <a:ext cx="4821029" cy="3353074"/>
+          </a:xfrm>
+          <a:prstGeom prst="rect">
+            <a:avLst/>
+          </a:prstGeom>
+        </p:spPr>
+      </p:pic>
+    </p:spTree>
+    <p:extLst>
+      <p:ext uri="{BB962C8B-B14F-4D97-AF65-F5344CB8AC3E}">
+        <p14:creationId xmlns:p14="http://schemas.microsoft.com/office/powerpoint/2010/main" val="868917941"/>
+      </p:ext>
+    </p:extLst>
+  </p:cSld>
+  <p:clrMapOvr>
+    <a:masterClrMapping/>
+  </p:clrMapOvr>
+</p:sld>
+</file>
+
+<file path=ppt/slides/slide7.xml><?xml version="1.0" encoding="utf-8"?>
+<p:sld xmlns:a="http://schemas.openxmlformats.org/drawingml/2006/main" xmlns:r="http://schemas.openxmlformats.org/officeDocument/2006/relationships" xmlns:p="http://schemas.openxmlformats.org/presentationml/2006/main">
+  <p:cSld>
+    <p:spTree>
+      <p:nvGrpSpPr>
+        <p:cNvPr id="1" name="">
+          <a:extLst>
+            <a:ext uri="{FF2B5EF4-FFF2-40B4-BE49-F238E27FC236}">
+              <a16:creationId xmlns:a16="http://schemas.microsoft.com/office/drawing/2014/main" id="{7D4861F1-D80F-4BAF-22AC-B455C1EFE7C0}"/>
+            </a:ext>
+          </a:extLst>
+        </p:cNvPr>
+        <p:cNvGrpSpPr/>
+        <p:nvPr/>
+      </p:nvGrpSpPr>
+      <p:grpSpPr>
+        <a:xfrm>
+          <a:off x="0" y="0"/>
+          <a:ext cx="0" cy="0"/>
+          <a:chOff x="0" y="0"/>
+          <a:chExt cx="0" cy="0"/>
+        </a:xfrm>
+      </p:grpSpPr>
+      <p:sp>
+        <p:nvSpPr>
+          <p:cNvPr id="2" name="Title 1">
+            <a:extLst>
+              <a:ext uri="{FF2B5EF4-FFF2-40B4-BE49-F238E27FC236}">
+                <a16:creationId xmlns:a16="http://schemas.microsoft.com/office/drawing/2014/main" id="{26789637-E0A8-AF14-CEBA-AD4AA0982057}"/>
+              </a:ext>
+            </a:extLst>
+          </p:cNvPr>
+          <p:cNvSpPr>
+            <a:spLocks noGrp="1"/>
+          </p:cNvSpPr>
+          <p:nvPr>
+            <p:ph type="title"/>
+          </p:nvPr>
+        </p:nvSpPr>
+        <p:spPr/>
+        <p:txBody>
+          <a:bodyPr/>
+          <a:lstStyle/>
+          <a:p>
+            <a:r>
+              <a:rPr lang="en-US" noProof="1">
+                <a:solidFill>
+                  <a:srgbClr val="FFCC99"/>
+                </a:solidFill>
+              </a:rPr>
+              <a:t>antu</a:t>
+            </a:r>
+            <a:r>
+              <a:rPr lang="en-US" noProof="1">
+                <a:solidFill>
+                  <a:schemeClr val="accent5"/>
+                </a:solidFill>
+              </a:rPr>
+              <a:t>py</a:t>
+            </a:r>
+            <a:r>
+              <a:rPr lang="en-US" noProof="1"/>
+              <a:t>: utils</a:t>
+            </a:r>
+          </a:p>
+        </p:txBody>
+      </p:sp>
+      <p:sp>
+        <p:nvSpPr>
+          <p:cNvPr id="3" name="Content Placeholder 2">
+            <a:extLst>
+              <a:ext uri="{FF2B5EF4-FFF2-40B4-BE49-F238E27FC236}">
+                <a16:creationId xmlns:a16="http://schemas.microsoft.com/office/drawing/2014/main" id="{D51D7928-E581-942E-A82D-983FBDB734AF}"/>
+              </a:ext>
+            </a:extLst>
+          </p:cNvPr>
+          <p:cNvSpPr>
+            <a:spLocks noGrp="1"/>
+          </p:cNvSpPr>
+          <p:nvPr>
+            <p:ph idx="1"/>
+          </p:nvPr>
+        </p:nvSpPr>
+        <p:spPr>
+          <a:xfrm>
+            <a:off x="838200" y="1825624"/>
+            <a:ext cx="10515600" cy="4938969"/>
+          </a:xfrm>
+        </p:spPr>
+        <p:txBody>
+          <a:bodyPr>
+            <a:normAutofit/>
+          </a:bodyPr>
+          <a:lstStyle/>
+          <a:p>
+            <a:r>
+              <a:rPr lang="en-US" noProof="1"/>
+              <a:t>props:</a:t>
+            </a:r>
+          </a:p>
+          <a:p>
+            <a:endParaRPr lang="en-US" noProof="1"/>
+          </a:p>
+          <a:p>
+            <a:r>
+              <a:rPr lang="en-US" noProof="1"/>
+              <a:t>htc:</a:t>
+            </a:r>
+          </a:p>
+          <a:p>
+            <a:endParaRPr lang="en-US" noProof="1"/>
+          </a:p>
+          <a:p>
+            <a:r>
+              <a:rPr lang="en-US" noProof="1"/>
+              <a:t>solar:</a:t>
+            </a:r>
+          </a:p>
+        </p:txBody>
+      </p:sp>
+      <p:pic>
+        <p:nvPicPr>
+          <p:cNvPr id="4" name="Picture 3">
+            <a:extLst>
+              <a:ext uri="{FF2B5EF4-FFF2-40B4-BE49-F238E27FC236}">
+                <a16:creationId xmlns:a16="http://schemas.microsoft.com/office/drawing/2014/main" id="{5A2CFC2D-9995-7525-4ACF-E59828CA12E2}"/>
+              </a:ext>
+            </a:extLst>
+          </p:cNvPr>
+          <p:cNvPicPr>
+            <a:picLocks noChangeAspect="1"/>
+          </p:cNvPicPr>
+          <p:nvPr/>
+        </p:nvPicPr>
+        <p:blipFill>
+          <a:blip r:embed="rId2"/>
+          <a:stretch>
+            <a:fillRect/>
+          </a:stretch>
+        </p:blipFill>
+        <p:spPr>
+          <a:xfrm rot="10800000">
+            <a:off x="3215149" y="1690688"/>
+            <a:ext cx="6518787" cy="4123575"/>
+          </a:xfrm>
+          <a:prstGeom prst="rect">
+            <a:avLst/>
+          </a:prstGeom>
+        </p:spPr>
+      </p:pic>
+    </p:spTree>
+    <p:extLst>
+      <p:ext uri="{BB962C8B-B14F-4D97-AF65-F5344CB8AC3E}">
+        <p14:creationId xmlns:p14="http://schemas.microsoft.com/office/powerpoint/2010/main" val="2280533424"/>
+      </p:ext>
+    </p:extLst>
+  </p:cSld>
+  <p:clrMapOvr>
+    <a:masterClrMapping/>
+  </p:clrMapOvr>
+</p:sld>
+</file>
+
+<file path=ppt/slides/slide8.xml><?xml version="1.0" encoding="utf-8"?>
+<p:sld xmlns:a="http://schemas.openxmlformats.org/drawingml/2006/main" xmlns:r="http://schemas.openxmlformats.org/officeDocument/2006/relationships" xmlns:p="http://schemas.openxmlformats.org/presentationml/2006/main">
+  <p:cSld>
+    <p:spTree>
+      <p:nvGrpSpPr>
+        <p:cNvPr id="1" name="">
+          <a:extLst>
+            <a:ext uri="{FF2B5EF4-FFF2-40B4-BE49-F238E27FC236}">
+              <a16:creationId xmlns:a16="http://schemas.microsoft.com/office/drawing/2014/main" id="{75D52DF1-97D5-E358-540D-D39FCDD67671}"/>
+            </a:ext>
+          </a:extLst>
+        </p:cNvPr>
+        <p:cNvGrpSpPr/>
+        <p:nvPr/>
+      </p:nvGrpSpPr>
+      <p:grpSpPr>
+        <a:xfrm>
+          <a:off x="0" y="0"/>
+          <a:ext cx="0" cy="0"/>
+          <a:chOff x="0" y="0"/>
+          <a:chExt cx="0" cy="0"/>
+        </a:xfrm>
+      </p:grpSpPr>
+      <p:sp>
+        <p:nvSpPr>
+          <p:cNvPr id="2" name="Title 1">
+            <a:extLst>
+              <a:ext uri="{FF2B5EF4-FFF2-40B4-BE49-F238E27FC236}">
+                <a16:creationId xmlns:a16="http://schemas.microsoft.com/office/drawing/2014/main" id="{7077760E-04BF-4DB3-523C-3CF244F430E0}"/>
+              </a:ext>
+            </a:extLst>
+          </p:cNvPr>
+          <p:cNvSpPr>
+            <a:spLocks noGrp="1"/>
+          </p:cNvSpPr>
+          <p:nvPr>
+            <p:ph type="title"/>
+          </p:nvPr>
+        </p:nvSpPr>
+        <p:spPr/>
+        <p:txBody>
+          <a:bodyPr/>
+          <a:lstStyle/>
+          <a:p>
+            <a:r>
+              <a:rPr lang="en-US" noProof="1">
+                <a:solidFill>
+                  <a:srgbClr val="FFCC99"/>
+                </a:solidFill>
+              </a:rPr>
+              <a:t>antu</a:t>
+            </a:r>
+            <a:r>
+              <a:rPr lang="en-US" noProof="1">
+                <a:solidFill>
+                  <a:schemeClr val="accent5"/>
+                </a:solidFill>
+              </a:rPr>
+              <a:t>py</a:t>
+            </a:r>
+            <a:r>
+              <a:rPr lang="en-US" noProof="1"/>
+              <a:t>: simulations</a:t>
+            </a:r>
+          </a:p>
+        </p:txBody>
+      </p:sp>
+      <p:sp>
+        <p:nvSpPr>
+          <p:cNvPr id="3" name="Content Placeholder 2">
+            <a:extLst>
+              <a:ext uri="{FF2B5EF4-FFF2-40B4-BE49-F238E27FC236}">
+                <a16:creationId xmlns:a16="http://schemas.microsoft.com/office/drawing/2014/main" id="{CD7BE949-9E31-1B26-FE53-2279E68497FD}"/>
+              </a:ext>
+            </a:extLst>
+          </p:cNvPr>
+          <p:cNvSpPr>
+            <a:spLocks noGrp="1"/>
+          </p:cNvSpPr>
+          <p:nvPr>
+            <p:ph idx="1"/>
+          </p:nvPr>
+        </p:nvSpPr>
+        <p:spPr>
+          <a:xfrm>
+            <a:off x="838200" y="1825624"/>
+            <a:ext cx="10515600" cy="4938969"/>
+          </a:xfrm>
+        </p:spPr>
+        <p:txBody>
+          <a:bodyPr>
+            <a:normAutofit/>
+          </a:bodyPr>
+          <a:lstStyle/>
+          <a:p>
+            <a:r>
+              <a:rPr lang="en-US" noProof="1"/>
+              <a:t>Model:</a:t>
+            </a:r>
+          </a:p>
+          <a:p>
+            <a:endParaRPr lang="en-US" noProof="1"/>
+          </a:p>
+          <a:p>
+            <a:r>
+              <a:rPr lang="en-US" noProof="1"/>
+              <a:t>Plant:</a:t>
+            </a:r>
+          </a:p>
+          <a:p>
+            <a:endParaRPr lang="en-US" noProof="1"/>
+          </a:p>
+          <a:p>
+            <a:r>
+              <a:rPr lang="en-US" noProof="1"/>
+              <a:t>Parametric:</a:t>
+            </a:r>
+          </a:p>
+          <a:p>
+            <a:endParaRPr lang="en-US" noProof="1"/>
+          </a:p>
+          <a:p>
+            <a:r>
+              <a:rPr lang="en-US" noProof="1"/>
+              <a:t>TSGs:</a:t>
+            </a:r>
+          </a:p>
+          <a:p>
+            <a:pPr lvl="1"/>
+            <a:r>
+              <a:rPr lang="en-US" noProof="1"/>
+              <a:t>Weather</a:t>
+            </a:r>
+          </a:p>
+          <a:p>
+            <a:pPr lvl="1"/>
+            <a:r>
+              <a:rPr lang="en-US" noProof="1"/>
+              <a:t>Market</a:t>
+            </a:r>
+          </a:p>
+        </p:txBody>
+      </p:sp>
+      <p:pic>
+        <p:nvPicPr>
+          <p:cNvPr id="4" name="Picture 3">
+            <a:extLst>
+              <a:ext uri="{FF2B5EF4-FFF2-40B4-BE49-F238E27FC236}">
+                <a16:creationId xmlns:a16="http://schemas.microsoft.com/office/drawing/2014/main" id="{7AF8436E-1049-7EE0-3FC8-F092F502FA5D}"/>
+              </a:ext>
+            </a:extLst>
+          </p:cNvPr>
+          <p:cNvPicPr>
+            <a:picLocks noChangeAspect="1"/>
+          </p:cNvPicPr>
+          <p:nvPr/>
+        </p:nvPicPr>
+        <p:blipFill>
+          <a:blip r:embed="rId2"/>
+          <a:stretch>
+            <a:fillRect/>
+          </a:stretch>
+        </p:blipFill>
+        <p:spPr>
+          <a:xfrm rot="10800000">
+            <a:off x="4080387" y="1690688"/>
+            <a:ext cx="6518787" cy="4123575"/>
+          </a:xfrm>
+          <a:prstGeom prst="rect">
+            <a:avLst/>
+          </a:prstGeom>
+        </p:spPr>
+      </p:pic>
+    </p:spTree>
+    <p:extLst>
+      <p:ext uri="{BB962C8B-B14F-4D97-AF65-F5344CB8AC3E}">
+        <p14:creationId xmlns:p14="http://schemas.microsoft.com/office/powerpoint/2010/main" val="3245015688"/>
+      </p:ext>
+    </p:extLst>
+  </p:cSld>
+  <p:clrMapOvr>
+    <a:masterClrMapping/>
+  </p:clrMapOvr>
+</p:sld>
+</file>
+
+<file path=ppt/slides/slide9.xml><?xml version="1.0" encoding="utf-8"?>
 <p:sld xmlns:a="http://schemas.openxmlformats.org/drawingml/2006/main" xmlns:r="http://schemas.openxmlformats.org/officeDocument/2006/relationships" xmlns:p="http://schemas.openxmlformats.org/presentationml/2006/main">
   <p:cSld>
     <p:spTree>
@@ -7105,7 +7624,7 @@
           <p:cNvPr id="2" name="Title 1">
             <a:extLst>
               <a:ext uri="{FF2B5EF4-FFF2-40B4-BE49-F238E27FC236}">
-                <a16:creationId xmlns:a16="http://schemas.microsoft.com/office/drawing/2014/main" id="{A402F935-7AD0-D15A-3968-91D3F935F439}"/>
+                <a16:creationId xmlns:a16="http://schemas.microsoft.com/office/drawing/2014/main" id="{EFECA099-A846-EDE8-B890-F74D8EAF00D4}"/>
               </a:ext>
             </a:extLst>
           </p:cNvPr>
@@ -7122,14 +7641,9 @@
           <a:lstStyle/>
           <a:p>
             <a:r>
-              <a:rPr lang="en-US" dirty="0" err="1"/>
-              <a:t>antupy</a:t>
-            </a:r>
-            <a:r>
-              <a:rPr lang="en-US" dirty="0"/>
-              <a:t> modules</a:t>
-            </a:r>
-            <a:endParaRPr lang="en-AU" dirty="0"/>
+              <a:rPr lang="en-US" noProof="1"/>
+              <a:t>existing implementations</a:t>
+            </a:r>
           </a:p>
         </p:txBody>
       </p:sp>
@@ -7138,7 +7652,7 @@
           <p:cNvPr id="3" name="Content Placeholder 2">
             <a:extLst>
               <a:ext uri="{FF2B5EF4-FFF2-40B4-BE49-F238E27FC236}">
-                <a16:creationId xmlns:a16="http://schemas.microsoft.com/office/drawing/2014/main" id="{BB7C6D76-08D1-11E9-67DC-F1DD43A604DC}"/>
+                <a16:creationId xmlns:a16="http://schemas.microsoft.com/office/drawing/2014/main" id="{32C7182D-00D2-76B8-E40F-3235CC62C82B}"/>
               </a:ext>
             </a:extLst>
           </p:cNvPr>
@@ -7149,456 +7663,68 @@
             <p:ph idx="1"/>
           </p:nvPr>
         </p:nvSpPr>
-        <p:spPr/>
-        <p:txBody>
-          <a:bodyPr numCol="2">
-            <a:normAutofit fontScale="92500" lnSpcReduction="20000"/>
+        <p:spPr>
+          <a:xfrm>
+            <a:off x="838200" y="1825625"/>
+            <a:ext cx="7951839" cy="4351338"/>
+          </a:xfrm>
+        </p:spPr>
+        <p:txBody>
+          <a:bodyPr vert="horz" lIns="91440" tIns="45720" rIns="91440" bIns="45720" rtlCol="0" anchor="t">
+            <a:normAutofit/>
           </a:bodyPr>
           <a:lstStyle/>
           <a:p>
-            <a:pPr lvl="1"/>
-            <a:r>
-              <a:rPr lang="en-US" dirty="0" err="1"/>
-              <a:t>analysers</a:t>
-            </a:r>
-            <a:endParaRPr lang="en-US" dirty="0"/>
-          </a:p>
-          <a:p>
-            <a:pPr lvl="2"/>
-            <a:r>
-              <a:rPr lang="en-US" dirty="0"/>
-              <a:t>parametric</a:t>
-            </a:r>
-          </a:p>
-          <a:p>
-            <a:pPr lvl="2"/>
-            <a:r>
-              <a:rPr lang="en-US" dirty="0"/>
-              <a:t>stochastic</a:t>
-            </a:r>
-          </a:p>
-          <a:p>
-            <a:pPr lvl="2"/>
-            <a:r>
-              <a:rPr lang="en-US" dirty="0"/>
-              <a:t>financial</a:t>
-            </a:r>
-          </a:p>
-          <a:p>
-            <a:pPr lvl="1"/>
-            <a:endParaRPr lang="es-CL" dirty="0"/>
-          </a:p>
-          <a:p>
-            <a:pPr lvl="1"/>
-            <a:r>
-              <a:rPr lang="es-CL" dirty="0" err="1"/>
-              <a:t>ts</a:t>
-            </a:r>
-            <a:endParaRPr lang="es-CL" dirty="0"/>
-          </a:p>
-          <a:p>
-            <a:pPr lvl="2"/>
-            <a:r>
-              <a:rPr lang="es-CL" dirty="0" err="1"/>
-              <a:t>weather</a:t>
-            </a:r>
-            <a:endParaRPr lang="es-CL" dirty="0"/>
-          </a:p>
-          <a:p>
-            <a:pPr lvl="2"/>
-            <a:r>
-              <a:rPr lang="es-CL" dirty="0" err="1"/>
-              <a:t>market</a:t>
-            </a:r>
-            <a:endParaRPr lang="es-CL" dirty="0"/>
-          </a:p>
-          <a:p>
-            <a:pPr lvl="2"/>
-            <a:r>
-              <a:rPr lang="en-US" dirty="0" err="1"/>
-              <a:t>hwd</a:t>
-            </a:r>
-            <a:endParaRPr lang="en-US" dirty="0"/>
-          </a:p>
-          <a:p>
-            <a:pPr lvl="1"/>
-            <a:endParaRPr lang="en-US" dirty="0"/>
-          </a:p>
-          <a:p>
-            <a:pPr lvl="1"/>
-            <a:r>
-              <a:rPr lang="en-US" dirty="0"/>
-              <a:t>solvers</a:t>
-            </a:r>
-          </a:p>
-          <a:p>
-            <a:pPr lvl="2"/>
-            <a:r>
-              <a:rPr lang="en-US" dirty="0" err="1"/>
-              <a:t>dwh_trnsys</a:t>
-            </a:r>
-            <a:endParaRPr lang="en-US" dirty="0"/>
-          </a:p>
-          <a:p>
-            <a:pPr lvl="2"/>
-            <a:r>
-              <a:rPr lang="en-US" dirty="0" err="1"/>
-              <a:t>pvlib</a:t>
-            </a:r>
-            <a:endParaRPr lang="en-US" dirty="0"/>
-          </a:p>
-          <a:p>
-            <a:pPr lvl="2"/>
-            <a:r>
-              <a:rPr lang="es-CL" dirty="0" err="1"/>
-              <a:t>mcrt</a:t>
-            </a:r>
-            <a:endParaRPr lang="es-CL" dirty="0"/>
-          </a:p>
-          <a:p>
-            <a:pPr lvl="2"/>
-            <a:endParaRPr lang="es-CL" dirty="0"/>
-          </a:p>
-          <a:p>
-            <a:pPr lvl="1"/>
-            <a:r>
-              <a:rPr lang="en-US" dirty="0"/>
-              <a:t>models</a:t>
-            </a:r>
-          </a:p>
-          <a:p>
-            <a:pPr lvl="2"/>
-            <a:r>
-              <a:rPr lang="en-US" dirty="0"/>
-              <a:t>biomass</a:t>
-            </a:r>
-          </a:p>
-          <a:p>
-            <a:pPr lvl="2"/>
-            <a:r>
-              <a:rPr lang="en-US" dirty="0" err="1"/>
-              <a:t>cst</a:t>
-            </a:r>
-            <a:endParaRPr lang="en-US" dirty="0"/>
-          </a:p>
-          <a:p>
-            <a:pPr lvl="2"/>
-            <a:r>
-              <a:rPr lang="en-US" dirty="0" err="1"/>
-              <a:t>dewh</a:t>
-            </a:r>
-            <a:endParaRPr lang="en-US" dirty="0"/>
-          </a:p>
-          <a:p>
-            <a:pPr lvl="2"/>
-            <a:r>
-              <a:rPr lang="en-US" dirty="0"/>
-              <a:t>desal: med, </a:t>
-            </a:r>
-            <a:r>
-              <a:rPr lang="en-US" dirty="0" err="1"/>
-              <a:t>hdh</a:t>
-            </a:r>
-            <a:endParaRPr lang="en-US" dirty="0"/>
-          </a:p>
-          <a:p>
-            <a:pPr lvl="2"/>
-            <a:r>
-              <a:rPr lang="en-US" dirty="0" err="1"/>
-              <a:t>pv</a:t>
-            </a:r>
-            <a:endParaRPr lang="en-US" dirty="0"/>
-          </a:p>
-          <a:p>
-            <a:pPr lvl="2"/>
-            <a:r>
-              <a:rPr lang="en-US" dirty="0" err="1"/>
-              <a:t>stc</a:t>
-            </a:r>
-            <a:endParaRPr lang="en-US" dirty="0"/>
-          </a:p>
-          <a:p>
-            <a:pPr lvl="2"/>
-            <a:r>
-              <a:rPr lang="en-US" dirty="0"/>
-              <a:t>storage</a:t>
-            </a:r>
-          </a:p>
-          <a:p>
-            <a:pPr lvl="2"/>
-            <a:r>
-              <a:rPr lang="en-US" dirty="0" err="1"/>
-              <a:t>tpp</a:t>
-            </a:r>
-            <a:endParaRPr lang="en-US" dirty="0"/>
-          </a:p>
-          <a:p>
-            <a:pPr lvl="1"/>
-            <a:endParaRPr lang="en-US" dirty="0"/>
-          </a:p>
-          <a:p>
-            <a:pPr lvl="2"/>
-            <a:endParaRPr lang="es-CL" dirty="0"/>
-          </a:p>
-          <a:p>
-            <a:pPr lvl="1"/>
-            <a:r>
-              <a:rPr lang="es-CL" dirty="0" err="1"/>
-              <a:t>units</a:t>
-            </a:r>
-            <a:endParaRPr lang="es-CL" dirty="0"/>
-          </a:p>
-          <a:p>
-            <a:pPr lvl="1"/>
-            <a:r>
-              <a:rPr lang="es-CL" dirty="0" err="1"/>
-              <a:t>props</a:t>
-            </a:r>
-            <a:endParaRPr lang="es-CL" dirty="0"/>
-          </a:p>
-          <a:p>
-            <a:pPr lvl="1"/>
-            <a:r>
-              <a:rPr lang="es-CL" dirty="0" err="1"/>
-              <a:t>protocols</a:t>
-            </a:r>
-            <a:endParaRPr lang="es-CL" dirty="0"/>
-          </a:p>
-          <a:p>
-            <a:pPr lvl="1"/>
-            <a:r>
-              <a:rPr lang="es-CL" dirty="0" err="1"/>
-              <a:t>location</a:t>
-            </a:r>
-            <a:endParaRPr lang="es-CL" dirty="0"/>
+            <a:r>
+              <a:rPr lang="en-US" noProof="1"/>
+              <a:t>med_fortran: desal (fortran, master’s code).</a:t>
+            </a:r>
+          </a:p>
+          <a:p>
+            <a:r>
+              <a:rPr lang="en-US" noProof="1"/>
+              <a:t>hdh (ees, usm research).</a:t>
+            </a:r>
+          </a:p>
+          <a:p>
+            <a:r>
+              <a:rPr lang="en-US" noProof="1"/>
+              <a:t>caes (ees, usm research).</a:t>
+            </a:r>
+            <a:endParaRPr lang="en-US" noProof="1">
+              <a:hlinkClick r:id="rId2"/>
+            </a:endParaRPr>
+          </a:p>
+          <a:p>
+            <a:r>
+              <a:rPr lang="en-US" noProof="1">
+                <a:hlinkClick r:id="rId2"/>
+              </a:rPr>
+              <a:t>tm_solarshift</a:t>
+            </a:r>
+            <a:r>
+              <a:rPr lang="en-US" noProof="1"/>
+              <a:t> : dewh (python/trnsys, postdoc 1).</a:t>
+            </a:r>
+          </a:p>
+          <a:p>
+            <a:r>
+              <a:rPr lang="en-US" noProof="1">
+                <a:hlinkClick r:id="rId3"/>
+              </a:rPr>
+              <a:t>bdr_csp</a:t>
+            </a:r>
+            <a:r>
+              <a:rPr lang="en-US" noProof="1"/>
+              <a:t>: csp (phd code).</a:t>
+            </a:r>
           </a:p>
         </p:txBody>
       </p:sp>
     </p:spTree>
     <p:extLst>
       <p:ext uri="{BB962C8B-B14F-4D97-AF65-F5344CB8AC3E}">
-        <p14:creationId xmlns:p14="http://schemas.microsoft.com/office/powerpoint/2010/main" val="2263721948"/>
-      </p:ext>
-    </p:extLst>
-  </p:cSld>
-  <p:clrMapOvr>
-    <a:masterClrMapping/>
-  </p:clrMapOvr>
-</p:sld>
-</file>
-
-<file path=ppt/slides/slide7.xml><?xml version="1.0" encoding="utf-8"?>
-<p:sld xmlns:a="http://schemas.openxmlformats.org/drawingml/2006/main" xmlns:r="http://schemas.openxmlformats.org/officeDocument/2006/relationships" xmlns:p="http://schemas.openxmlformats.org/presentationml/2006/main">
-  <p:cSld>
-    <p:spTree>
-      <p:nvGrpSpPr>
-        <p:cNvPr id="1" name=""/>
-        <p:cNvGrpSpPr/>
-        <p:nvPr/>
-      </p:nvGrpSpPr>
-      <p:grpSpPr>
-        <a:xfrm>
-          <a:off x="0" y="0"/>
-          <a:ext cx="0" cy="0"/>
-          <a:chOff x="0" y="0"/>
-          <a:chExt cx="0" cy="0"/>
-        </a:xfrm>
-      </p:grpSpPr>
-      <p:sp>
-        <p:nvSpPr>
-          <p:cNvPr id="2" name="Title 1">
-            <a:extLst>
-              <a:ext uri="{FF2B5EF4-FFF2-40B4-BE49-F238E27FC236}">
-                <a16:creationId xmlns:a16="http://schemas.microsoft.com/office/drawing/2014/main" id="{A402F935-7AD0-D15A-3968-91D3F935F439}"/>
-              </a:ext>
-            </a:extLst>
-          </p:cNvPr>
-          <p:cNvSpPr>
-            <a:spLocks noGrp="1"/>
-          </p:cNvSpPr>
-          <p:nvPr>
-            <p:ph type="title"/>
-          </p:nvPr>
-        </p:nvSpPr>
-        <p:spPr/>
-        <p:txBody>
-          <a:bodyPr/>
-          <a:lstStyle/>
-          <a:p>
-            <a:r>
-              <a:rPr lang="en-US" dirty="0" err="1"/>
-              <a:t>antupy</a:t>
-            </a:r>
-            <a:r>
-              <a:rPr lang="en-US" dirty="0"/>
-              <a:t> roadmap</a:t>
-            </a:r>
-            <a:endParaRPr lang="en-AU" dirty="0"/>
-          </a:p>
-        </p:txBody>
-      </p:sp>
-      <p:sp>
-        <p:nvSpPr>
-          <p:cNvPr id="3" name="Content Placeholder 2">
-            <a:extLst>
-              <a:ext uri="{FF2B5EF4-FFF2-40B4-BE49-F238E27FC236}">
-                <a16:creationId xmlns:a16="http://schemas.microsoft.com/office/drawing/2014/main" id="{BB7C6D76-08D1-11E9-67DC-F1DD43A604DC}"/>
-              </a:ext>
-            </a:extLst>
-          </p:cNvPr>
-          <p:cNvSpPr>
-            <a:spLocks noGrp="1"/>
-          </p:cNvSpPr>
-          <p:nvPr>
-            <p:ph idx="1"/>
-          </p:nvPr>
-        </p:nvSpPr>
-        <p:spPr/>
-        <p:txBody>
-          <a:bodyPr>
-            <a:normAutofit lnSpcReduction="10000"/>
-          </a:bodyPr>
-          <a:lstStyle/>
-          <a:p>
-            <a:r>
-              <a:rPr lang="en-US" dirty="0"/>
-              <a:t>dispatch model</a:t>
-            </a:r>
-          </a:p>
-          <a:p>
-            <a:r>
-              <a:rPr lang="en-US" dirty="0"/>
-              <a:t>create life-cycle analysis (.</a:t>
-            </a:r>
-            <a:r>
-              <a:rPr lang="en-US" dirty="0" err="1"/>
-              <a:t>lca</a:t>
-            </a:r>
-            <a:r>
-              <a:rPr lang="en-US" dirty="0"/>
-              <a:t>) module</a:t>
-            </a:r>
-          </a:p>
-          <a:p>
-            <a:r>
-              <a:rPr lang="en-US" dirty="0"/>
-              <a:t>create policy making process module</a:t>
-            </a:r>
-          </a:p>
-          <a:p>
-            <a:r>
-              <a:rPr lang="en-US" dirty="0"/>
-              <a:t>expand weather module</a:t>
-            </a:r>
-          </a:p>
-          <a:p>
-            <a:r>
-              <a:rPr lang="en-US" dirty="0"/>
-              <a:t>geo module (or </a:t>
-            </a:r>
-            <a:r>
-              <a:rPr lang="en-US" dirty="0" err="1"/>
-              <a:t>gis</a:t>
-            </a:r>
-            <a:r>
-              <a:rPr lang="en-US" dirty="0"/>
-              <a:t> module). integrate python with other open-source </a:t>
-            </a:r>
-            <a:r>
-              <a:rPr lang="en-US" dirty="0" err="1"/>
-              <a:t>gis</a:t>
-            </a:r>
-            <a:r>
-              <a:rPr lang="en-US" dirty="0"/>
-              <a:t> tools.</a:t>
-            </a:r>
-          </a:p>
-          <a:p>
-            <a:r>
-              <a:rPr lang="en-US" dirty="0"/>
-              <a:t>expand stochastic module.</a:t>
-            </a:r>
-          </a:p>
-          <a:p>
-            <a:r>
-              <a:rPr lang="en-US" dirty="0"/>
-              <a:t>develop full python</a:t>
-            </a:r>
-          </a:p>
-          <a:p>
-            <a:r>
-              <a:rPr lang="en-US" dirty="0"/>
-              <a:t>education module</a:t>
-            </a:r>
-          </a:p>
-        </p:txBody>
-      </p:sp>
-    </p:spTree>
-    <p:extLst>
-      <p:ext uri="{BB962C8B-B14F-4D97-AF65-F5344CB8AC3E}">
-        <p14:creationId xmlns:p14="http://schemas.microsoft.com/office/powerpoint/2010/main" val="2484413694"/>
-      </p:ext>
-    </p:extLst>
-  </p:cSld>
-  <p:clrMapOvr>
-    <a:masterClrMapping/>
-  </p:clrMapOvr>
-</p:sld>
-</file>
-
-<file path=ppt/slides/slide8.xml><?xml version="1.0" encoding="utf-8"?>
-<p:sld xmlns:a="http://schemas.openxmlformats.org/drawingml/2006/main" xmlns:r="http://schemas.openxmlformats.org/officeDocument/2006/relationships" xmlns:p="http://schemas.openxmlformats.org/presentationml/2006/main">
-  <p:cSld>
-    <p:spTree>
-      <p:nvGrpSpPr>
-        <p:cNvPr id="1" name=""/>
-        <p:cNvGrpSpPr/>
-        <p:nvPr/>
-      </p:nvGrpSpPr>
-      <p:grpSpPr>
-        <a:xfrm>
-          <a:off x="0" y="0"/>
-          <a:ext cx="0" cy="0"/>
-          <a:chOff x="0" y="0"/>
-          <a:chExt cx="0" cy="0"/>
-        </a:xfrm>
-      </p:grpSpPr>
-      <p:pic>
-        <p:nvPicPr>
-          <p:cNvPr id="5" name="Content Placeholder 4">
-            <a:extLst>
-              <a:ext uri="{FF2B5EF4-FFF2-40B4-BE49-F238E27FC236}">
-                <a16:creationId xmlns:a16="http://schemas.microsoft.com/office/drawing/2014/main" id="{9AC75E69-6F6E-2DEF-316C-345B0C23C294}"/>
-              </a:ext>
-            </a:extLst>
-          </p:cNvPr>
-          <p:cNvPicPr>
-            <a:picLocks noGrp="1" noChangeAspect="1"/>
-          </p:cNvPicPr>
-          <p:nvPr>
-            <p:ph idx="1"/>
-          </p:nvPr>
-        </p:nvPicPr>
-        <p:blipFill>
-          <a:blip r:embed="rId2"/>
-          <a:stretch>
-            <a:fillRect/>
-          </a:stretch>
-        </p:blipFill>
-        <p:spPr>
-          <a:xfrm>
-            <a:off x="466135" y="554182"/>
-            <a:ext cx="11259730" cy="3867708"/>
-          </a:xfrm>
-          <a:prstGeom prst="rect">
-            <a:avLst/>
-          </a:prstGeom>
-        </p:spPr>
-      </p:pic>
-    </p:spTree>
-    <p:extLst>
-      <p:ext uri="{BB962C8B-B14F-4D97-AF65-F5344CB8AC3E}">
-        <p14:creationId xmlns:p14="http://schemas.microsoft.com/office/powerpoint/2010/main" val="2359446929"/>
+        <p14:creationId xmlns:p14="http://schemas.microsoft.com/office/powerpoint/2010/main" val="2117738962"/>
       </p:ext>
     </p:extLst>
   </p:cSld>

--- a/tuts/prezzo/antupy.pptx
+++ b/tuts/prezzo/antupy.pptx
@@ -354,7 +354,7 @@
           <a:p>
             <a:fld id="{BA80F017-51D9-403D-A3B1-D86CBEE1772E}" type="datetimeFigureOut">
               <a:rPr lang="en-AU" smtClean="0"/>
-              <a:t>17/04/2026</a:t>
+              <a:t>5/05/2026</a:t>
             </a:fld>
             <a:endParaRPr lang="en-AU"/>
           </a:p>
@@ -554,7 +554,7 @@
           <a:p>
             <a:fld id="{BA80F017-51D9-403D-A3B1-D86CBEE1772E}" type="datetimeFigureOut">
               <a:rPr lang="en-AU" smtClean="0"/>
-              <a:t>17/04/2026</a:t>
+              <a:t>5/05/2026</a:t>
             </a:fld>
             <a:endParaRPr lang="en-AU"/>
           </a:p>
@@ -764,7 +764,7 @@
           <a:p>
             <a:fld id="{BA80F017-51D9-403D-A3B1-D86CBEE1772E}" type="datetimeFigureOut">
               <a:rPr lang="en-AU" smtClean="0"/>
-              <a:t>17/04/2026</a:t>
+              <a:t>5/05/2026</a:t>
             </a:fld>
             <a:endParaRPr lang="en-AU"/>
           </a:p>
@@ -964,7 +964,7 @@
           <a:p>
             <a:fld id="{BA80F017-51D9-403D-A3B1-D86CBEE1772E}" type="datetimeFigureOut">
               <a:rPr lang="en-AU" smtClean="0"/>
-              <a:t>17/04/2026</a:t>
+              <a:t>5/05/2026</a:t>
             </a:fld>
             <a:endParaRPr lang="en-AU"/>
           </a:p>
@@ -1240,7 +1240,7 @@
           <a:p>
             <a:fld id="{BA80F017-51D9-403D-A3B1-D86CBEE1772E}" type="datetimeFigureOut">
               <a:rPr lang="en-AU" smtClean="0"/>
-              <a:t>17/04/2026</a:t>
+              <a:t>5/05/2026</a:t>
             </a:fld>
             <a:endParaRPr lang="en-AU"/>
           </a:p>
@@ -1508,7 +1508,7 @@
           <a:p>
             <a:fld id="{BA80F017-51D9-403D-A3B1-D86CBEE1772E}" type="datetimeFigureOut">
               <a:rPr lang="en-AU" smtClean="0"/>
-              <a:t>17/04/2026</a:t>
+              <a:t>5/05/2026</a:t>
             </a:fld>
             <a:endParaRPr lang="en-AU"/>
           </a:p>
@@ -1923,7 +1923,7 @@
           <a:p>
             <a:fld id="{BA80F017-51D9-403D-A3B1-D86CBEE1772E}" type="datetimeFigureOut">
               <a:rPr lang="en-AU" smtClean="0"/>
-              <a:t>17/04/2026</a:t>
+              <a:t>5/05/2026</a:t>
             </a:fld>
             <a:endParaRPr lang="en-AU"/>
           </a:p>
@@ -2065,7 +2065,7 @@
           <a:p>
             <a:fld id="{BA80F017-51D9-403D-A3B1-D86CBEE1772E}" type="datetimeFigureOut">
               <a:rPr lang="en-AU" smtClean="0"/>
-              <a:t>17/04/2026</a:t>
+              <a:t>5/05/2026</a:t>
             </a:fld>
             <a:endParaRPr lang="en-AU"/>
           </a:p>
@@ -2178,7 +2178,7 @@
           <a:p>
             <a:fld id="{BA80F017-51D9-403D-A3B1-D86CBEE1772E}" type="datetimeFigureOut">
               <a:rPr lang="en-AU" smtClean="0"/>
-              <a:t>17/04/2026</a:t>
+              <a:t>5/05/2026</a:t>
             </a:fld>
             <a:endParaRPr lang="en-AU"/>
           </a:p>
@@ -2491,7 +2491,7 @@
           <a:p>
             <a:fld id="{BA80F017-51D9-403D-A3B1-D86CBEE1772E}" type="datetimeFigureOut">
               <a:rPr lang="en-AU" smtClean="0"/>
-              <a:t>17/04/2026</a:t>
+              <a:t>5/05/2026</a:t>
             </a:fld>
             <a:endParaRPr lang="en-AU"/>
           </a:p>
@@ -2780,7 +2780,7 @@
           <a:p>
             <a:fld id="{BA80F017-51D9-403D-A3B1-D86CBEE1772E}" type="datetimeFigureOut">
               <a:rPr lang="en-AU" smtClean="0"/>
-              <a:t>17/04/2026</a:t>
+              <a:t>5/05/2026</a:t>
             </a:fld>
             <a:endParaRPr lang="en-AU"/>
           </a:p>
@@ -3023,7 +3023,7 @@
           <a:p>
             <a:fld id="{BA80F017-51D9-403D-A3B1-D86CBEE1772E}" type="datetimeFigureOut">
               <a:rPr lang="en-AU" smtClean="0"/>
-              <a:t>17/04/2026</a:t>
+              <a:t>5/05/2026</a:t>
             </a:fld>
             <a:endParaRPr lang="en-AU"/>
           </a:p>
@@ -3824,7 +3824,7 @@
           <a:p>
             <a:r>
               <a:rPr lang="en-US" i="1" noProof="1"/>
-              <a:t>antü</a:t>
+              <a:t>antü-</a:t>
             </a:r>
             <a:r>
               <a:rPr lang="en-US" noProof="1"/>
@@ -3844,7 +3844,7 @@
           <a:p>
             <a:r>
               <a:rPr lang="en-US" i="1" noProof="1"/>
-              <a:t>py</a:t>
+              <a:t>-py</a:t>
             </a:r>
             <a:r>
               <a:rPr lang="en-US" noProof="1"/>
@@ -5944,7 +5944,7 @@
                     <a:schemeClr val="accent5"/>
                   </a:solidFill>
                 </a:rPr>
-                <a:t>Plant</a:t>
+                <a:t>Simulation / Plant</a:t>
               </a:r>
             </a:p>
           </p:txBody>
